--- a/data/archive/pulse_2026-03-03.pptx
+++ b/data/archive/pulse_2026-03-03.pptx
@@ -7,6 +7,32 @@
   <p:sldIdLst>
     <p:sldId id="256" r:id="rId7"/>
     <p:sldId id="257" r:id="rId8"/>
+    <p:sldId id="258" r:id="rId9"/>
+    <p:sldId id="259" r:id="rId10"/>
+    <p:sldId id="260" r:id="rId11"/>
+    <p:sldId id="261" r:id="rId12"/>
+    <p:sldId id="262" r:id="rId13"/>
+    <p:sldId id="263" r:id="rId14"/>
+    <p:sldId id="264" r:id="rId15"/>
+    <p:sldId id="265" r:id="rId16"/>
+    <p:sldId id="266" r:id="rId17"/>
+    <p:sldId id="267" r:id="rId18"/>
+    <p:sldId id="268" r:id="rId19"/>
+    <p:sldId id="269" r:id="rId20"/>
+    <p:sldId id="270" r:id="rId21"/>
+    <p:sldId id="271" r:id="rId22"/>
+    <p:sldId id="272" r:id="rId23"/>
+    <p:sldId id="273" r:id="rId24"/>
+    <p:sldId id="274" r:id="rId25"/>
+    <p:sldId id="275" r:id="rId26"/>
+    <p:sldId id="276" r:id="rId27"/>
+    <p:sldId id="277" r:id="rId28"/>
+    <p:sldId id="278" r:id="rId29"/>
+    <p:sldId id="279" r:id="rId30"/>
+    <p:sldId id="280" r:id="rId31"/>
+    <p:sldId id="281" r:id="rId32"/>
+    <p:sldId id="282" r:id="rId33"/>
+    <p:sldId id="283" r:id="rId34"/>
   </p:sldIdLst>
   <p:sldSz cx="12191695" cy="6858000" type="screen4x3"/>
   <p:notesSz cx="6858000" cy="9144000"/>
@@ -3256,6 +3282,2856 @@
 </p:sld>
 </file>
 
+<file path=ppt/slides/slide10.xml><?xml version="1.0" encoding="utf-8"?>
+<p:sld xmlns:a="http://schemas.openxmlformats.org/drawingml/2006/main" xmlns:p="http://schemas.openxmlformats.org/presentationml/2006/main" xmlns:r="http://schemas.openxmlformats.org/officeDocument/2006/relationships">
+  <p:cSld>
+    <p:bg>
+      <p:bgPr>
+        <a:solidFill>
+          <a:srgbClr val="08080C"/>
+        </a:solidFill>
+        <a:effectLst/>
+      </p:bgPr>
+    </p:bg>
+    <p:spTree>
+      <p:nvGrpSpPr>
+        <p:cNvPr id="1" name=""/>
+        <p:cNvGrpSpPr/>
+        <p:nvPr/>
+      </p:nvGrpSpPr>
+      <p:grpSpPr/>
+      <p:sp>
+        <p:nvSpPr>
+          <p:cNvPr id="2" name="Rectangle 1"/>
+          <p:cNvSpPr/>
+          <p:nvPr/>
+        </p:nvSpPr>
+        <p:spPr>
+          <a:xfrm>
+            <a:off x="0" y="365760"/>
+            <a:ext cx="12191695" cy="54864"/>
+          </a:xfrm>
+          <a:prstGeom prst="rect">
+            <a:avLst/>
+          </a:prstGeom>
+          <a:solidFill>
+            <a:srgbClr val="FFB72B"/>
+          </a:solidFill>
+          <a:ln>
+            <a:noFill/>
+          </a:ln>
+        </p:spPr>
+        <p:style>
+          <a:lnRef idx="1">
+            <a:schemeClr val="accent1"/>
+          </a:lnRef>
+          <a:fillRef idx="3">
+            <a:schemeClr val="accent1"/>
+          </a:fillRef>
+          <a:effectRef idx="2">
+            <a:schemeClr val="accent1"/>
+          </a:effectRef>
+          <a:fontRef idx="minor">
+            <a:schemeClr val="lt1"/>
+          </a:fontRef>
+        </p:style>
+        <p:txBody>
+          <a:bodyPr rtlCol="0" anchor="ctr"/>
+          <a:lstStyle/>
+          <a:p>
+            <a:pPr algn="ctr"/>
+          </a:p>
+        </p:txBody>
+      </p:sp>
+      <p:sp>
+        <p:nvSpPr>
+          <p:cNvPr id="3" name="TextBox 2"/>
+          <p:cNvSpPr txBox="1"/>
+          <p:nvPr/>
+        </p:nvSpPr>
+        <p:spPr>
+          <a:xfrm>
+            <a:off x="1097280" y="731520"/>
+            <a:ext cx="3657600" cy="365760"/>
+          </a:xfrm>
+          <a:prstGeom prst="rect">
+            <a:avLst/>
+          </a:prstGeom>
+          <a:noFill/>
+        </p:spPr>
+        <p:txBody>
+          <a:bodyPr wrap="none">
+            <a:spAutoFit/>
+          </a:bodyPr>
+          <a:lstStyle/>
+          <a:p>
+            <a:pPr algn="l">
+              <a:defRPr sz="1000" b="1">
+                <a:solidFill>
+                  <a:srgbClr val="FFB72B"/>
+                </a:solidFill>
+                <a:latin typeface="Calibri"/>
+              </a:defRPr>
+            </a:pPr>
+            <a:r>
+              <a:t>🎂  CELEBRATION</a:t>
+            </a:r>
+          </a:p>
+        </p:txBody>
+      </p:sp>
+      <p:sp>
+        <p:nvSpPr>
+          <p:cNvPr id="4" name="TextBox 3"/>
+          <p:cNvSpPr txBox="1"/>
+          <p:nvPr/>
+        </p:nvSpPr>
+        <p:spPr>
+          <a:xfrm>
+            <a:off x="1097280" y="1188720"/>
+            <a:ext cx="9966960" cy="731520"/>
+          </a:xfrm>
+          <a:prstGeom prst="rect">
+            <a:avLst/>
+          </a:prstGeom>
+          <a:noFill/>
+        </p:spPr>
+        <p:txBody>
+          <a:bodyPr wrap="square">
+            <a:spAutoFit/>
+          </a:bodyPr>
+          <a:lstStyle/>
+          <a:p>
+            <a:pPr algn="l">
+              <a:defRPr sz="3200" b="1" i="0">
+                <a:solidFill>
+                  <a:srgbClr val="FFB72B"/>
+                </a:solidFill>
+                <a:latin typeface="Calibri"/>
+              </a:defRPr>
+            </a:pPr>
+            <a:r>
+              <a:t>Happy Birthday!</a:t>
+            </a:r>
+          </a:p>
+        </p:txBody>
+      </p:sp>
+      <p:sp>
+        <p:nvSpPr>
+          <p:cNvPr id="5" name="TextBox 4"/>
+          <p:cNvSpPr txBox="1"/>
+          <p:nvPr/>
+        </p:nvSpPr>
+        <p:spPr>
+          <a:xfrm>
+            <a:off x="1097280" y="2103120"/>
+            <a:ext cx="9966960" cy="640080"/>
+          </a:xfrm>
+          <a:prstGeom prst="rect">
+            <a:avLst/>
+          </a:prstGeom>
+          <a:noFill/>
+        </p:spPr>
+        <p:txBody>
+          <a:bodyPr wrap="square">
+            <a:spAutoFit/>
+          </a:bodyPr>
+          <a:lstStyle/>
+          <a:p>
+            <a:pPr algn="l">
+              <a:defRPr sz="2800" b="1" i="0">
+                <a:solidFill>
+                  <a:srgbClr val="FFFFFF"/>
+                </a:solidFill>
+                <a:latin typeface="Calibri"/>
+              </a:defRPr>
+            </a:pPr>
+            <a:r>
+              <a:t>Francesco Cerigioni</a:t>
+            </a:r>
+          </a:p>
+        </p:txBody>
+      </p:sp>
+      <p:sp>
+        <p:nvSpPr>
+          <p:cNvPr id="6" name="TextBox 5"/>
+          <p:cNvSpPr txBox="1"/>
+          <p:nvPr/>
+        </p:nvSpPr>
+        <p:spPr>
+          <a:xfrm>
+            <a:off x="1097280" y="2743200"/>
+            <a:ext cx="9966960" cy="365760"/>
+          </a:xfrm>
+          <a:prstGeom prst="rect">
+            <a:avLst/>
+          </a:prstGeom>
+          <a:noFill/>
+        </p:spPr>
+        <p:txBody>
+          <a:bodyPr wrap="square">
+            <a:spAutoFit/>
+          </a:bodyPr>
+          <a:lstStyle/>
+          <a:p>
+            <a:pPr algn="l">
+              <a:defRPr sz="1400" b="0" i="0">
+                <a:solidFill>
+                  <a:srgbClr val="8F95A3"/>
+                </a:solidFill>
+                <a:latin typeface="Calibri"/>
+              </a:defRPr>
+            </a:pPr>
+            <a:r>
+              <a:t>March 03</a:t>
+            </a:r>
+          </a:p>
+        </p:txBody>
+      </p:sp>
+      <p:sp>
+        <p:nvSpPr>
+          <p:cNvPr id="7" name="TextBox 6"/>
+          <p:cNvSpPr txBox="1"/>
+          <p:nvPr/>
+        </p:nvSpPr>
+        <p:spPr>
+          <a:xfrm>
+            <a:off x="1097280" y="3291840"/>
+            <a:ext cx="9966960" cy="914400"/>
+          </a:xfrm>
+          <a:prstGeom prst="rect">
+            <a:avLst/>
+          </a:prstGeom>
+          <a:noFill/>
+        </p:spPr>
+        <p:txBody>
+          <a:bodyPr wrap="square">
+            <a:spAutoFit/>
+          </a:bodyPr>
+          <a:lstStyle/>
+          <a:p>
+            <a:pPr algn="l">
+              <a:defRPr sz="1600" b="0" i="0">
+                <a:solidFill>
+                  <a:srgbClr val="E2E2EA"/>
+                </a:solidFill>
+                <a:latin typeface="Calibri"/>
+              </a:defRPr>
+            </a:pPr>
+            <a:r>
+              <a:t>Wishing you an amazing day filled with joy and celebration!</a:t>
+            </a:r>
+          </a:p>
+        </p:txBody>
+      </p:sp>
+      <p:sp>
+        <p:nvSpPr>
+          <p:cNvPr id="8" name="TextBox 7"/>
+          <p:cNvSpPr txBox="1"/>
+          <p:nvPr/>
+        </p:nvSpPr>
+        <p:spPr>
+          <a:xfrm>
+            <a:off x="1097280" y="4572000"/>
+            <a:ext cx="9966960" cy="457200"/>
+          </a:xfrm>
+          <a:prstGeom prst="rect">
+            <a:avLst/>
+          </a:prstGeom>
+          <a:noFill/>
+        </p:spPr>
+        <p:txBody>
+          <a:bodyPr wrap="square">
+            <a:spAutoFit/>
+          </a:bodyPr>
+          <a:lstStyle/>
+          <a:p>
+            <a:pPr algn="l">
+              <a:defRPr sz="1400" b="0" i="1">
+                <a:solidFill>
+                  <a:srgbClr val="FFB72B"/>
+                </a:solidFill>
+                <a:latin typeface="Calibri"/>
+              </a:defRPr>
+            </a:pPr>
+            <a:r>
+              <a:t>With love, Your Appodeal Team 💜</a:t>
+            </a:r>
+          </a:p>
+        </p:txBody>
+      </p:sp>
+    </p:spTree>
+  </p:cSld>
+  <p:clrMapOvr>
+    <a:masterClrMapping/>
+  </p:clrMapOvr>
+</p:sld>
+</file>
+
+<file path=ppt/slides/slide11.xml><?xml version="1.0" encoding="utf-8"?>
+<p:sld xmlns:a="http://schemas.openxmlformats.org/drawingml/2006/main" xmlns:p="http://schemas.openxmlformats.org/presentationml/2006/main" xmlns:r="http://schemas.openxmlformats.org/officeDocument/2006/relationships">
+  <p:cSld>
+    <p:bg>
+      <p:bgPr>
+        <a:solidFill>
+          <a:srgbClr val="08080C"/>
+        </a:solidFill>
+        <a:effectLst/>
+      </p:bgPr>
+    </p:bg>
+    <p:spTree>
+      <p:nvGrpSpPr>
+        <p:cNvPr id="1" name=""/>
+        <p:cNvGrpSpPr/>
+        <p:nvPr/>
+      </p:nvGrpSpPr>
+      <p:grpSpPr/>
+      <p:sp>
+        <p:nvSpPr>
+          <p:cNvPr id="2" name="Rectangle 1"/>
+          <p:cNvSpPr/>
+          <p:nvPr/>
+        </p:nvSpPr>
+        <p:spPr>
+          <a:xfrm>
+            <a:off x="0" y="365760"/>
+            <a:ext cx="12191695" cy="54864"/>
+          </a:xfrm>
+          <a:prstGeom prst="rect">
+            <a:avLst/>
+          </a:prstGeom>
+          <a:solidFill>
+            <a:srgbClr val="FFB72B"/>
+          </a:solidFill>
+          <a:ln>
+            <a:noFill/>
+          </a:ln>
+        </p:spPr>
+        <p:style>
+          <a:lnRef idx="1">
+            <a:schemeClr val="accent1"/>
+          </a:lnRef>
+          <a:fillRef idx="3">
+            <a:schemeClr val="accent1"/>
+          </a:fillRef>
+          <a:effectRef idx="2">
+            <a:schemeClr val="accent1"/>
+          </a:effectRef>
+          <a:fontRef idx="minor">
+            <a:schemeClr val="lt1"/>
+          </a:fontRef>
+        </p:style>
+        <p:txBody>
+          <a:bodyPr rtlCol="0" anchor="ctr"/>
+          <a:lstStyle/>
+          <a:p>
+            <a:pPr algn="ctr"/>
+          </a:p>
+        </p:txBody>
+      </p:sp>
+      <p:sp>
+        <p:nvSpPr>
+          <p:cNvPr id="3" name="TextBox 2"/>
+          <p:cNvSpPr txBox="1"/>
+          <p:nvPr/>
+        </p:nvSpPr>
+        <p:spPr>
+          <a:xfrm>
+            <a:off x="1097280" y="731520"/>
+            <a:ext cx="3657600" cy="365760"/>
+          </a:xfrm>
+          <a:prstGeom prst="rect">
+            <a:avLst/>
+          </a:prstGeom>
+          <a:noFill/>
+        </p:spPr>
+        <p:txBody>
+          <a:bodyPr wrap="none">
+            <a:spAutoFit/>
+          </a:bodyPr>
+          <a:lstStyle/>
+          <a:p>
+            <a:pPr algn="l">
+              <a:defRPr sz="1000" b="1">
+                <a:solidFill>
+                  <a:srgbClr val="FFB72B"/>
+                </a:solidFill>
+                <a:latin typeface="Calibri"/>
+              </a:defRPr>
+            </a:pPr>
+            <a:r>
+              <a:t>🎂  CELEBRATION</a:t>
+            </a:r>
+          </a:p>
+        </p:txBody>
+      </p:sp>
+      <p:sp>
+        <p:nvSpPr>
+          <p:cNvPr id="4" name="TextBox 3"/>
+          <p:cNvSpPr txBox="1"/>
+          <p:nvPr/>
+        </p:nvSpPr>
+        <p:spPr>
+          <a:xfrm>
+            <a:off x="1097280" y="1188720"/>
+            <a:ext cx="9966960" cy="731520"/>
+          </a:xfrm>
+          <a:prstGeom prst="rect">
+            <a:avLst/>
+          </a:prstGeom>
+          <a:noFill/>
+        </p:spPr>
+        <p:txBody>
+          <a:bodyPr wrap="square">
+            <a:spAutoFit/>
+          </a:bodyPr>
+          <a:lstStyle/>
+          <a:p>
+            <a:pPr algn="l">
+              <a:defRPr sz="3200" b="1" i="0">
+                <a:solidFill>
+                  <a:srgbClr val="FFB72B"/>
+                </a:solidFill>
+                <a:latin typeface="Calibri"/>
+              </a:defRPr>
+            </a:pPr>
+            <a:r>
+              <a:t>Happy Birthday!</a:t>
+            </a:r>
+          </a:p>
+        </p:txBody>
+      </p:sp>
+      <p:sp>
+        <p:nvSpPr>
+          <p:cNvPr id="5" name="TextBox 4"/>
+          <p:cNvSpPr txBox="1"/>
+          <p:nvPr/>
+        </p:nvSpPr>
+        <p:spPr>
+          <a:xfrm>
+            <a:off x="1097280" y="2103120"/>
+            <a:ext cx="9966960" cy="640080"/>
+          </a:xfrm>
+          <a:prstGeom prst="rect">
+            <a:avLst/>
+          </a:prstGeom>
+          <a:noFill/>
+        </p:spPr>
+        <p:txBody>
+          <a:bodyPr wrap="square">
+            <a:spAutoFit/>
+          </a:bodyPr>
+          <a:lstStyle/>
+          <a:p>
+            <a:pPr algn="l">
+              <a:defRPr sz="2800" b="1" i="0">
+                <a:solidFill>
+                  <a:srgbClr val="FFFFFF"/>
+                </a:solidFill>
+                <a:latin typeface="Calibri"/>
+              </a:defRPr>
+            </a:pPr>
+            <a:r>
+              <a:t>Irina Koval</a:t>
+            </a:r>
+          </a:p>
+        </p:txBody>
+      </p:sp>
+      <p:sp>
+        <p:nvSpPr>
+          <p:cNvPr id="6" name="TextBox 5"/>
+          <p:cNvSpPr txBox="1"/>
+          <p:nvPr/>
+        </p:nvSpPr>
+        <p:spPr>
+          <a:xfrm>
+            <a:off x="1097280" y="2743200"/>
+            <a:ext cx="9966960" cy="365760"/>
+          </a:xfrm>
+          <a:prstGeom prst="rect">
+            <a:avLst/>
+          </a:prstGeom>
+          <a:noFill/>
+        </p:spPr>
+        <p:txBody>
+          <a:bodyPr wrap="square">
+            <a:spAutoFit/>
+          </a:bodyPr>
+          <a:lstStyle/>
+          <a:p>
+            <a:pPr algn="l">
+              <a:defRPr sz="1400" b="0" i="0">
+                <a:solidFill>
+                  <a:srgbClr val="8F95A3"/>
+                </a:solidFill>
+                <a:latin typeface="Calibri"/>
+              </a:defRPr>
+            </a:pPr>
+            <a:r>
+              <a:t>March 03</a:t>
+            </a:r>
+          </a:p>
+        </p:txBody>
+      </p:sp>
+      <p:sp>
+        <p:nvSpPr>
+          <p:cNvPr id="7" name="TextBox 6"/>
+          <p:cNvSpPr txBox="1"/>
+          <p:nvPr/>
+        </p:nvSpPr>
+        <p:spPr>
+          <a:xfrm>
+            <a:off x="1097280" y="3291840"/>
+            <a:ext cx="9966960" cy="914400"/>
+          </a:xfrm>
+          <a:prstGeom prst="rect">
+            <a:avLst/>
+          </a:prstGeom>
+          <a:noFill/>
+        </p:spPr>
+        <p:txBody>
+          <a:bodyPr wrap="square">
+            <a:spAutoFit/>
+          </a:bodyPr>
+          <a:lstStyle/>
+          <a:p>
+            <a:pPr algn="l">
+              <a:defRPr sz="1600" b="0" i="0">
+                <a:solidFill>
+                  <a:srgbClr val="E2E2EA"/>
+                </a:solidFill>
+                <a:latin typeface="Calibri"/>
+              </a:defRPr>
+            </a:pPr>
+            <a:r>
+              <a:t>Wishing you an amazing day filled with joy and celebration!</a:t>
+            </a:r>
+          </a:p>
+        </p:txBody>
+      </p:sp>
+      <p:sp>
+        <p:nvSpPr>
+          <p:cNvPr id="8" name="TextBox 7"/>
+          <p:cNvSpPr txBox="1"/>
+          <p:nvPr/>
+        </p:nvSpPr>
+        <p:spPr>
+          <a:xfrm>
+            <a:off x="1097280" y="4572000"/>
+            <a:ext cx="9966960" cy="457200"/>
+          </a:xfrm>
+          <a:prstGeom prst="rect">
+            <a:avLst/>
+          </a:prstGeom>
+          <a:noFill/>
+        </p:spPr>
+        <p:txBody>
+          <a:bodyPr wrap="square">
+            <a:spAutoFit/>
+          </a:bodyPr>
+          <a:lstStyle/>
+          <a:p>
+            <a:pPr algn="l">
+              <a:defRPr sz="1400" b="0" i="1">
+                <a:solidFill>
+                  <a:srgbClr val="FFB72B"/>
+                </a:solidFill>
+                <a:latin typeface="Calibri"/>
+              </a:defRPr>
+            </a:pPr>
+            <a:r>
+              <a:t>With love, Your Appodeal Team 💜</a:t>
+            </a:r>
+          </a:p>
+        </p:txBody>
+      </p:sp>
+    </p:spTree>
+  </p:cSld>
+  <p:clrMapOvr>
+    <a:masterClrMapping/>
+  </p:clrMapOvr>
+</p:sld>
+</file>
+
+<file path=ppt/slides/slide12.xml><?xml version="1.0" encoding="utf-8"?>
+<p:sld xmlns:a="http://schemas.openxmlformats.org/drawingml/2006/main" xmlns:p="http://schemas.openxmlformats.org/presentationml/2006/main" xmlns:r="http://schemas.openxmlformats.org/officeDocument/2006/relationships">
+  <p:cSld>
+    <p:bg>
+      <p:bgPr>
+        <a:solidFill>
+          <a:srgbClr val="08080C"/>
+        </a:solidFill>
+        <a:effectLst/>
+      </p:bgPr>
+    </p:bg>
+    <p:spTree>
+      <p:nvGrpSpPr>
+        <p:cNvPr id="1" name=""/>
+        <p:cNvGrpSpPr/>
+        <p:nvPr/>
+      </p:nvGrpSpPr>
+      <p:grpSpPr/>
+      <p:sp>
+        <p:nvSpPr>
+          <p:cNvPr id="2" name="Rectangle 1"/>
+          <p:cNvSpPr/>
+          <p:nvPr/>
+        </p:nvSpPr>
+        <p:spPr>
+          <a:xfrm>
+            <a:off x="0" y="365760"/>
+            <a:ext cx="12191695" cy="54864"/>
+          </a:xfrm>
+          <a:prstGeom prst="rect">
+            <a:avLst/>
+          </a:prstGeom>
+          <a:solidFill>
+            <a:srgbClr val="FFB72B"/>
+          </a:solidFill>
+          <a:ln>
+            <a:noFill/>
+          </a:ln>
+        </p:spPr>
+        <p:style>
+          <a:lnRef idx="1">
+            <a:schemeClr val="accent1"/>
+          </a:lnRef>
+          <a:fillRef idx="3">
+            <a:schemeClr val="accent1"/>
+          </a:fillRef>
+          <a:effectRef idx="2">
+            <a:schemeClr val="accent1"/>
+          </a:effectRef>
+          <a:fontRef idx="minor">
+            <a:schemeClr val="lt1"/>
+          </a:fontRef>
+        </p:style>
+        <p:txBody>
+          <a:bodyPr rtlCol="0" anchor="ctr"/>
+          <a:lstStyle/>
+          <a:p>
+            <a:pPr algn="ctr"/>
+          </a:p>
+        </p:txBody>
+      </p:sp>
+      <p:sp>
+        <p:nvSpPr>
+          <p:cNvPr id="3" name="TextBox 2"/>
+          <p:cNvSpPr txBox="1"/>
+          <p:nvPr/>
+        </p:nvSpPr>
+        <p:spPr>
+          <a:xfrm>
+            <a:off x="1097280" y="731520"/>
+            <a:ext cx="3657600" cy="365760"/>
+          </a:xfrm>
+          <a:prstGeom prst="rect">
+            <a:avLst/>
+          </a:prstGeom>
+          <a:noFill/>
+        </p:spPr>
+        <p:txBody>
+          <a:bodyPr wrap="none">
+            <a:spAutoFit/>
+          </a:bodyPr>
+          <a:lstStyle/>
+          <a:p>
+            <a:pPr algn="l">
+              <a:defRPr sz="1000" b="1">
+                <a:solidFill>
+                  <a:srgbClr val="FFB72B"/>
+                </a:solidFill>
+                <a:latin typeface="Calibri"/>
+              </a:defRPr>
+            </a:pPr>
+            <a:r>
+              <a:t>🎂  CELEBRATION</a:t>
+            </a:r>
+          </a:p>
+        </p:txBody>
+      </p:sp>
+      <p:sp>
+        <p:nvSpPr>
+          <p:cNvPr id="4" name="TextBox 3"/>
+          <p:cNvSpPr txBox="1"/>
+          <p:nvPr/>
+        </p:nvSpPr>
+        <p:spPr>
+          <a:xfrm>
+            <a:off x="1097280" y="1188720"/>
+            <a:ext cx="9966960" cy="731520"/>
+          </a:xfrm>
+          <a:prstGeom prst="rect">
+            <a:avLst/>
+          </a:prstGeom>
+          <a:noFill/>
+        </p:spPr>
+        <p:txBody>
+          <a:bodyPr wrap="square">
+            <a:spAutoFit/>
+          </a:bodyPr>
+          <a:lstStyle/>
+          <a:p>
+            <a:pPr algn="l">
+              <a:defRPr sz="3200" b="1" i="0">
+                <a:solidFill>
+                  <a:srgbClr val="FFB72B"/>
+                </a:solidFill>
+                <a:latin typeface="Calibri"/>
+              </a:defRPr>
+            </a:pPr>
+            <a:r>
+              <a:t>Happy Birthday!</a:t>
+            </a:r>
+          </a:p>
+        </p:txBody>
+      </p:sp>
+      <p:sp>
+        <p:nvSpPr>
+          <p:cNvPr id="5" name="TextBox 4"/>
+          <p:cNvSpPr txBox="1"/>
+          <p:nvPr/>
+        </p:nvSpPr>
+        <p:spPr>
+          <a:xfrm>
+            <a:off x="1097280" y="2103120"/>
+            <a:ext cx="9966960" cy="640080"/>
+          </a:xfrm>
+          <a:prstGeom prst="rect">
+            <a:avLst/>
+          </a:prstGeom>
+          <a:noFill/>
+        </p:spPr>
+        <p:txBody>
+          <a:bodyPr wrap="square">
+            <a:spAutoFit/>
+          </a:bodyPr>
+          <a:lstStyle/>
+          <a:p>
+            <a:pPr algn="l">
+              <a:defRPr sz="2800" b="1" i="0">
+                <a:solidFill>
+                  <a:srgbClr val="FFFFFF"/>
+                </a:solidFill>
+                <a:latin typeface="Calibri"/>
+              </a:defRPr>
+            </a:pPr>
+            <a:r>
+              <a:t>Giulia Galvani</a:t>
+            </a:r>
+          </a:p>
+        </p:txBody>
+      </p:sp>
+      <p:sp>
+        <p:nvSpPr>
+          <p:cNvPr id="6" name="TextBox 5"/>
+          <p:cNvSpPr txBox="1"/>
+          <p:nvPr/>
+        </p:nvSpPr>
+        <p:spPr>
+          <a:xfrm>
+            <a:off x="1097280" y="2743200"/>
+            <a:ext cx="9966960" cy="365760"/>
+          </a:xfrm>
+          <a:prstGeom prst="rect">
+            <a:avLst/>
+          </a:prstGeom>
+          <a:noFill/>
+        </p:spPr>
+        <p:txBody>
+          <a:bodyPr wrap="square">
+            <a:spAutoFit/>
+          </a:bodyPr>
+          <a:lstStyle/>
+          <a:p>
+            <a:pPr algn="l">
+              <a:defRPr sz="1400" b="0" i="0">
+                <a:solidFill>
+                  <a:srgbClr val="8F95A3"/>
+                </a:solidFill>
+                <a:latin typeface="Calibri"/>
+              </a:defRPr>
+            </a:pPr>
+            <a:r>
+              <a:t>March 03</a:t>
+            </a:r>
+          </a:p>
+        </p:txBody>
+      </p:sp>
+      <p:sp>
+        <p:nvSpPr>
+          <p:cNvPr id="7" name="TextBox 6"/>
+          <p:cNvSpPr txBox="1"/>
+          <p:nvPr/>
+        </p:nvSpPr>
+        <p:spPr>
+          <a:xfrm>
+            <a:off x="1097280" y="3291840"/>
+            <a:ext cx="9966960" cy="914400"/>
+          </a:xfrm>
+          <a:prstGeom prst="rect">
+            <a:avLst/>
+          </a:prstGeom>
+          <a:noFill/>
+        </p:spPr>
+        <p:txBody>
+          <a:bodyPr wrap="square">
+            <a:spAutoFit/>
+          </a:bodyPr>
+          <a:lstStyle/>
+          <a:p>
+            <a:pPr algn="l">
+              <a:defRPr sz="1600" b="0" i="0">
+                <a:solidFill>
+                  <a:srgbClr val="E2E2EA"/>
+                </a:solidFill>
+                <a:latin typeface="Calibri"/>
+              </a:defRPr>
+            </a:pPr>
+            <a:r>
+              <a:t>Wishing you an amazing day filled with joy and celebration!</a:t>
+            </a:r>
+          </a:p>
+        </p:txBody>
+      </p:sp>
+      <p:sp>
+        <p:nvSpPr>
+          <p:cNvPr id="8" name="TextBox 7"/>
+          <p:cNvSpPr txBox="1"/>
+          <p:nvPr/>
+        </p:nvSpPr>
+        <p:spPr>
+          <a:xfrm>
+            <a:off x="1097280" y="4572000"/>
+            <a:ext cx="9966960" cy="457200"/>
+          </a:xfrm>
+          <a:prstGeom prst="rect">
+            <a:avLst/>
+          </a:prstGeom>
+          <a:noFill/>
+        </p:spPr>
+        <p:txBody>
+          <a:bodyPr wrap="square">
+            <a:spAutoFit/>
+          </a:bodyPr>
+          <a:lstStyle/>
+          <a:p>
+            <a:pPr algn="l">
+              <a:defRPr sz="1400" b="0" i="1">
+                <a:solidFill>
+                  <a:srgbClr val="FFB72B"/>
+                </a:solidFill>
+                <a:latin typeface="Calibri"/>
+              </a:defRPr>
+            </a:pPr>
+            <a:r>
+              <a:t>With love, Your Appodeal Team 💜</a:t>
+            </a:r>
+          </a:p>
+        </p:txBody>
+      </p:sp>
+    </p:spTree>
+  </p:cSld>
+  <p:clrMapOvr>
+    <a:masterClrMapping/>
+  </p:clrMapOvr>
+</p:sld>
+</file>
+
+<file path=ppt/slides/slide13.xml><?xml version="1.0" encoding="utf-8"?>
+<p:sld xmlns:a="http://schemas.openxmlformats.org/drawingml/2006/main" xmlns:p="http://schemas.openxmlformats.org/presentationml/2006/main" xmlns:r="http://schemas.openxmlformats.org/officeDocument/2006/relationships">
+  <p:cSld>
+    <p:bg>
+      <p:bgPr>
+        <a:solidFill>
+          <a:srgbClr val="08080C"/>
+        </a:solidFill>
+        <a:effectLst/>
+      </p:bgPr>
+    </p:bg>
+    <p:spTree>
+      <p:nvGrpSpPr>
+        <p:cNvPr id="1" name=""/>
+        <p:cNvGrpSpPr/>
+        <p:nvPr/>
+      </p:nvGrpSpPr>
+      <p:grpSpPr/>
+      <p:sp>
+        <p:nvSpPr>
+          <p:cNvPr id="2" name="Rectangle 1"/>
+          <p:cNvSpPr/>
+          <p:nvPr/>
+        </p:nvSpPr>
+        <p:spPr>
+          <a:xfrm>
+            <a:off x="0" y="365760"/>
+            <a:ext cx="12191695" cy="54864"/>
+          </a:xfrm>
+          <a:prstGeom prst="rect">
+            <a:avLst/>
+          </a:prstGeom>
+          <a:solidFill>
+            <a:srgbClr val="FFB72B"/>
+          </a:solidFill>
+          <a:ln>
+            <a:noFill/>
+          </a:ln>
+        </p:spPr>
+        <p:style>
+          <a:lnRef idx="1">
+            <a:schemeClr val="accent1"/>
+          </a:lnRef>
+          <a:fillRef idx="3">
+            <a:schemeClr val="accent1"/>
+          </a:fillRef>
+          <a:effectRef idx="2">
+            <a:schemeClr val="accent1"/>
+          </a:effectRef>
+          <a:fontRef idx="minor">
+            <a:schemeClr val="lt1"/>
+          </a:fontRef>
+        </p:style>
+        <p:txBody>
+          <a:bodyPr rtlCol="0" anchor="ctr"/>
+          <a:lstStyle/>
+          <a:p>
+            <a:pPr algn="ctr"/>
+          </a:p>
+        </p:txBody>
+      </p:sp>
+      <p:sp>
+        <p:nvSpPr>
+          <p:cNvPr id="3" name="TextBox 2"/>
+          <p:cNvSpPr txBox="1"/>
+          <p:nvPr/>
+        </p:nvSpPr>
+        <p:spPr>
+          <a:xfrm>
+            <a:off x="1097280" y="731520"/>
+            <a:ext cx="3657600" cy="365760"/>
+          </a:xfrm>
+          <a:prstGeom prst="rect">
+            <a:avLst/>
+          </a:prstGeom>
+          <a:noFill/>
+        </p:spPr>
+        <p:txBody>
+          <a:bodyPr wrap="none">
+            <a:spAutoFit/>
+          </a:bodyPr>
+          <a:lstStyle/>
+          <a:p>
+            <a:pPr algn="l">
+              <a:defRPr sz="1000" b="1">
+                <a:solidFill>
+                  <a:srgbClr val="FFB72B"/>
+                </a:solidFill>
+                <a:latin typeface="Calibri"/>
+              </a:defRPr>
+            </a:pPr>
+            <a:r>
+              <a:t>🎂  CELEBRATION</a:t>
+            </a:r>
+          </a:p>
+        </p:txBody>
+      </p:sp>
+      <p:sp>
+        <p:nvSpPr>
+          <p:cNvPr id="4" name="TextBox 3"/>
+          <p:cNvSpPr txBox="1"/>
+          <p:nvPr/>
+        </p:nvSpPr>
+        <p:spPr>
+          <a:xfrm>
+            <a:off x="1097280" y="1188720"/>
+            <a:ext cx="9966960" cy="731520"/>
+          </a:xfrm>
+          <a:prstGeom prst="rect">
+            <a:avLst/>
+          </a:prstGeom>
+          <a:noFill/>
+        </p:spPr>
+        <p:txBody>
+          <a:bodyPr wrap="square">
+            <a:spAutoFit/>
+          </a:bodyPr>
+          <a:lstStyle/>
+          <a:p>
+            <a:pPr algn="l">
+              <a:defRPr sz="3200" b="1" i="0">
+                <a:solidFill>
+                  <a:srgbClr val="FFB72B"/>
+                </a:solidFill>
+                <a:latin typeface="Calibri"/>
+              </a:defRPr>
+            </a:pPr>
+            <a:r>
+              <a:t>Happy Birthday!</a:t>
+            </a:r>
+          </a:p>
+        </p:txBody>
+      </p:sp>
+      <p:sp>
+        <p:nvSpPr>
+          <p:cNvPr id="5" name="TextBox 4"/>
+          <p:cNvSpPr txBox="1"/>
+          <p:nvPr/>
+        </p:nvSpPr>
+        <p:spPr>
+          <a:xfrm>
+            <a:off x="1097280" y="2103120"/>
+            <a:ext cx="9966960" cy="640080"/>
+          </a:xfrm>
+          <a:prstGeom prst="rect">
+            <a:avLst/>
+          </a:prstGeom>
+          <a:noFill/>
+        </p:spPr>
+        <p:txBody>
+          <a:bodyPr wrap="square">
+            <a:spAutoFit/>
+          </a:bodyPr>
+          <a:lstStyle/>
+          <a:p>
+            <a:pPr algn="l">
+              <a:defRPr sz="2800" b="1" i="0">
+                <a:solidFill>
+                  <a:srgbClr val="FFFFFF"/>
+                </a:solidFill>
+                <a:latin typeface="Calibri"/>
+              </a:defRPr>
+            </a:pPr>
+            <a:r>
+              <a:t>Yanina Lozben</a:t>
+            </a:r>
+          </a:p>
+        </p:txBody>
+      </p:sp>
+      <p:sp>
+        <p:nvSpPr>
+          <p:cNvPr id="6" name="TextBox 5"/>
+          <p:cNvSpPr txBox="1"/>
+          <p:nvPr/>
+        </p:nvSpPr>
+        <p:spPr>
+          <a:xfrm>
+            <a:off x="1097280" y="2743200"/>
+            <a:ext cx="9966960" cy="365760"/>
+          </a:xfrm>
+          <a:prstGeom prst="rect">
+            <a:avLst/>
+          </a:prstGeom>
+          <a:noFill/>
+        </p:spPr>
+        <p:txBody>
+          <a:bodyPr wrap="square">
+            <a:spAutoFit/>
+          </a:bodyPr>
+          <a:lstStyle/>
+          <a:p>
+            <a:pPr algn="l">
+              <a:defRPr sz="1400" b="0" i="0">
+                <a:solidFill>
+                  <a:srgbClr val="8F95A3"/>
+                </a:solidFill>
+                <a:latin typeface="Calibri"/>
+              </a:defRPr>
+            </a:pPr>
+            <a:r>
+              <a:t>March 03</a:t>
+            </a:r>
+          </a:p>
+        </p:txBody>
+      </p:sp>
+      <p:sp>
+        <p:nvSpPr>
+          <p:cNvPr id="7" name="TextBox 6"/>
+          <p:cNvSpPr txBox="1"/>
+          <p:nvPr/>
+        </p:nvSpPr>
+        <p:spPr>
+          <a:xfrm>
+            <a:off x="1097280" y="3291840"/>
+            <a:ext cx="9966960" cy="914400"/>
+          </a:xfrm>
+          <a:prstGeom prst="rect">
+            <a:avLst/>
+          </a:prstGeom>
+          <a:noFill/>
+        </p:spPr>
+        <p:txBody>
+          <a:bodyPr wrap="square">
+            <a:spAutoFit/>
+          </a:bodyPr>
+          <a:lstStyle/>
+          <a:p>
+            <a:pPr algn="l">
+              <a:defRPr sz="1600" b="0" i="0">
+                <a:solidFill>
+                  <a:srgbClr val="E2E2EA"/>
+                </a:solidFill>
+                <a:latin typeface="Calibri"/>
+              </a:defRPr>
+            </a:pPr>
+            <a:r>
+              <a:t>Wishing you an amazing day filled with joy and celebration!</a:t>
+            </a:r>
+          </a:p>
+        </p:txBody>
+      </p:sp>
+      <p:sp>
+        <p:nvSpPr>
+          <p:cNvPr id="8" name="TextBox 7"/>
+          <p:cNvSpPr txBox="1"/>
+          <p:nvPr/>
+        </p:nvSpPr>
+        <p:spPr>
+          <a:xfrm>
+            <a:off x="1097280" y="4572000"/>
+            <a:ext cx="9966960" cy="457200"/>
+          </a:xfrm>
+          <a:prstGeom prst="rect">
+            <a:avLst/>
+          </a:prstGeom>
+          <a:noFill/>
+        </p:spPr>
+        <p:txBody>
+          <a:bodyPr wrap="square">
+            <a:spAutoFit/>
+          </a:bodyPr>
+          <a:lstStyle/>
+          <a:p>
+            <a:pPr algn="l">
+              <a:defRPr sz="1400" b="0" i="1">
+                <a:solidFill>
+                  <a:srgbClr val="FFB72B"/>
+                </a:solidFill>
+                <a:latin typeface="Calibri"/>
+              </a:defRPr>
+            </a:pPr>
+            <a:r>
+              <a:t>With love, Your Appodeal Team 💜</a:t>
+            </a:r>
+          </a:p>
+        </p:txBody>
+      </p:sp>
+    </p:spTree>
+  </p:cSld>
+  <p:clrMapOvr>
+    <a:masterClrMapping/>
+  </p:clrMapOvr>
+</p:sld>
+</file>
+
+<file path=ppt/slides/slide14.xml><?xml version="1.0" encoding="utf-8"?>
+<p:sld xmlns:a="http://schemas.openxmlformats.org/drawingml/2006/main" xmlns:p="http://schemas.openxmlformats.org/presentationml/2006/main" xmlns:r="http://schemas.openxmlformats.org/officeDocument/2006/relationships">
+  <p:cSld>
+    <p:bg>
+      <p:bgPr>
+        <a:solidFill>
+          <a:srgbClr val="08080C"/>
+        </a:solidFill>
+        <a:effectLst/>
+      </p:bgPr>
+    </p:bg>
+    <p:spTree>
+      <p:nvGrpSpPr>
+        <p:cNvPr id="1" name=""/>
+        <p:cNvGrpSpPr/>
+        <p:nvPr/>
+      </p:nvGrpSpPr>
+      <p:grpSpPr/>
+      <p:sp>
+        <p:nvSpPr>
+          <p:cNvPr id="2" name="Rectangle 1"/>
+          <p:cNvSpPr/>
+          <p:nvPr/>
+        </p:nvSpPr>
+        <p:spPr>
+          <a:xfrm>
+            <a:off x="0" y="365760"/>
+            <a:ext cx="12191695" cy="54864"/>
+          </a:xfrm>
+          <a:prstGeom prst="rect">
+            <a:avLst/>
+          </a:prstGeom>
+          <a:solidFill>
+            <a:srgbClr val="FFB72B"/>
+          </a:solidFill>
+          <a:ln>
+            <a:noFill/>
+          </a:ln>
+        </p:spPr>
+        <p:style>
+          <a:lnRef idx="1">
+            <a:schemeClr val="accent1"/>
+          </a:lnRef>
+          <a:fillRef idx="3">
+            <a:schemeClr val="accent1"/>
+          </a:fillRef>
+          <a:effectRef idx="2">
+            <a:schemeClr val="accent1"/>
+          </a:effectRef>
+          <a:fontRef idx="minor">
+            <a:schemeClr val="lt1"/>
+          </a:fontRef>
+        </p:style>
+        <p:txBody>
+          <a:bodyPr rtlCol="0" anchor="ctr"/>
+          <a:lstStyle/>
+          <a:p>
+            <a:pPr algn="ctr"/>
+          </a:p>
+        </p:txBody>
+      </p:sp>
+      <p:sp>
+        <p:nvSpPr>
+          <p:cNvPr id="3" name="TextBox 2"/>
+          <p:cNvSpPr txBox="1"/>
+          <p:nvPr/>
+        </p:nvSpPr>
+        <p:spPr>
+          <a:xfrm>
+            <a:off x="1097280" y="731520"/>
+            <a:ext cx="3657600" cy="365760"/>
+          </a:xfrm>
+          <a:prstGeom prst="rect">
+            <a:avLst/>
+          </a:prstGeom>
+          <a:noFill/>
+        </p:spPr>
+        <p:txBody>
+          <a:bodyPr wrap="none">
+            <a:spAutoFit/>
+          </a:bodyPr>
+          <a:lstStyle/>
+          <a:p>
+            <a:pPr algn="l">
+              <a:defRPr sz="1000" b="1">
+                <a:solidFill>
+                  <a:srgbClr val="FFB72B"/>
+                </a:solidFill>
+                <a:latin typeface="Calibri"/>
+              </a:defRPr>
+            </a:pPr>
+            <a:r>
+              <a:t>🎂  CELEBRATION</a:t>
+            </a:r>
+          </a:p>
+        </p:txBody>
+      </p:sp>
+      <p:sp>
+        <p:nvSpPr>
+          <p:cNvPr id="4" name="TextBox 3"/>
+          <p:cNvSpPr txBox="1"/>
+          <p:nvPr/>
+        </p:nvSpPr>
+        <p:spPr>
+          <a:xfrm>
+            <a:off x="1097280" y="1188720"/>
+            <a:ext cx="9966960" cy="731520"/>
+          </a:xfrm>
+          <a:prstGeom prst="rect">
+            <a:avLst/>
+          </a:prstGeom>
+          <a:noFill/>
+        </p:spPr>
+        <p:txBody>
+          <a:bodyPr wrap="square">
+            <a:spAutoFit/>
+          </a:bodyPr>
+          <a:lstStyle/>
+          <a:p>
+            <a:pPr algn="l">
+              <a:defRPr sz="3200" b="1" i="0">
+                <a:solidFill>
+                  <a:srgbClr val="FFB72B"/>
+                </a:solidFill>
+                <a:latin typeface="Calibri"/>
+              </a:defRPr>
+            </a:pPr>
+            <a:r>
+              <a:t>Happy Birthday!</a:t>
+            </a:r>
+          </a:p>
+        </p:txBody>
+      </p:sp>
+      <p:sp>
+        <p:nvSpPr>
+          <p:cNvPr id="5" name="TextBox 4"/>
+          <p:cNvSpPr txBox="1"/>
+          <p:nvPr/>
+        </p:nvSpPr>
+        <p:spPr>
+          <a:xfrm>
+            <a:off x="1097280" y="2103120"/>
+            <a:ext cx="9966960" cy="640080"/>
+          </a:xfrm>
+          <a:prstGeom prst="rect">
+            <a:avLst/>
+          </a:prstGeom>
+          <a:noFill/>
+        </p:spPr>
+        <p:txBody>
+          <a:bodyPr wrap="square">
+            <a:spAutoFit/>
+          </a:bodyPr>
+          <a:lstStyle/>
+          <a:p>
+            <a:pPr algn="l">
+              <a:defRPr sz="2800" b="1" i="0">
+                <a:solidFill>
+                  <a:srgbClr val="FFFFFF"/>
+                </a:solidFill>
+                <a:latin typeface="Calibri"/>
+              </a:defRPr>
+            </a:pPr>
+            <a:r>
+              <a:t>Olga Petriakova</a:t>
+            </a:r>
+          </a:p>
+        </p:txBody>
+      </p:sp>
+      <p:sp>
+        <p:nvSpPr>
+          <p:cNvPr id="6" name="TextBox 5"/>
+          <p:cNvSpPr txBox="1"/>
+          <p:nvPr/>
+        </p:nvSpPr>
+        <p:spPr>
+          <a:xfrm>
+            <a:off x="1097280" y="2743200"/>
+            <a:ext cx="9966960" cy="365760"/>
+          </a:xfrm>
+          <a:prstGeom prst="rect">
+            <a:avLst/>
+          </a:prstGeom>
+          <a:noFill/>
+        </p:spPr>
+        <p:txBody>
+          <a:bodyPr wrap="square">
+            <a:spAutoFit/>
+          </a:bodyPr>
+          <a:lstStyle/>
+          <a:p>
+            <a:pPr algn="l">
+              <a:defRPr sz="1400" b="0" i="0">
+                <a:solidFill>
+                  <a:srgbClr val="8F95A3"/>
+                </a:solidFill>
+                <a:latin typeface="Calibri"/>
+              </a:defRPr>
+            </a:pPr>
+            <a:r>
+              <a:t>March 03</a:t>
+            </a:r>
+          </a:p>
+        </p:txBody>
+      </p:sp>
+      <p:sp>
+        <p:nvSpPr>
+          <p:cNvPr id="7" name="TextBox 6"/>
+          <p:cNvSpPr txBox="1"/>
+          <p:nvPr/>
+        </p:nvSpPr>
+        <p:spPr>
+          <a:xfrm>
+            <a:off x="1097280" y="3291840"/>
+            <a:ext cx="9966960" cy="914400"/>
+          </a:xfrm>
+          <a:prstGeom prst="rect">
+            <a:avLst/>
+          </a:prstGeom>
+          <a:noFill/>
+        </p:spPr>
+        <p:txBody>
+          <a:bodyPr wrap="square">
+            <a:spAutoFit/>
+          </a:bodyPr>
+          <a:lstStyle/>
+          <a:p>
+            <a:pPr algn="l">
+              <a:defRPr sz="1600" b="0" i="0">
+                <a:solidFill>
+                  <a:srgbClr val="E2E2EA"/>
+                </a:solidFill>
+                <a:latin typeface="Calibri"/>
+              </a:defRPr>
+            </a:pPr>
+            <a:r>
+              <a:t>Wishing you an amazing day filled with joy and celebration!</a:t>
+            </a:r>
+          </a:p>
+        </p:txBody>
+      </p:sp>
+      <p:sp>
+        <p:nvSpPr>
+          <p:cNvPr id="8" name="TextBox 7"/>
+          <p:cNvSpPr txBox="1"/>
+          <p:nvPr/>
+        </p:nvSpPr>
+        <p:spPr>
+          <a:xfrm>
+            <a:off x="1097280" y="4572000"/>
+            <a:ext cx="9966960" cy="457200"/>
+          </a:xfrm>
+          <a:prstGeom prst="rect">
+            <a:avLst/>
+          </a:prstGeom>
+          <a:noFill/>
+        </p:spPr>
+        <p:txBody>
+          <a:bodyPr wrap="square">
+            <a:spAutoFit/>
+          </a:bodyPr>
+          <a:lstStyle/>
+          <a:p>
+            <a:pPr algn="l">
+              <a:defRPr sz="1400" b="0" i="1">
+                <a:solidFill>
+                  <a:srgbClr val="FFB72B"/>
+                </a:solidFill>
+                <a:latin typeface="Calibri"/>
+              </a:defRPr>
+            </a:pPr>
+            <a:r>
+              <a:t>With love, Your Appodeal Team 💜</a:t>
+            </a:r>
+          </a:p>
+        </p:txBody>
+      </p:sp>
+    </p:spTree>
+  </p:cSld>
+  <p:clrMapOvr>
+    <a:masterClrMapping/>
+  </p:clrMapOvr>
+</p:sld>
+</file>
+
+<file path=ppt/slides/slide15.xml><?xml version="1.0" encoding="utf-8"?>
+<p:sld xmlns:a="http://schemas.openxmlformats.org/drawingml/2006/main" xmlns:p="http://schemas.openxmlformats.org/presentationml/2006/main" xmlns:r="http://schemas.openxmlformats.org/officeDocument/2006/relationships">
+  <p:cSld>
+    <p:bg>
+      <p:bgPr>
+        <a:solidFill>
+          <a:srgbClr val="08080C"/>
+        </a:solidFill>
+        <a:effectLst/>
+      </p:bgPr>
+    </p:bg>
+    <p:spTree>
+      <p:nvGrpSpPr>
+        <p:cNvPr id="1" name=""/>
+        <p:cNvGrpSpPr/>
+        <p:nvPr/>
+      </p:nvGrpSpPr>
+      <p:grpSpPr/>
+      <p:sp>
+        <p:nvSpPr>
+          <p:cNvPr id="2" name="Rectangle 1"/>
+          <p:cNvSpPr/>
+          <p:nvPr/>
+        </p:nvSpPr>
+        <p:spPr>
+          <a:xfrm>
+            <a:off x="0" y="365760"/>
+            <a:ext cx="12191695" cy="54864"/>
+          </a:xfrm>
+          <a:prstGeom prst="rect">
+            <a:avLst/>
+          </a:prstGeom>
+          <a:solidFill>
+            <a:srgbClr val="FFB72B"/>
+          </a:solidFill>
+          <a:ln>
+            <a:noFill/>
+          </a:ln>
+        </p:spPr>
+        <p:style>
+          <a:lnRef idx="1">
+            <a:schemeClr val="accent1"/>
+          </a:lnRef>
+          <a:fillRef idx="3">
+            <a:schemeClr val="accent1"/>
+          </a:fillRef>
+          <a:effectRef idx="2">
+            <a:schemeClr val="accent1"/>
+          </a:effectRef>
+          <a:fontRef idx="minor">
+            <a:schemeClr val="lt1"/>
+          </a:fontRef>
+        </p:style>
+        <p:txBody>
+          <a:bodyPr rtlCol="0" anchor="ctr"/>
+          <a:lstStyle/>
+          <a:p>
+            <a:pPr algn="ctr"/>
+          </a:p>
+        </p:txBody>
+      </p:sp>
+      <p:sp>
+        <p:nvSpPr>
+          <p:cNvPr id="3" name="TextBox 2"/>
+          <p:cNvSpPr txBox="1"/>
+          <p:nvPr/>
+        </p:nvSpPr>
+        <p:spPr>
+          <a:xfrm>
+            <a:off x="1097280" y="731520"/>
+            <a:ext cx="3657600" cy="365760"/>
+          </a:xfrm>
+          <a:prstGeom prst="rect">
+            <a:avLst/>
+          </a:prstGeom>
+          <a:noFill/>
+        </p:spPr>
+        <p:txBody>
+          <a:bodyPr wrap="none">
+            <a:spAutoFit/>
+          </a:bodyPr>
+          <a:lstStyle/>
+          <a:p>
+            <a:pPr algn="l">
+              <a:defRPr sz="1000" b="1">
+                <a:solidFill>
+                  <a:srgbClr val="FFB72B"/>
+                </a:solidFill>
+                <a:latin typeface="Calibri"/>
+              </a:defRPr>
+            </a:pPr>
+            <a:r>
+              <a:t>🎂  CELEBRATION</a:t>
+            </a:r>
+          </a:p>
+        </p:txBody>
+      </p:sp>
+      <p:sp>
+        <p:nvSpPr>
+          <p:cNvPr id="4" name="TextBox 3"/>
+          <p:cNvSpPr txBox="1"/>
+          <p:nvPr/>
+        </p:nvSpPr>
+        <p:spPr>
+          <a:xfrm>
+            <a:off x="1097280" y="1188720"/>
+            <a:ext cx="9966960" cy="731520"/>
+          </a:xfrm>
+          <a:prstGeom prst="rect">
+            <a:avLst/>
+          </a:prstGeom>
+          <a:noFill/>
+        </p:spPr>
+        <p:txBody>
+          <a:bodyPr wrap="square">
+            <a:spAutoFit/>
+          </a:bodyPr>
+          <a:lstStyle/>
+          <a:p>
+            <a:pPr algn="l">
+              <a:defRPr sz="3200" b="1" i="0">
+                <a:solidFill>
+                  <a:srgbClr val="FFB72B"/>
+                </a:solidFill>
+                <a:latin typeface="Calibri"/>
+              </a:defRPr>
+            </a:pPr>
+            <a:r>
+              <a:t>Happy Birthday!</a:t>
+            </a:r>
+          </a:p>
+        </p:txBody>
+      </p:sp>
+      <p:sp>
+        <p:nvSpPr>
+          <p:cNvPr id="5" name="TextBox 4"/>
+          <p:cNvSpPr txBox="1"/>
+          <p:nvPr/>
+        </p:nvSpPr>
+        <p:spPr>
+          <a:xfrm>
+            <a:off x="1097280" y="2103120"/>
+            <a:ext cx="9966960" cy="640080"/>
+          </a:xfrm>
+          <a:prstGeom prst="rect">
+            <a:avLst/>
+          </a:prstGeom>
+          <a:noFill/>
+        </p:spPr>
+        <p:txBody>
+          <a:bodyPr wrap="square">
+            <a:spAutoFit/>
+          </a:bodyPr>
+          <a:lstStyle/>
+          <a:p>
+            <a:pPr algn="l">
+              <a:defRPr sz="2800" b="1" i="0">
+                <a:solidFill>
+                  <a:srgbClr val="FFFFFF"/>
+                </a:solidFill>
+                <a:latin typeface="Calibri"/>
+              </a:defRPr>
+            </a:pPr>
+            <a:r>
+              <a:t>Iryna Peretiatko</a:t>
+            </a:r>
+          </a:p>
+        </p:txBody>
+      </p:sp>
+      <p:sp>
+        <p:nvSpPr>
+          <p:cNvPr id="6" name="TextBox 5"/>
+          <p:cNvSpPr txBox="1"/>
+          <p:nvPr/>
+        </p:nvSpPr>
+        <p:spPr>
+          <a:xfrm>
+            <a:off x="1097280" y="2743200"/>
+            <a:ext cx="9966960" cy="365760"/>
+          </a:xfrm>
+          <a:prstGeom prst="rect">
+            <a:avLst/>
+          </a:prstGeom>
+          <a:noFill/>
+        </p:spPr>
+        <p:txBody>
+          <a:bodyPr wrap="square">
+            <a:spAutoFit/>
+          </a:bodyPr>
+          <a:lstStyle/>
+          <a:p>
+            <a:pPr algn="l">
+              <a:defRPr sz="1400" b="0" i="0">
+                <a:solidFill>
+                  <a:srgbClr val="8F95A3"/>
+                </a:solidFill>
+                <a:latin typeface="Calibri"/>
+              </a:defRPr>
+            </a:pPr>
+            <a:r>
+              <a:t>March 03</a:t>
+            </a:r>
+          </a:p>
+        </p:txBody>
+      </p:sp>
+      <p:sp>
+        <p:nvSpPr>
+          <p:cNvPr id="7" name="TextBox 6"/>
+          <p:cNvSpPr txBox="1"/>
+          <p:nvPr/>
+        </p:nvSpPr>
+        <p:spPr>
+          <a:xfrm>
+            <a:off x="1097280" y="3291840"/>
+            <a:ext cx="9966960" cy="914400"/>
+          </a:xfrm>
+          <a:prstGeom prst="rect">
+            <a:avLst/>
+          </a:prstGeom>
+          <a:noFill/>
+        </p:spPr>
+        <p:txBody>
+          <a:bodyPr wrap="square">
+            <a:spAutoFit/>
+          </a:bodyPr>
+          <a:lstStyle/>
+          <a:p>
+            <a:pPr algn="l">
+              <a:defRPr sz="1600" b="0" i="0">
+                <a:solidFill>
+                  <a:srgbClr val="E2E2EA"/>
+                </a:solidFill>
+                <a:latin typeface="Calibri"/>
+              </a:defRPr>
+            </a:pPr>
+            <a:r>
+              <a:t>Wishing you an amazing day filled with joy and celebration!</a:t>
+            </a:r>
+          </a:p>
+        </p:txBody>
+      </p:sp>
+      <p:sp>
+        <p:nvSpPr>
+          <p:cNvPr id="8" name="TextBox 7"/>
+          <p:cNvSpPr txBox="1"/>
+          <p:nvPr/>
+        </p:nvSpPr>
+        <p:spPr>
+          <a:xfrm>
+            <a:off x="1097280" y="4572000"/>
+            <a:ext cx="9966960" cy="457200"/>
+          </a:xfrm>
+          <a:prstGeom prst="rect">
+            <a:avLst/>
+          </a:prstGeom>
+          <a:noFill/>
+        </p:spPr>
+        <p:txBody>
+          <a:bodyPr wrap="square">
+            <a:spAutoFit/>
+          </a:bodyPr>
+          <a:lstStyle/>
+          <a:p>
+            <a:pPr algn="l">
+              <a:defRPr sz="1400" b="0" i="1">
+                <a:solidFill>
+                  <a:srgbClr val="FFB72B"/>
+                </a:solidFill>
+                <a:latin typeface="Calibri"/>
+              </a:defRPr>
+            </a:pPr>
+            <a:r>
+              <a:t>With love, Your Appodeal Team 💜</a:t>
+            </a:r>
+          </a:p>
+        </p:txBody>
+      </p:sp>
+    </p:spTree>
+  </p:cSld>
+  <p:clrMapOvr>
+    <a:masterClrMapping/>
+  </p:clrMapOvr>
+</p:sld>
+</file>
+
+<file path=ppt/slides/slide16.xml><?xml version="1.0" encoding="utf-8"?>
+<p:sld xmlns:a="http://schemas.openxmlformats.org/drawingml/2006/main" xmlns:p="http://schemas.openxmlformats.org/presentationml/2006/main" xmlns:r="http://schemas.openxmlformats.org/officeDocument/2006/relationships">
+  <p:cSld>
+    <p:bg>
+      <p:bgPr>
+        <a:solidFill>
+          <a:srgbClr val="08080C"/>
+        </a:solidFill>
+        <a:effectLst/>
+      </p:bgPr>
+    </p:bg>
+    <p:spTree>
+      <p:nvGrpSpPr>
+        <p:cNvPr id="1" name=""/>
+        <p:cNvGrpSpPr/>
+        <p:nvPr/>
+      </p:nvGrpSpPr>
+      <p:grpSpPr/>
+      <p:sp>
+        <p:nvSpPr>
+          <p:cNvPr id="2" name="Rectangle 1"/>
+          <p:cNvSpPr/>
+          <p:nvPr/>
+        </p:nvSpPr>
+        <p:spPr>
+          <a:xfrm>
+            <a:off x="0" y="365760"/>
+            <a:ext cx="12191695" cy="54864"/>
+          </a:xfrm>
+          <a:prstGeom prst="rect">
+            <a:avLst/>
+          </a:prstGeom>
+          <a:solidFill>
+            <a:srgbClr val="FFB72B"/>
+          </a:solidFill>
+          <a:ln>
+            <a:noFill/>
+          </a:ln>
+        </p:spPr>
+        <p:style>
+          <a:lnRef idx="1">
+            <a:schemeClr val="accent1"/>
+          </a:lnRef>
+          <a:fillRef idx="3">
+            <a:schemeClr val="accent1"/>
+          </a:fillRef>
+          <a:effectRef idx="2">
+            <a:schemeClr val="accent1"/>
+          </a:effectRef>
+          <a:fontRef idx="minor">
+            <a:schemeClr val="lt1"/>
+          </a:fontRef>
+        </p:style>
+        <p:txBody>
+          <a:bodyPr rtlCol="0" anchor="ctr"/>
+          <a:lstStyle/>
+          <a:p>
+            <a:pPr algn="ctr"/>
+          </a:p>
+        </p:txBody>
+      </p:sp>
+      <p:sp>
+        <p:nvSpPr>
+          <p:cNvPr id="3" name="TextBox 2"/>
+          <p:cNvSpPr txBox="1"/>
+          <p:nvPr/>
+        </p:nvSpPr>
+        <p:spPr>
+          <a:xfrm>
+            <a:off x="1097280" y="731520"/>
+            <a:ext cx="3657600" cy="365760"/>
+          </a:xfrm>
+          <a:prstGeom prst="rect">
+            <a:avLst/>
+          </a:prstGeom>
+          <a:noFill/>
+        </p:spPr>
+        <p:txBody>
+          <a:bodyPr wrap="none">
+            <a:spAutoFit/>
+          </a:bodyPr>
+          <a:lstStyle/>
+          <a:p>
+            <a:pPr algn="l">
+              <a:defRPr sz="1000" b="1">
+                <a:solidFill>
+                  <a:srgbClr val="FFB72B"/>
+                </a:solidFill>
+                <a:latin typeface="Calibri"/>
+              </a:defRPr>
+            </a:pPr>
+            <a:r>
+              <a:t>🎂  CELEBRATION</a:t>
+            </a:r>
+          </a:p>
+        </p:txBody>
+      </p:sp>
+      <p:sp>
+        <p:nvSpPr>
+          <p:cNvPr id="4" name="TextBox 3"/>
+          <p:cNvSpPr txBox="1"/>
+          <p:nvPr/>
+        </p:nvSpPr>
+        <p:spPr>
+          <a:xfrm>
+            <a:off x="1097280" y="1188720"/>
+            <a:ext cx="9966960" cy="731520"/>
+          </a:xfrm>
+          <a:prstGeom prst="rect">
+            <a:avLst/>
+          </a:prstGeom>
+          <a:noFill/>
+        </p:spPr>
+        <p:txBody>
+          <a:bodyPr wrap="square">
+            <a:spAutoFit/>
+          </a:bodyPr>
+          <a:lstStyle/>
+          <a:p>
+            <a:pPr algn="l">
+              <a:defRPr sz="3200" b="1" i="0">
+                <a:solidFill>
+                  <a:srgbClr val="FFB72B"/>
+                </a:solidFill>
+                <a:latin typeface="Calibri"/>
+              </a:defRPr>
+            </a:pPr>
+            <a:r>
+              <a:t>Happy Birthday!</a:t>
+            </a:r>
+          </a:p>
+        </p:txBody>
+      </p:sp>
+      <p:sp>
+        <p:nvSpPr>
+          <p:cNvPr id="5" name="TextBox 4"/>
+          <p:cNvSpPr txBox="1"/>
+          <p:nvPr/>
+        </p:nvSpPr>
+        <p:spPr>
+          <a:xfrm>
+            <a:off x="1097280" y="2103120"/>
+            <a:ext cx="9966960" cy="640080"/>
+          </a:xfrm>
+          <a:prstGeom prst="rect">
+            <a:avLst/>
+          </a:prstGeom>
+          <a:noFill/>
+        </p:spPr>
+        <p:txBody>
+          <a:bodyPr wrap="square">
+            <a:spAutoFit/>
+          </a:bodyPr>
+          <a:lstStyle/>
+          <a:p>
+            <a:pPr algn="l">
+              <a:defRPr sz="2800" b="1" i="0">
+                <a:solidFill>
+                  <a:srgbClr val="FFFFFF"/>
+                </a:solidFill>
+                <a:latin typeface="Calibri"/>
+              </a:defRPr>
+            </a:pPr>
+            <a:r>
+              <a:t>Adrienne Powell</a:t>
+            </a:r>
+          </a:p>
+        </p:txBody>
+      </p:sp>
+      <p:sp>
+        <p:nvSpPr>
+          <p:cNvPr id="6" name="TextBox 5"/>
+          <p:cNvSpPr txBox="1"/>
+          <p:nvPr/>
+        </p:nvSpPr>
+        <p:spPr>
+          <a:xfrm>
+            <a:off x="1097280" y="2743200"/>
+            <a:ext cx="9966960" cy="365760"/>
+          </a:xfrm>
+          <a:prstGeom prst="rect">
+            <a:avLst/>
+          </a:prstGeom>
+          <a:noFill/>
+        </p:spPr>
+        <p:txBody>
+          <a:bodyPr wrap="square">
+            <a:spAutoFit/>
+          </a:bodyPr>
+          <a:lstStyle/>
+          <a:p>
+            <a:pPr algn="l">
+              <a:defRPr sz="1400" b="0" i="0">
+                <a:solidFill>
+                  <a:srgbClr val="8F95A3"/>
+                </a:solidFill>
+                <a:latin typeface="Calibri"/>
+              </a:defRPr>
+            </a:pPr>
+            <a:r>
+              <a:t>March 03</a:t>
+            </a:r>
+          </a:p>
+        </p:txBody>
+      </p:sp>
+      <p:sp>
+        <p:nvSpPr>
+          <p:cNvPr id="7" name="TextBox 6"/>
+          <p:cNvSpPr txBox="1"/>
+          <p:nvPr/>
+        </p:nvSpPr>
+        <p:spPr>
+          <a:xfrm>
+            <a:off x="1097280" y="3291840"/>
+            <a:ext cx="9966960" cy="914400"/>
+          </a:xfrm>
+          <a:prstGeom prst="rect">
+            <a:avLst/>
+          </a:prstGeom>
+          <a:noFill/>
+        </p:spPr>
+        <p:txBody>
+          <a:bodyPr wrap="square">
+            <a:spAutoFit/>
+          </a:bodyPr>
+          <a:lstStyle/>
+          <a:p>
+            <a:pPr algn="l">
+              <a:defRPr sz="1600" b="0" i="0">
+                <a:solidFill>
+                  <a:srgbClr val="E2E2EA"/>
+                </a:solidFill>
+                <a:latin typeface="Calibri"/>
+              </a:defRPr>
+            </a:pPr>
+            <a:r>
+              <a:t>Wishing you an amazing day filled with joy and celebration!</a:t>
+            </a:r>
+          </a:p>
+        </p:txBody>
+      </p:sp>
+      <p:sp>
+        <p:nvSpPr>
+          <p:cNvPr id="8" name="TextBox 7"/>
+          <p:cNvSpPr txBox="1"/>
+          <p:nvPr/>
+        </p:nvSpPr>
+        <p:spPr>
+          <a:xfrm>
+            <a:off x="1097280" y="4572000"/>
+            <a:ext cx="9966960" cy="457200"/>
+          </a:xfrm>
+          <a:prstGeom prst="rect">
+            <a:avLst/>
+          </a:prstGeom>
+          <a:noFill/>
+        </p:spPr>
+        <p:txBody>
+          <a:bodyPr wrap="square">
+            <a:spAutoFit/>
+          </a:bodyPr>
+          <a:lstStyle/>
+          <a:p>
+            <a:pPr algn="l">
+              <a:defRPr sz="1400" b="0" i="1">
+                <a:solidFill>
+                  <a:srgbClr val="FFB72B"/>
+                </a:solidFill>
+                <a:latin typeface="Calibri"/>
+              </a:defRPr>
+            </a:pPr>
+            <a:r>
+              <a:t>With love, Your Appodeal Team 💜</a:t>
+            </a:r>
+          </a:p>
+        </p:txBody>
+      </p:sp>
+    </p:spTree>
+  </p:cSld>
+  <p:clrMapOvr>
+    <a:masterClrMapping/>
+  </p:clrMapOvr>
+</p:sld>
+</file>
+
+<file path=ppt/slides/slide17.xml><?xml version="1.0" encoding="utf-8"?>
+<p:sld xmlns:a="http://schemas.openxmlformats.org/drawingml/2006/main" xmlns:p="http://schemas.openxmlformats.org/presentationml/2006/main" xmlns:r="http://schemas.openxmlformats.org/officeDocument/2006/relationships">
+  <p:cSld>
+    <p:bg>
+      <p:bgPr>
+        <a:solidFill>
+          <a:srgbClr val="08080C"/>
+        </a:solidFill>
+        <a:effectLst/>
+      </p:bgPr>
+    </p:bg>
+    <p:spTree>
+      <p:nvGrpSpPr>
+        <p:cNvPr id="1" name=""/>
+        <p:cNvGrpSpPr/>
+        <p:nvPr/>
+      </p:nvGrpSpPr>
+      <p:grpSpPr/>
+      <p:sp>
+        <p:nvSpPr>
+          <p:cNvPr id="2" name="Rectangle 1"/>
+          <p:cNvSpPr/>
+          <p:nvPr/>
+        </p:nvSpPr>
+        <p:spPr>
+          <a:xfrm>
+            <a:off x="0" y="365760"/>
+            <a:ext cx="12191695" cy="54864"/>
+          </a:xfrm>
+          <a:prstGeom prst="rect">
+            <a:avLst/>
+          </a:prstGeom>
+          <a:solidFill>
+            <a:srgbClr val="FFB72B"/>
+          </a:solidFill>
+          <a:ln>
+            <a:noFill/>
+          </a:ln>
+        </p:spPr>
+        <p:style>
+          <a:lnRef idx="1">
+            <a:schemeClr val="accent1"/>
+          </a:lnRef>
+          <a:fillRef idx="3">
+            <a:schemeClr val="accent1"/>
+          </a:fillRef>
+          <a:effectRef idx="2">
+            <a:schemeClr val="accent1"/>
+          </a:effectRef>
+          <a:fontRef idx="minor">
+            <a:schemeClr val="lt1"/>
+          </a:fontRef>
+        </p:style>
+        <p:txBody>
+          <a:bodyPr rtlCol="0" anchor="ctr"/>
+          <a:lstStyle/>
+          <a:p>
+            <a:pPr algn="ctr"/>
+          </a:p>
+        </p:txBody>
+      </p:sp>
+      <p:sp>
+        <p:nvSpPr>
+          <p:cNvPr id="3" name="TextBox 2"/>
+          <p:cNvSpPr txBox="1"/>
+          <p:nvPr/>
+        </p:nvSpPr>
+        <p:spPr>
+          <a:xfrm>
+            <a:off x="1097280" y="731520"/>
+            <a:ext cx="3657600" cy="365760"/>
+          </a:xfrm>
+          <a:prstGeom prst="rect">
+            <a:avLst/>
+          </a:prstGeom>
+          <a:noFill/>
+        </p:spPr>
+        <p:txBody>
+          <a:bodyPr wrap="none">
+            <a:spAutoFit/>
+          </a:bodyPr>
+          <a:lstStyle/>
+          <a:p>
+            <a:pPr algn="l">
+              <a:defRPr sz="1000" b="1">
+                <a:solidFill>
+                  <a:srgbClr val="FFB72B"/>
+                </a:solidFill>
+                <a:latin typeface="Calibri"/>
+              </a:defRPr>
+            </a:pPr>
+            <a:r>
+              <a:t>🎂  CELEBRATION</a:t>
+            </a:r>
+          </a:p>
+        </p:txBody>
+      </p:sp>
+      <p:sp>
+        <p:nvSpPr>
+          <p:cNvPr id="4" name="TextBox 3"/>
+          <p:cNvSpPr txBox="1"/>
+          <p:nvPr/>
+        </p:nvSpPr>
+        <p:spPr>
+          <a:xfrm>
+            <a:off x="1097280" y="1188720"/>
+            <a:ext cx="9966960" cy="731520"/>
+          </a:xfrm>
+          <a:prstGeom prst="rect">
+            <a:avLst/>
+          </a:prstGeom>
+          <a:noFill/>
+        </p:spPr>
+        <p:txBody>
+          <a:bodyPr wrap="square">
+            <a:spAutoFit/>
+          </a:bodyPr>
+          <a:lstStyle/>
+          <a:p>
+            <a:pPr algn="l">
+              <a:defRPr sz="3200" b="1" i="0">
+                <a:solidFill>
+                  <a:srgbClr val="FFB72B"/>
+                </a:solidFill>
+                <a:latin typeface="Calibri"/>
+              </a:defRPr>
+            </a:pPr>
+            <a:r>
+              <a:t>Happy Birthday!</a:t>
+            </a:r>
+          </a:p>
+        </p:txBody>
+      </p:sp>
+      <p:sp>
+        <p:nvSpPr>
+          <p:cNvPr id="5" name="TextBox 4"/>
+          <p:cNvSpPr txBox="1"/>
+          <p:nvPr/>
+        </p:nvSpPr>
+        <p:spPr>
+          <a:xfrm>
+            <a:off x="1097280" y="2103120"/>
+            <a:ext cx="9966960" cy="640080"/>
+          </a:xfrm>
+          <a:prstGeom prst="rect">
+            <a:avLst/>
+          </a:prstGeom>
+          <a:noFill/>
+        </p:spPr>
+        <p:txBody>
+          <a:bodyPr wrap="square">
+            <a:spAutoFit/>
+          </a:bodyPr>
+          <a:lstStyle/>
+          <a:p>
+            <a:pPr algn="l">
+              <a:defRPr sz="2800" b="1" i="0">
+                <a:solidFill>
+                  <a:srgbClr val="FFFFFF"/>
+                </a:solidFill>
+                <a:latin typeface="Calibri"/>
+              </a:defRPr>
+            </a:pPr>
+            <a:r>
+              <a:t>Roman de las Heras</a:t>
+            </a:r>
+          </a:p>
+        </p:txBody>
+      </p:sp>
+      <p:sp>
+        <p:nvSpPr>
+          <p:cNvPr id="6" name="TextBox 5"/>
+          <p:cNvSpPr txBox="1"/>
+          <p:nvPr/>
+        </p:nvSpPr>
+        <p:spPr>
+          <a:xfrm>
+            <a:off x="1097280" y="2743200"/>
+            <a:ext cx="9966960" cy="365760"/>
+          </a:xfrm>
+          <a:prstGeom prst="rect">
+            <a:avLst/>
+          </a:prstGeom>
+          <a:noFill/>
+        </p:spPr>
+        <p:txBody>
+          <a:bodyPr wrap="square">
+            <a:spAutoFit/>
+          </a:bodyPr>
+          <a:lstStyle/>
+          <a:p>
+            <a:pPr algn="l">
+              <a:defRPr sz="1400" b="0" i="0">
+                <a:solidFill>
+                  <a:srgbClr val="8F95A3"/>
+                </a:solidFill>
+                <a:latin typeface="Calibri"/>
+              </a:defRPr>
+            </a:pPr>
+            <a:r>
+              <a:t>March 03</a:t>
+            </a:r>
+          </a:p>
+        </p:txBody>
+      </p:sp>
+      <p:sp>
+        <p:nvSpPr>
+          <p:cNvPr id="7" name="TextBox 6"/>
+          <p:cNvSpPr txBox="1"/>
+          <p:nvPr/>
+        </p:nvSpPr>
+        <p:spPr>
+          <a:xfrm>
+            <a:off x="1097280" y="3291840"/>
+            <a:ext cx="9966960" cy="914400"/>
+          </a:xfrm>
+          <a:prstGeom prst="rect">
+            <a:avLst/>
+          </a:prstGeom>
+          <a:noFill/>
+        </p:spPr>
+        <p:txBody>
+          <a:bodyPr wrap="square">
+            <a:spAutoFit/>
+          </a:bodyPr>
+          <a:lstStyle/>
+          <a:p>
+            <a:pPr algn="l">
+              <a:defRPr sz="1600" b="0" i="0">
+                <a:solidFill>
+                  <a:srgbClr val="E2E2EA"/>
+                </a:solidFill>
+                <a:latin typeface="Calibri"/>
+              </a:defRPr>
+            </a:pPr>
+            <a:r>
+              <a:t>Wishing you an amazing day filled with joy and celebration!</a:t>
+            </a:r>
+          </a:p>
+        </p:txBody>
+      </p:sp>
+      <p:sp>
+        <p:nvSpPr>
+          <p:cNvPr id="8" name="TextBox 7"/>
+          <p:cNvSpPr txBox="1"/>
+          <p:nvPr/>
+        </p:nvSpPr>
+        <p:spPr>
+          <a:xfrm>
+            <a:off x="1097280" y="4572000"/>
+            <a:ext cx="9966960" cy="457200"/>
+          </a:xfrm>
+          <a:prstGeom prst="rect">
+            <a:avLst/>
+          </a:prstGeom>
+          <a:noFill/>
+        </p:spPr>
+        <p:txBody>
+          <a:bodyPr wrap="square">
+            <a:spAutoFit/>
+          </a:bodyPr>
+          <a:lstStyle/>
+          <a:p>
+            <a:pPr algn="l">
+              <a:defRPr sz="1400" b="0" i="1">
+                <a:solidFill>
+                  <a:srgbClr val="FFB72B"/>
+                </a:solidFill>
+                <a:latin typeface="Calibri"/>
+              </a:defRPr>
+            </a:pPr>
+            <a:r>
+              <a:t>With love, Your Appodeal Team 💜</a:t>
+            </a:r>
+          </a:p>
+        </p:txBody>
+      </p:sp>
+    </p:spTree>
+  </p:cSld>
+  <p:clrMapOvr>
+    <a:masterClrMapping/>
+  </p:clrMapOvr>
+</p:sld>
+</file>
+
+<file path=ppt/slides/slide18.xml><?xml version="1.0" encoding="utf-8"?>
+<p:sld xmlns:a="http://schemas.openxmlformats.org/drawingml/2006/main" xmlns:p="http://schemas.openxmlformats.org/presentationml/2006/main" xmlns:r="http://schemas.openxmlformats.org/officeDocument/2006/relationships">
+  <p:cSld>
+    <p:bg>
+      <p:bgPr>
+        <a:solidFill>
+          <a:srgbClr val="08080C"/>
+        </a:solidFill>
+        <a:effectLst/>
+      </p:bgPr>
+    </p:bg>
+    <p:spTree>
+      <p:nvGrpSpPr>
+        <p:cNvPr id="1" name=""/>
+        <p:cNvGrpSpPr/>
+        <p:nvPr/>
+      </p:nvGrpSpPr>
+      <p:grpSpPr/>
+      <p:sp>
+        <p:nvSpPr>
+          <p:cNvPr id="2" name="Rectangle 1"/>
+          <p:cNvSpPr/>
+          <p:nvPr/>
+        </p:nvSpPr>
+        <p:spPr>
+          <a:xfrm>
+            <a:off x="0" y="365760"/>
+            <a:ext cx="12191695" cy="54864"/>
+          </a:xfrm>
+          <a:prstGeom prst="rect">
+            <a:avLst/>
+          </a:prstGeom>
+          <a:solidFill>
+            <a:srgbClr val="FFB72B"/>
+          </a:solidFill>
+          <a:ln>
+            <a:noFill/>
+          </a:ln>
+        </p:spPr>
+        <p:style>
+          <a:lnRef idx="1">
+            <a:schemeClr val="accent1"/>
+          </a:lnRef>
+          <a:fillRef idx="3">
+            <a:schemeClr val="accent1"/>
+          </a:fillRef>
+          <a:effectRef idx="2">
+            <a:schemeClr val="accent1"/>
+          </a:effectRef>
+          <a:fontRef idx="minor">
+            <a:schemeClr val="lt1"/>
+          </a:fontRef>
+        </p:style>
+        <p:txBody>
+          <a:bodyPr rtlCol="0" anchor="ctr"/>
+          <a:lstStyle/>
+          <a:p>
+            <a:pPr algn="ctr"/>
+          </a:p>
+        </p:txBody>
+      </p:sp>
+      <p:sp>
+        <p:nvSpPr>
+          <p:cNvPr id="3" name="TextBox 2"/>
+          <p:cNvSpPr txBox="1"/>
+          <p:nvPr/>
+        </p:nvSpPr>
+        <p:spPr>
+          <a:xfrm>
+            <a:off x="1097280" y="731520"/>
+            <a:ext cx="3657600" cy="365760"/>
+          </a:xfrm>
+          <a:prstGeom prst="rect">
+            <a:avLst/>
+          </a:prstGeom>
+          <a:noFill/>
+        </p:spPr>
+        <p:txBody>
+          <a:bodyPr wrap="none">
+            <a:spAutoFit/>
+          </a:bodyPr>
+          <a:lstStyle/>
+          <a:p>
+            <a:pPr algn="l">
+              <a:defRPr sz="1000" b="1">
+                <a:solidFill>
+                  <a:srgbClr val="FFB72B"/>
+                </a:solidFill>
+                <a:latin typeface="Calibri"/>
+              </a:defRPr>
+            </a:pPr>
+            <a:r>
+              <a:t>🎂  CELEBRATION</a:t>
+            </a:r>
+          </a:p>
+        </p:txBody>
+      </p:sp>
+      <p:sp>
+        <p:nvSpPr>
+          <p:cNvPr id="4" name="TextBox 3"/>
+          <p:cNvSpPr txBox="1"/>
+          <p:nvPr/>
+        </p:nvSpPr>
+        <p:spPr>
+          <a:xfrm>
+            <a:off x="1097280" y="1188720"/>
+            <a:ext cx="9966960" cy="731520"/>
+          </a:xfrm>
+          <a:prstGeom prst="rect">
+            <a:avLst/>
+          </a:prstGeom>
+          <a:noFill/>
+        </p:spPr>
+        <p:txBody>
+          <a:bodyPr wrap="square">
+            <a:spAutoFit/>
+          </a:bodyPr>
+          <a:lstStyle/>
+          <a:p>
+            <a:pPr algn="l">
+              <a:defRPr sz="3200" b="1" i="0">
+                <a:solidFill>
+                  <a:srgbClr val="FFB72B"/>
+                </a:solidFill>
+                <a:latin typeface="Calibri"/>
+              </a:defRPr>
+            </a:pPr>
+            <a:r>
+              <a:t>Happy Birthday!</a:t>
+            </a:r>
+          </a:p>
+        </p:txBody>
+      </p:sp>
+      <p:sp>
+        <p:nvSpPr>
+          <p:cNvPr id="5" name="TextBox 4"/>
+          <p:cNvSpPr txBox="1"/>
+          <p:nvPr/>
+        </p:nvSpPr>
+        <p:spPr>
+          <a:xfrm>
+            <a:off x="1097280" y="2103120"/>
+            <a:ext cx="9966960" cy="640080"/>
+          </a:xfrm>
+          <a:prstGeom prst="rect">
+            <a:avLst/>
+          </a:prstGeom>
+          <a:noFill/>
+        </p:spPr>
+        <p:txBody>
+          <a:bodyPr wrap="square">
+            <a:spAutoFit/>
+          </a:bodyPr>
+          <a:lstStyle/>
+          <a:p>
+            <a:pPr algn="l">
+              <a:defRPr sz="2800" b="1" i="0">
+                <a:solidFill>
+                  <a:srgbClr val="FFFFFF"/>
+                </a:solidFill>
+                <a:latin typeface="Calibri"/>
+              </a:defRPr>
+            </a:pPr>
+            <a:r>
+              <a:t>Maria Plendukova</a:t>
+            </a:r>
+          </a:p>
+        </p:txBody>
+      </p:sp>
+      <p:sp>
+        <p:nvSpPr>
+          <p:cNvPr id="6" name="TextBox 5"/>
+          <p:cNvSpPr txBox="1"/>
+          <p:nvPr/>
+        </p:nvSpPr>
+        <p:spPr>
+          <a:xfrm>
+            <a:off x="1097280" y="2743200"/>
+            <a:ext cx="9966960" cy="365760"/>
+          </a:xfrm>
+          <a:prstGeom prst="rect">
+            <a:avLst/>
+          </a:prstGeom>
+          <a:noFill/>
+        </p:spPr>
+        <p:txBody>
+          <a:bodyPr wrap="square">
+            <a:spAutoFit/>
+          </a:bodyPr>
+          <a:lstStyle/>
+          <a:p>
+            <a:pPr algn="l">
+              <a:defRPr sz="1400" b="0" i="0">
+                <a:solidFill>
+                  <a:srgbClr val="8F95A3"/>
+                </a:solidFill>
+                <a:latin typeface="Calibri"/>
+              </a:defRPr>
+            </a:pPr>
+            <a:r>
+              <a:t>March 03</a:t>
+            </a:r>
+          </a:p>
+        </p:txBody>
+      </p:sp>
+      <p:sp>
+        <p:nvSpPr>
+          <p:cNvPr id="7" name="TextBox 6"/>
+          <p:cNvSpPr txBox="1"/>
+          <p:nvPr/>
+        </p:nvSpPr>
+        <p:spPr>
+          <a:xfrm>
+            <a:off x="1097280" y="3291840"/>
+            <a:ext cx="9966960" cy="914400"/>
+          </a:xfrm>
+          <a:prstGeom prst="rect">
+            <a:avLst/>
+          </a:prstGeom>
+          <a:noFill/>
+        </p:spPr>
+        <p:txBody>
+          <a:bodyPr wrap="square">
+            <a:spAutoFit/>
+          </a:bodyPr>
+          <a:lstStyle/>
+          <a:p>
+            <a:pPr algn="l">
+              <a:defRPr sz="1600" b="0" i="0">
+                <a:solidFill>
+                  <a:srgbClr val="E2E2EA"/>
+                </a:solidFill>
+                <a:latin typeface="Calibri"/>
+              </a:defRPr>
+            </a:pPr>
+            <a:r>
+              <a:t>Wishing you an amazing day filled with joy and celebration!</a:t>
+            </a:r>
+          </a:p>
+        </p:txBody>
+      </p:sp>
+      <p:sp>
+        <p:nvSpPr>
+          <p:cNvPr id="8" name="TextBox 7"/>
+          <p:cNvSpPr txBox="1"/>
+          <p:nvPr/>
+        </p:nvSpPr>
+        <p:spPr>
+          <a:xfrm>
+            <a:off x="1097280" y="4572000"/>
+            <a:ext cx="9966960" cy="457200"/>
+          </a:xfrm>
+          <a:prstGeom prst="rect">
+            <a:avLst/>
+          </a:prstGeom>
+          <a:noFill/>
+        </p:spPr>
+        <p:txBody>
+          <a:bodyPr wrap="square">
+            <a:spAutoFit/>
+          </a:bodyPr>
+          <a:lstStyle/>
+          <a:p>
+            <a:pPr algn="l">
+              <a:defRPr sz="1400" b="0" i="1">
+                <a:solidFill>
+                  <a:srgbClr val="FFB72B"/>
+                </a:solidFill>
+                <a:latin typeface="Calibri"/>
+              </a:defRPr>
+            </a:pPr>
+            <a:r>
+              <a:t>With love, Your Appodeal Team 💜</a:t>
+            </a:r>
+          </a:p>
+        </p:txBody>
+      </p:sp>
+    </p:spTree>
+  </p:cSld>
+  <p:clrMapOvr>
+    <a:masterClrMapping/>
+  </p:clrMapOvr>
+</p:sld>
+</file>
+
+<file path=ppt/slides/slide19.xml><?xml version="1.0" encoding="utf-8"?>
+<p:sld xmlns:a="http://schemas.openxmlformats.org/drawingml/2006/main" xmlns:p="http://schemas.openxmlformats.org/presentationml/2006/main" xmlns:r="http://schemas.openxmlformats.org/officeDocument/2006/relationships">
+  <p:cSld>
+    <p:bg>
+      <p:bgPr>
+        <a:solidFill>
+          <a:srgbClr val="08080C"/>
+        </a:solidFill>
+        <a:effectLst/>
+      </p:bgPr>
+    </p:bg>
+    <p:spTree>
+      <p:nvGrpSpPr>
+        <p:cNvPr id="1" name=""/>
+        <p:cNvGrpSpPr/>
+        <p:nvPr/>
+      </p:nvGrpSpPr>
+      <p:grpSpPr/>
+      <p:sp>
+        <p:nvSpPr>
+          <p:cNvPr id="2" name="Rectangle 1"/>
+          <p:cNvSpPr/>
+          <p:nvPr/>
+        </p:nvSpPr>
+        <p:spPr>
+          <a:xfrm>
+            <a:off x="0" y="365760"/>
+            <a:ext cx="12191695" cy="54864"/>
+          </a:xfrm>
+          <a:prstGeom prst="rect">
+            <a:avLst/>
+          </a:prstGeom>
+          <a:solidFill>
+            <a:srgbClr val="FFB72B"/>
+          </a:solidFill>
+          <a:ln>
+            <a:noFill/>
+          </a:ln>
+        </p:spPr>
+        <p:style>
+          <a:lnRef idx="1">
+            <a:schemeClr val="accent1"/>
+          </a:lnRef>
+          <a:fillRef idx="3">
+            <a:schemeClr val="accent1"/>
+          </a:fillRef>
+          <a:effectRef idx="2">
+            <a:schemeClr val="accent1"/>
+          </a:effectRef>
+          <a:fontRef idx="minor">
+            <a:schemeClr val="lt1"/>
+          </a:fontRef>
+        </p:style>
+        <p:txBody>
+          <a:bodyPr rtlCol="0" anchor="ctr"/>
+          <a:lstStyle/>
+          <a:p>
+            <a:pPr algn="ctr"/>
+          </a:p>
+        </p:txBody>
+      </p:sp>
+      <p:sp>
+        <p:nvSpPr>
+          <p:cNvPr id="3" name="TextBox 2"/>
+          <p:cNvSpPr txBox="1"/>
+          <p:nvPr/>
+        </p:nvSpPr>
+        <p:spPr>
+          <a:xfrm>
+            <a:off x="1097280" y="731520"/>
+            <a:ext cx="3657600" cy="365760"/>
+          </a:xfrm>
+          <a:prstGeom prst="rect">
+            <a:avLst/>
+          </a:prstGeom>
+          <a:noFill/>
+        </p:spPr>
+        <p:txBody>
+          <a:bodyPr wrap="none">
+            <a:spAutoFit/>
+          </a:bodyPr>
+          <a:lstStyle/>
+          <a:p>
+            <a:pPr algn="l">
+              <a:defRPr sz="1000" b="1">
+                <a:solidFill>
+                  <a:srgbClr val="FFB72B"/>
+                </a:solidFill>
+                <a:latin typeface="Calibri"/>
+              </a:defRPr>
+            </a:pPr>
+            <a:r>
+              <a:t>🎂  CELEBRATION</a:t>
+            </a:r>
+          </a:p>
+        </p:txBody>
+      </p:sp>
+      <p:sp>
+        <p:nvSpPr>
+          <p:cNvPr id="4" name="TextBox 3"/>
+          <p:cNvSpPr txBox="1"/>
+          <p:nvPr/>
+        </p:nvSpPr>
+        <p:spPr>
+          <a:xfrm>
+            <a:off x="1097280" y="1188720"/>
+            <a:ext cx="9966960" cy="731520"/>
+          </a:xfrm>
+          <a:prstGeom prst="rect">
+            <a:avLst/>
+          </a:prstGeom>
+          <a:noFill/>
+        </p:spPr>
+        <p:txBody>
+          <a:bodyPr wrap="square">
+            <a:spAutoFit/>
+          </a:bodyPr>
+          <a:lstStyle/>
+          <a:p>
+            <a:pPr algn="l">
+              <a:defRPr sz="3200" b="1" i="0">
+                <a:solidFill>
+                  <a:srgbClr val="FFB72B"/>
+                </a:solidFill>
+                <a:latin typeface="Calibri"/>
+              </a:defRPr>
+            </a:pPr>
+            <a:r>
+              <a:t>Happy Birthday!</a:t>
+            </a:r>
+          </a:p>
+        </p:txBody>
+      </p:sp>
+      <p:sp>
+        <p:nvSpPr>
+          <p:cNvPr id="5" name="TextBox 4"/>
+          <p:cNvSpPr txBox="1"/>
+          <p:nvPr/>
+        </p:nvSpPr>
+        <p:spPr>
+          <a:xfrm>
+            <a:off x="1097280" y="2103120"/>
+            <a:ext cx="9966960" cy="640080"/>
+          </a:xfrm>
+          <a:prstGeom prst="rect">
+            <a:avLst/>
+          </a:prstGeom>
+          <a:noFill/>
+        </p:spPr>
+        <p:txBody>
+          <a:bodyPr wrap="square">
+            <a:spAutoFit/>
+          </a:bodyPr>
+          <a:lstStyle/>
+          <a:p>
+            <a:pPr algn="l">
+              <a:defRPr sz="2800" b="1" i="0">
+                <a:solidFill>
+                  <a:srgbClr val="FFFFFF"/>
+                </a:solidFill>
+                <a:latin typeface="Calibri"/>
+              </a:defRPr>
+            </a:pPr>
+            <a:r>
+              <a:t>Radu Stoia</a:t>
+            </a:r>
+          </a:p>
+        </p:txBody>
+      </p:sp>
+      <p:sp>
+        <p:nvSpPr>
+          <p:cNvPr id="6" name="TextBox 5"/>
+          <p:cNvSpPr txBox="1"/>
+          <p:nvPr/>
+        </p:nvSpPr>
+        <p:spPr>
+          <a:xfrm>
+            <a:off x="1097280" y="2743200"/>
+            <a:ext cx="9966960" cy="365760"/>
+          </a:xfrm>
+          <a:prstGeom prst="rect">
+            <a:avLst/>
+          </a:prstGeom>
+          <a:noFill/>
+        </p:spPr>
+        <p:txBody>
+          <a:bodyPr wrap="square">
+            <a:spAutoFit/>
+          </a:bodyPr>
+          <a:lstStyle/>
+          <a:p>
+            <a:pPr algn="l">
+              <a:defRPr sz="1400" b="0" i="0">
+                <a:solidFill>
+                  <a:srgbClr val="8F95A3"/>
+                </a:solidFill>
+                <a:latin typeface="Calibri"/>
+              </a:defRPr>
+            </a:pPr>
+            <a:r>
+              <a:t>March 03</a:t>
+            </a:r>
+          </a:p>
+        </p:txBody>
+      </p:sp>
+      <p:sp>
+        <p:nvSpPr>
+          <p:cNvPr id="7" name="TextBox 6"/>
+          <p:cNvSpPr txBox="1"/>
+          <p:nvPr/>
+        </p:nvSpPr>
+        <p:spPr>
+          <a:xfrm>
+            <a:off x="1097280" y="3291840"/>
+            <a:ext cx="9966960" cy="914400"/>
+          </a:xfrm>
+          <a:prstGeom prst="rect">
+            <a:avLst/>
+          </a:prstGeom>
+          <a:noFill/>
+        </p:spPr>
+        <p:txBody>
+          <a:bodyPr wrap="square">
+            <a:spAutoFit/>
+          </a:bodyPr>
+          <a:lstStyle/>
+          <a:p>
+            <a:pPr algn="l">
+              <a:defRPr sz="1600" b="0" i="0">
+                <a:solidFill>
+                  <a:srgbClr val="E2E2EA"/>
+                </a:solidFill>
+                <a:latin typeface="Calibri"/>
+              </a:defRPr>
+            </a:pPr>
+            <a:r>
+              <a:t>Wishing you an amazing day filled with joy and celebration!</a:t>
+            </a:r>
+          </a:p>
+        </p:txBody>
+      </p:sp>
+      <p:sp>
+        <p:nvSpPr>
+          <p:cNvPr id="8" name="TextBox 7"/>
+          <p:cNvSpPr txBox="1"/>
+          <p:nvPr/>
+        </p:nvSpPr>
+        <p:spPr>
+          <a:xfrm>
+            <a:off x="1097280" y="4572000"/>
+            <a:ext cx="9966960" cy="457200"/>
+          </a:xfrm>
+          <a:prstGeom prst="rect">
+            <a:avLst/>
+          </a:prstGeom>
+          <a:noFill/>
+        </p:spPr>
+        <p:txBody>
+          <a:bodyPr wrap="square">
+            <a:spAutoFit/>
+          </a:bodyPr>
+          <a:lstStyle/>
+          <a:p>
+            <a:pPr algn="l">
+              <a:defRPr sz="1400" b="0" i="1">
+                <a:solidFill>
+                  <a:srgbClr val="FFB72B"/>
+                </a:solidFill>
+                <a:latin typeface="Calibri"/>
+              </a:defRPr>
+            </a:pPr>
+            <a:r>
+              <a:t>With love, Your Appodeal Team 💜</a:t>
+            </a:r>
+          </a:p>
+        </p:txBody>
+      </p:sp>
+    </p:spTree>
+  </p:cSld>
+  <p:clrMapOvr>
+    <a:masterClrMapping/>
+  </p:clrMapOvr>
+</p:sld>
+</file>
+
 <file path=ppt/slides/slide2.xml><?xml version="1.0" encoding="utf-8"?>
 <p:sld xmlns:a="http://schemas.openxmlformats.org/drawingml/2006/main" xmlns:p="http://schemas.openxmlformats.org/presentationml/2006/main" xmlns:r="http://schemas.openxmlformats.org/officeDocument/2006/relationships">
   <p:cSld>
@@ -3348,7 +6224,7 @@
               </a:defRPr>
             </a:pPr>
             <a:r>
-              <a:t>☀️  WEEKLY RITUAL</a:t>
+              <a:t>🎂  CELEBRATION</a:t>
             </a:r>
           </a:p>
         </p:txBody>
@@ -3384,7 +6260,2002 @@
               </a:defRPr>
             </a:pPr>
             <a:r>
-              <a:t>Good Morning, Appodeal!</a:t>
+              <a:t>Happy Birthday!</a:t>
+            </a:r>
+          </a:p>
+        </p:txBody>
+      </p:sp>
+      <p:sp>
+        <p:nvSpPr>
+          <p:cNvPr id="5" name="TextBox 4"/>
+          <p:cNvSpPr txBox="1"/>
+          <p:nvPr/>
+        </p:nvSpPr>
+        <p:spPr>
+          <a:xfrm>
+            <a:off x="1097280" y="2103120"/>
+            <a:ext cx="9966960" cy="640080"/>
+          </a:xfrm>
+          <a:prstGeom prst="rect">
+            <a:avLst/>
+          </a:prstGeom>
+          <a:noFill/>
+        </p:spPr>
+        <p:txBody>
+          <a:bodyPr wrap="square">
+            <a:spAutoFit/>
+          </a:bodyPr>
+          <a:lstStyle/>
+          <a:p>
+            <a:pPr algn="l">
+              <a:defRPr sz="2800" b="1" i="0">
+                <a:solidFill>
+                  <a:srgbClr val="FFFFFF"/>
+                </a:solidFill>
+                <a:latin typeface="Calibri"/>
+              </a:defRPr>
+            </a:pPr>
+            <a:r>
+              <a:t>Iurii Kotov</a:t>
+            </a:r>
+          </a:p>
+        </p:txBody>
+      </p:sp>
+      <p:sp>
+        <p:nvSpPr>
+          <p:cNvPr id="6" name="TextBox 5"/>
+          <p:cNvSpPr txBox="1"/>
+          <p:nvPr/>
+        </p:nvSpPr>
+        <p:spPr>
+          <a:xfrm>
+            <a:off x="1097280" y="2743200"/>
+            <a:ext cx="9966960" cy="365760"/>
+          </a:xfrm>
+          <a:prstGeom prst="rect">
+            <a:avLst/>
+          </a:prstGeom>
+          <a:noFill/>
+        </p:spPr>
+        <p:txBody>
+          <a:bodyPr wrap="square">
+            <a:spAutoFit/>
+          </a:bodyPr>
+          <a:lstStyle/>
+          <a:p>
+            <a:pPr algn="l">
+              <a:defRPr sz="1400" b="0" i="0">
+                <a:solidFill>
+                  <a:srgbClr val="8F95A3"/>
+                </a:solidFill>
+                <a:latin typeface="Calibri"/>
+              </a:defRPr>
+            </a:pPr>
+            <a:r>
+              <a:t>March 03</a:t>
+            </a:r>
+          </a:p>
+        </p:txBody>
+      </p:sp>
+      <p:sp>
+        <p:nvSpPr>
+          <p:cNvPr id="7" name="TextBox 6"/>
+          <p:cNvSpPr txBox="1"/>
+          <p:nvPr/>
+        </p:nvSpPr>
+        <p:spPr>
+          <a:xfrm>
+            <a:off x="1097280" y="3291840"/>
+            <a:ext cx="9966960" cy="914400"/>
+          </a:xfrm>
+          <a:prstGeom prst="rect">
+            <a:avLst/>
+          </a:prstGeom>
+          <a:noFill/>
+        </p:spPr>
+        <p:txBody>
+          <a:bodyPr wrap="square">
+            <a:spAutoFit/>
+          </a:bodyPr>
+          <a:lstStyle/>
+          <a:p>
+            <a:pPr algn="l">
+              <a:defRPr sz="1600" b="0" i="0">
+                <a:solidFill>
+                  <a:srgbClr val="E2E2EA"/>
+                </a:solidFill>
+                <a:latin typeface="Calibri"/>
+              </a:defRPr>
+            </a:pPr>
+            <a:r>
+              <a:t>Wishing you an amazing day filled with joy and celebration!</a:t>
+            </a:r>
+          </a:p>
+        </p:txBody>
+      </p:sp>
+      <p:sp>
+        <p:nvSpPr>
+          <p:cNvPr id="8" name="TextBox 7"/>
+          <p:cNvSpPr txBox="1"/>
+          <p:nvPr/>
+        </p:nvSpPr>
+        <p:spPr>
+          <a:xfrm>
+            <a:off x="1097280" y="4572000"/>
+            <a:ext cx="9966960" cy="457200"/>
+          </a:xfrm>
+          <a:prstGeom prst="rect">
+            <a:avLst/>
+          </a:prstGeom>
+          <a:noFill/>
+        </p:spPr>
+        <p:txBody>
+          <a:bodyPr wrap="square">
+            <a:spAutoFit/>
+          </a:bodyPr>
+          <a:lstStyle/>
+          <a:p>
+            <a:pPr algn="l">
+              <a:defRPr sz="1400" b="0" i="1">
+                <a:solidFill>
+                  <a:srgbClr val="FFB72B"/>
+                </a:solidFill>
+                <a:latin typeface="Calibri"/>
+              </a:defRPr>
+            </a:pPr>
+            <a:r>
+              <a:t>With love, Your Appodeal Team 💜</a:t>
+            </a:r>
+          </a:p>
+        </p:txBody>
+      </p:sp>
+    </p:spTree>
+  </p:cSld>
+  <p:clrMapOvr>
+    <a:masterClrMapping/>
+  </p:clrMapOvr>
+</p:sld>
+</file>
+
+<file path=ppt/slides/slide20.xml><?xml version="1.0" encoding="utf-8"?>
+<p:sld xmlns:a="http://schemas.openxmlformats.org/drawingml/2006/main" xmlns:p="http://schemas.openxmlformats.org/presentationml/2006/main" xmlns:r="http://schemas.openxmlformats.org/officeDocument/2006/relationships">
+  <p:cSld>
+    <p:bg>
+      <p:bgPr>
+        <a:solidFill>
+          <a:srgbClr val="08080C"/>
+        </a:solidFill>
+        <a:effectLst/>
+      </p:bgPr>
+    </p:bg>
+    <p:spTree>
+      <p:nvGrpSpPr>
+        <p:cNvPr id="1" name=""/>
+        <p:cNvGrpSpPr/>
+        <p:nvPr/>
+      </p:nvGrpSpPr>
+      <p:grpSpPr/>
+      <p:sp>
+        <p:nvSpPr>
+          <p:cNvPr id="2" name="Rectangle 1"/>
+          <p:cNvSpPr/>
+          <p:nvPr/>
+        </p:nvSpPr>
+        <p:spPr>
+          <a:xfrm>
+            <a:off x="0" y="365760"/>
+            <a:ext cx="12191695" cy="54864"/>
+          </a:xfrm>
+          <a:prstGeom prst="rect">
+            <a:avLst/>
+          </a:prstGeom>
+          <a:solidFill>
+            <a:srgbClr val="FFB72B"/>
+          </a:solidFill>
+          <a:ln>
+            <a:noFill/>
+          </a:ln>
+        </p:spPr>
+        <p:style>
+          <a:lnRef idx="1">
+            <a:schemeClr val="accent1"/>
+          </a:lnRef>
+          <a:fillRef idx="3">
+            <a:schemeClr val="accent1"/>
+          </a:fillRef>
+          <a:effectRef idx="2">
+            <a:schemeClr val="accent1"/>
+          </a:effectRef>
+          <a:fontRef idx="minor">
+            <a:schemeClr val="lt1"/>
+          </a:fontRef>
+        </p:style>
+        <p:txBody>
+          <a:bodyPr rtlCol="0" anchor="ctr"/>
+          <a:lstStyle/>
+          <a:p>
+            <a:pPr algn="ctr"/>
+          </a:p>
+        </p:txBody>
+      </p:sp>
+      <p:sp>
+        <p:nvSpPr>
+          <p:cNvPr id="3" name="TextBox 2"/>
+          <p:cNvSpPr txBox="1"/>
+          <p:nvPr/>
+        </p:nvSpPr>
+        <p:spPr>
+          <a:xfrm>
+            <a:off x="1097280" y="731520"/>
+            <a:ext cx="3657600" cy="365760"/>
+          </a:xfrm>
+          <a:prstGeom prst="rect">
+            <a:avLst/>
+          </a:prstGeom>
+          <a:noFill/>
+        </p:spPr>
+        <p:txBody>
+          <a:bodyPr wrap="none">
+            <a:spAutoFit/>
+          </a:bodyPr>
+          <a:lstStyle/>
+          <a:p>
+            <a:pPr algn="l">
+              <a:defRPr sz="1000" b="1">
+                <a:solidFill>
+                  <a:srgbClr val="FFB72B"/>
+                </a:solidFill>
+                <a:latin typeface="Calibri"/>
+              </a:defRPr>
+            </a:pPr>
+            <a:r>
+              <a:t>🎂  CELEBRATION</a:t>
+            </a:r>
+          </a:p>
+        </p:txBody>
+      </p:sp>
+      <p:sp>
+        <p:nvSpPr>
+          <p:cNvPr id="4" name="TextBox 3"/>
+          <p:cNvSpPr txBox="1"/>
+          <p:nvPr/>
+        </p:nvSpPr>
+        <p:spPr>
+          <a:xfrm>
+            <a:off x="1097280" y="1188720"/>
+            <a:ext cx="9966960" cy="731520"/>
+          </a:xfrm>
+          <a:prstGeom prst="rect">
+            <a:avLst/>
+          </a:prstGeom>
+          <a:noFill/>
+        </p:spPr>
+        <p:txBody>
+          <a:bodyPr wrap="square">
+            <a:spAutoFit/>
+          </a:bodyPr>
+          <a:lstStyle/>
+          <a:p>
+            <a:pPr algn="l">
+              <a:defRPr sz="3200" b="1" i="0">
+                <a:solidFill>
+                  <a:srgbClr val="FFB72B"/>
+                </a:solidFill>
+                <a:latin typeface="Calibri"/>
+              </a:defRPr>
+            </a:pPr>
+            <a:r>
+              <a:t>Happy Birthday!</a:t>
+            </a:r>
+          </a:p>
+        </p:txBody>
+      </p:sp>
+      <p:sp>
+        <p:nvSpPr>
+          <p:cNvPr id="5" name="TextBox 4"/>
+          <p:cNvSpPr txBox="1"/>
+          <p:nvPr/>
+        </p:nvSpPr>
+        <p:spPr>
+          <a:xfrm>
+            <a:off x="1097280" y="2103120"/>
+            <a:ext cx="9966960" cy="640080"/>
+          </a:xfrm>
+          <a:prstGeom prst="rect">
+            <a:avLst/>
+          </a:prstGeom>
+          <a:noFill/>
+        </p:spPr>
+        <p:txBody>
+          <a:bodyPr wrap="square">
+            <a:spAutoFit/>
+          </a:bodyPr>
+          <a:lstStyle/>
+          <a:p>
+            <a:pPr algn="l">
+              <a:defRPr sz="2800" b="1" i="0">
+                <a:solidFill>
+                  <a:srgbClr val="FFFFFF"/>
+                </a:solidFill>
+                <a:latin typeface="Calibri"/>
+              </a:defRPr>
+            </a:pPr>
+            <a:r>
+              <a:t>Adnana Hujdur</a:t>
+            </a:r>
+          </a:p>
+        </p:txBody>
+      </p:sp>
+      <p:sp>
+        <p:nvSpPr>
+          <p:cNvPr id="6" name="TextBox 5"/>
+          <p:cNvSpPr txBox="1"/>
+          <p:nvPr/>
+        </p:nvSpPr>
+        <p:spPr>
+          <a:xfrm>
+            <a:off x="1097280" y="2743200"/>
+            <a:ext cx="9966960" cy="365760"/>
+          </a:xfrm>
+          <a:prstGeom prst="rect">
+            <a:avLst/>
+          </a:prstGeom>
+          <a:noFill/>
+        </p:spPr>
+        <p:txBody>
+          <a:bodyPr wrap="square">
+            <a:spAutoFit/>
+          </a:bodyPr>
+          <a:lstStyle/>
+          <a:p>
+            <a:pPr algn="l">
+              <a:defRPr sz="1400" b="0" i="0">
+                <a:solidFill>
+                  <a:srgbClr val="8F95A3"/>
+                </a:solidFill>
+                <a:latin typeface="Calibri"/>
+              </a:defRPr>
+            </a:pPr>
+            <a:r>
+              <a:t>March 03</a:t>
+            </a:r>
+          </a:p>
+        </p:txBody>
+      </p:sp>
+      <p:sp>
+        <p:nvSpPr>
+          <p:cNvPr id="7" name="TextBox 6"/>
+          <p:cNvSpPr txBox="1"/>
+          <p:nvPr/>
+        </p:nvSpPr>
+        <p:spPr>
+          <a:xfrm>
+            <a:off x="1097280" y="3291840"/>
+            <a:ext cx="9966960" cy="914400"/>
+          </a:xfrm>
+          <a:prstGeom prst="rect">
+            <a:avLst/>
+          </a:prstGeom>
+          <a:noFill/>
+        </p:spPr>
+        <p:txBody>
+          <a:bodyPr wrap="square">
+            <a:spAutoFit/>
+          </a:bodyPr>
+          <a:lstStyle/>
+          <a:p>
+            <a:pPr algn="l">
+              <a:defRPr sz="1600" b="0" i="0">
+                <a:solidFill>
+                  <a:srgbClr val="E2E2EA"/>
+                </a:solidFill>
+                <a:latin typeface="Calibri"/>
+              </a:defRPr>
+            </a:pPr>
+            <a:r>
+              <a:t>Wishing you an amazing day filled with joy and celebration!</a:t>
+            </a:r>
+          </a:p>
+        </p:txBody>
+      </p:sp>
+      <p:sp>
+        <p:nvSpPr>
+          <p:cNvPr id="8" name="TextBox 7"/>
+          <p:cNvSpPr txBox="1"/>
+          <p:nvPr/>
+        </p:nvSpPr>
+        <p:spPr>
+          <a:xfrm>
+            <a:off x="1097280" y="4572000"/>
+            <a:ext cx="9966960" cy="457200"/>
+          </a:xfrm>
+          <a:prstGeom prst="rect">
+            <a:avLst/>
+          </a:prstGeom>
+          <a:noFill/>
+        </p:spPr>
+        <p:txBody>
+          <a:bodyPr wrap="square">
+            <a:spAutoFit/>
+          </a:bodyPr>
+          <a:lstStyle/>
+          <a:p>
+            <a:pPr algn="l">
+              <a:defRPr sz="1400" b="0" i="1">
+                <a:solidFill>
+                  <a:srgbClr val="FFB72B"/>
+                </a:solidFill>
+                <a:latin typeface="Calibri"/>
+              </a:defRPr>
+            </a:pPr>
+            <a:r>
+              <a:t>With love, Your Appodeal Team 💜</a:t>
+            </a:r>
+          </a:p>
+        </p:txBody>
+      </p:sp>
+    </p:spTree>
+  </p:cSld>
+  <p:clrMapOvr>
+    <a:masterClrMapping/>
+  </p:clrMapOvr>
+</p:sld>
+</file>
+
+<file path=ppt/slides/slide21.xml><?xml version="1.0" encoding="utf-8"?>
+<p:sld xmlns:a="http://schemas.openxmlformats.org/drawingml/2006/main" xmlns:p="http://schemas.openxmlformats.org/presentationml/2006/main" xmlns:r="http://schemas.openxmlformats.org/officeDocument/2006/relationships">
+  <p:cSld>
+    <p:bg>
+      <p:bgPr>
+        <a:solidFill>
+          <a:srgbClr val="08080C"/>
+        </a:solidFill>
+        <a:effectLst/>
+      </p:bgPr>
+    </p:bg>
+    <p:spTree>
+      <p:nvGrpSpPr>
+        <p:cNvPr id="1" name=""/>
+        <p:cNvGrpSpPr/>
+        <p:nvPr/>
+      </p:nvGrpSpPr>
+      <p:grpSpPr/>
+      <p:sp>
+        <p:nvSpPr>
+          <p:cNvPr id="2" name="Rectangle 1"/>
+          <p:cNvSpPr/>
+          <p:nvPr/>
+        </p:nvSpPr>
+        <p:spPr>
+          <a:xfrm>
+            <a:off x="0" y="365760"/>
+            <a:ext cx="12191695" cy="54864"/>
+          </a:xfrm>
+          <a:prstGeom prst="rect">
+            <a:avLst/>
+          </a:prstGeom>
+          <a:solidFill>
+            <a:srgbClr val="FFB72B"/>
+          </a:solidFill>
+          <a:ln>
+            <a:noFill/>
+          </a:ln>
+        </p:spPr>
+        <p:style>
+          <a:lnRef idx="1">
+            <a:schemeClr val="accent1"/>
+          </a:lnRef>
+          <a:fillRef idx="3">
+            <a:schemeClr val="accent1"/>
+          </a:fillRef>
+          <a:effectRef idx="2">
+            <a:schemeClr val="accent1"/>
+          </a:effectRef>
+          <a:fontRef idx="minor">
+            <a:schemeClr val="lt1"/>
+          </a:fontRef>
+        </p:style>
+        <p:txBody>
+          <a:bodyPr rtlCol="0" anchor="ctr"/>
+          <a:lstStyle/>
+          <a:p>
+            <a:pPr algn="ctr"/>
+          </a:p>
+        </p:txBody>
+      </p:sp>
+      <p:sp>
+        <p:nvSpPr>
+          <p:cNvPr id="3" name="TextBox 2"/>
+          <p:cNvSpPr txBox="1"/>
+          <p:nvPr/>
+        </p:nvSpPr>
+        <p:spPr>
+          <a:xfrm>
+            <a:off x="1097280" y="731520"/>
+            <a:ext cx="3657600" cy="365760"/>
+          </a:xfrm>
+          <a:prstGeom prst="rect">
+            <a:avLst/>
+          </a:prstGeom>
+          <a:noFill/>
+        </p:spPr>
+        <p:txBody>
+          <a:bodyPr wrap="none">
+            <a:spAutoFit/>
+          </a:bodyPr>
+          <a:lstStyle/>
+          <a:p>
+            <a:pPr algn="l">
+              <a:defRPr sz="1000" b="1">
+                <a:solidFill>
+                  <a:srgbClr val="FFB72B"/>
+                </a:solidFill>
+                <a:latin typeface="Calibri"/>
+              </a:defRPr>
+            </a:pPr>
+            <a:r>
+              <a:t>🎂  CELEBRATION</a:t>
+            </a:r>
+          </a:p>
+        </p:txBody>
+      </p:sp>
+      <p:sp>
+        <p:nvSpPr>
+          <p:cNvPr id="4" name="TextBox 3"/>
+          <p:cNvSpPr txBox="1"/>
+          <p:nvPr/>
+        </p:nvSpPr>
+        <p:spPr>
+          <a:xfrm>
+            <a:off x="1097280" y="1188720"/>
+            <a:ext cx="9966960" cy="731520"/>
+          </a:xfrm>
+          <a:prstGeom prst="rect">
+            <a:avLst/>
+          </a:prstGeom>
+          <a:noFill/>
+        </p:spPr>
+        <p:txBody>
+          <a:bodyPr wrap="square">
+            <a:spAutoFit/>
+          </a:bodyPr>
+          <a:lstStyle/>
+          <a:p>
+            <a:pPr algn="l">
+              <a:defRPr sz="3200" b="1" i="0">
+                <a:solidFill>
+                  <a:srgbClr val="FFB72B"/>
+                </a:solidFill>
+                <a:latin typeface="Calibri"/>
+              </a:defRPr>
+            </a:pPr>
+            <a:r>
+              <a:t>Happy Birthday!</a:t>
+            </a:r>
+          </a:p>
+        </p:txBody>
+      </p:sp>
+      <p:sp>
+        <p:nvSpPr>
+          <p:cNvPr id="5" name="TextBox 4"/>
+          <p:cNvSpPr txBox="1"/>
+          <p:nvPr/>
+        </p:nvSpPr>
+        <p:spPr>
+          <a:xfrm>
+            <a:off x="1097280" y="2103120"/>
+            <a:ext cx="9966960" cy="640080"/>
+          </a:xfrm>
+          <a:prstGeom prst="rect">
+            <a:avLst/>
+          </a:prstGeom>
+          <a:noFill/>
+        </p:spPr>
+        <p:txBody>
+          <a:bodyPr wrap="square">
+            <a:spAutoFit/>
+          </a:bodyPr>
+          <a:lstStyle/>
+          <a:p>
+            <a:pPr algn="l">
+              <a:defRPr sz="2800" b="1" i="0">
+                <a:solidFill>
+                  <a:srgbClr val="FFFFFF"/>
+                </a:solidFill>
+                <a:latin typeface="Calibri"/>
+              </a:defRPr>
+            </a:pPr>
+            <a:r>
+              <a:t>Murat Kacmaz</a:t>
+            </a:r>
+          </a:p>
+        </p:txBody>
+      </p:sp>
+      <p:sp>
+        <p:nvSpPr>
+          <p:cNvPr id="6" name="TextBox 5"/>
+          <p:cNvSpPr txBox="1"/>
+          <p:nvPr/>
+        </p:nvSpPr>
+        <p:spPr>
+          <a:xfrm>
+            <a:off x="1097280" y="2743200"/>
+            <a:ext cx="9966960" cy="365760"/>
+          </a:xfrm>
+          <a:prstGeom prst="rect">
+            <a:avLst/>
+          </a:prstGeom>
+          <a:noFill/>
+        </p:spPr>
+        <p:txBody>
+          <a:bodyPr wrap="square">
+            <a:spAutoFit/>
+          </a:bodyPr>
+          <a:lstStyle/>
+          <a:p>
+            <a:pPr algn="l">
+              <a:defRPr sz="1400" b="0" i="0">
+                <a:solidFill>
+                  <a:srgbClr val="8F95A3"/>
+                </a:solidFill>
+                <a:latin typeface="Calibri"/>
+              </a:defRPr>
+            </a:pPr>
+            <a:r>
+              <a:t>March 03</a:t>
+            </a:r>
+          </a:p>
+        </p:txBody>
+      </p:sp>
+      <p:sp>
+        <p:nvSpPr>
+          <p:cNvPr id="7" name="TextBox 6"/>
+          <p:cNvSpPr txBox="1"/>
+          <p:nvPr/>
+        </p:nvSpPr>
+        <p:spPr>
+          <a:xfrm>
+            <a:off x="1097280" y="3291840"/>
+            <a:ext cx="9966960" cy="914400"/>
+          </a:xfrm>
+          <a:prstGeom prst="rect">
+            <a:avLst/>
+          </a:prstGeom>
+          <a:noFill/>
+        </p:spPr>
+        <p:txBody>
+          <a:bodyPr wrap="square">
+            <a:spAutoFit/>
+          </a:bodyPr>
+          <a:lstStyle/>
+          <a:p>
+            <a:pPr algn="l">
+              <a:defRPr sz="1600" b="0" i="0">
+                <a:solidFill>
+                  <a:srgbClr val="E2E2EA"/>
+                </a:solidFill>
+                <a:latin typeface="Calibri"/>
+              </a:defRPr>
+            </a:pPr>
+            <a:r>
+              <a:t>Wishing you an amazing day filled with joy and celebration!</a:t>
+            </a:r>
+          </a:p>
+        </p:txBody>
+      </p:sp>
+      <p:sp>
+        <p:nvSpPr>
+          <p:cNvPr id="8" name="TextBox 7"/>
+          <p:cNvSpPr txBox="1"/>
+          <p:nvPr/>
+        </p:nvSpPr>
+        <p:spPr>
+          <a:xfrm>
+            <a:off x="1097280" y="4572000"/>
+            <a:ext cx="9966960" cy="457200"/>
+          </a:xfrm>
+          <a:prstGeom prst="rect">
+            <a:avLst/>
+          </a:prstGeom>
+          <a:noFill/>
+        </p:spPr>
+        <p:txBody>
+          <a:bodyPr wrap="square">
+            <a:spAutoFit/>
+          </a:bodyPr>
+          <a:lstStyle/>
+          <a:p>
+            <a:pPr algn="l">
+              <a:defRPr sz="1400" b="0" i="1">
+                <a:solidFill>
+                  <a:srgbClr val="FFB72B"/>
+                </a:solidFill>
+                <a:latin typeface="Calibri"/>
+              </a:defRPr>
+            </a:pPr>
+            <a:r>
+              <a:t>With love, Your Appodeal Team 💜</a:t>
+            </a:r>
+          </a:p>
+        </p:txBody>
+      </p:sp>
+    </p:spTree>
+  </p:cSld>
+  <p:clrMapOvr>
+    <a:masterClrMapping/>
+  </p:clrMapOvr>
+</p:sld>
+</file>
+
+<file path=ppt/slides/slide22.xml><?xml version="1.0" encoding="utf-8"?>
+<p:sld xmlns:a="http://schemas.openxmlformats.org/drawingml/2006/main" xmlns:p="http://schemas.openxmlformats.org/presentationml/2006/main" xmlns:r="http://schemas.openxmlformats.org/officeDocument/2006/relationships">
+  <p:cSld>
+    <p:bg>
+      <p:bgPr>
+        <a:solidFill>
+          <a:srgbClr val="08080C"/>
+        </a:solidFill>
+        <a:effectLst/>
+      </p:bgPr>
+    </p:bg>
+    <p:spTree>
+      <p:nvGrpSpPr>
+        <p:cNvPr id="1" name=""/>
+        <p:cNvGrpSpPr/>
+        <p:nvPr/>
+      </p:nvGrpSpPr>
+      <p:grpSpPr/>
+      <p:sp>
+        <p:nvSpPr>
+          <p:cNvPr id="2" name="Rectangle 1"/>
+          <p:cNvSpPr/>
+          <p:nvPr/>
+        </p:nvSpPr>
+        <p:spPr>
+          <a:xfrm>
+            <a:off x="0" y="365760"/>
+            <a:ext cx="12191695" cy="54864"/>
+          </a:xfrm>
+          <a:prstGeom prst="rect">
+            <a:avLst/>
+          </a:prstGeom>
+          <a:solidFill>
+            <a:srgbClr val="FFB72B"/>
+          </a:solidFill>
+          <a:ln>
+            <a:noFill/>
+          </a:ln>
+        </p:spPr>
+        <p:style>
+          <a:lnRef idx="1">
+            <a:schemeClr val="accent1"/>
+          </a:lnRef>
+          <a:fillRef idx="3">
+            <a:schemeClr val="accent1"/>
+          </a:fillRef>
+          <a:effectRef idx="2">
+            <a:schemeClr val="accent1"/>
+          </a:effectRef>
+          <a:fontRef idx="minor">
+            <a:schemeClr val="lt1"/>
+          </a:fontRef>
+        </p:style>
+        <p:txBody>
+          <a:bodyPr rtlCol="0" anchor="ctr"/>
+          <a:lstStyle/>
+          <a:p>
+            <a:pPr algn="ctr"/>
+          </a:p>
+        </p:txBody>
+      </p:sp>
+      <p:sp>
+        <p:nvSpPr>
+          <p:cNvPr id="3" name="TextBox 2"/>
+          <p:cNvSpPr txBox="1"/>
+          <p:nvPr/>
+        </p:nvSpPr>
+        <p:spPr>
+          <a:xfrm>
+            <a:off x="1097280" y="731520"/>
+            <a:ext cx="3657600" cy="365760"/>
+          </a:xfrm>
+          <a:prstGeom prst="rect">
+            <a:avLst/>
+          </a:prstGeom>
+          <a:noFill/>
+        </p:spPr>
+        <p:txBody>
+          <a:bodyPr wrap="none">
+            <a:spAutoFit/>
+          </a:bodyPr>
+          <a:lstStyle/>
+          <a:p>
+            <a:pPr algn="l">
+              <a:defRPr sz="1000" b="1">
+                <a:solidFill>
+                  <a:srgbClr val="FFB72B"/>
+                </a:solidFill>
+                <a:latin typeface="Calibri"/>
+              </a:defRPr>
+            </a:pPr>
+            <a:r>
+              <a:t>🎂  CELEBRATION</a:t>
+            </a:r>
+          </a:p>
+        </p:txBody>
+      </p:sp>
+      <p:sp>
+        <p:nvSpPr>
+          <p:cNvPr id="4" name="TextBox 3"/>
+          <p:cNvSpPr txBox="1"/>
+          <p:nvPr/>
+        </p:nvSpPr>
+        <p:spPr>
+          <a:xfrm>
+            <a:off x="1097280" y="1188720"/>
+            <a:ext cx="9966960" cy="731520"/>
+          </a:xfrm>
+          <a:prstGeom prst="rect">
+            <a:avLst/>
+          </a:prstGeom>
+          <a:noFill/>
+        </p:spPr>
+        <p:txBody>
+          <a:bodyPr wrap="square">
+            <a:spAutoFit/>
+          </a:bodyPr>
+          <a:lstStyle/>
+          <a:p>
+            <a:pPr algn="l">
+              <a:defRPr sz="3200" b="1" i="0">
+                <a:solidFill>
+                  <a:srgbClr val="FFB72B"/>
+                </a:solidFill>
+                <a:latin typeface="Calibri"/>
+              </a:defRPr>
+            </a:pPr>
+            <a:r>
+              <a:t>Happy Birthday!</a:t>
+            </a:r>
+          </a:p>
+        </p:txBody>
+      </p:sp>
+      <p:sp>
+        <p:nvSpPr>
+          <p:cNvPr id="5" name="TextBox 4"/>
+          <p:cNvSpPr txBox="1"/>
+          <p:nvPr/>
+        </p:nvSpPr>
+        <p:spPr>
+          <a:xfrm>
+            <a:off x="1097280" y="2103120"/>
+            <a:ext cx="9966960" cy="640080"/>
+          </a:xfrm>
+          <a:prstGeom prst="rect">
+            <a:avLst/>
+          </a:prstGeom>
+          <a:noFill/>
+        </p:spPr>
+        <p:txBody>
+          <a:bodyPr wrap="square">
+            <a:spAutoFit/>
+          </a:bodyPr>
+          <a:lstStyle/>
+          <a:p>
+            <a:pPr algn="l">
+              <a:defRPr sz="2800" b="1" i="0">
+                <a:solidFill>
+                  <a:srgbClr val="FFFFFF"/>
+                </a:solidFill>
+                <a:latin typeface="Calibri"/>
+              </a:defRPr>
+            </a:pPr>
+            <a:r>
+              <a:t>Hanna Minko</a:t>
+            </a:r>
+          </a:p>
+        </p:txBody>
+      </p:sp>
+      <p:sp>
+        <p:nvSpPr>
+          <p:cNvPr id="6" name="TextBox 5"/>
+          <p:cNvSpPr txBox="1"/>
+          <p:nvPr/>
+        </p:nvSpPr>
+        <p:spPr>
+          <a:xfrm>
+            <a:off x="1097280" y="2743200"/>
+            <a:ext cx="9966960" cy="365760"/>
+          </a:xfrm>
+          <a:prstGeom prst="rect">
+            <a:avLst/>
+          </a:prstGeom>
+          <a:noFill/>
+        </p:spPr>
+        <p:txBody>
+          <a:bodyPr wrap="square">
+            <a:spAutoFit/>
+          </a:bodyPr>
+          <a:lstStyle/>
+          <a:p>
+            <a:pPr algn="l">
+              <a:defRPr sz="1400" b="0" i="0">
+                <a:solidFill>
+                  <a:srgbClr val="8F95A3"/>
+                </a:solidFill>
+                <a:latin typeface="Calibri"/>
+              </a:defRPr>
+            </a:pPr>
+            <a:r>
+              <a:t>March 03</a:t>
+            </a:r>
+          </a:p>
+        </p:txBody>
+      </p:sp>
+      <p:sp>
+        <p:nvSpPr>
+          <p:cNvPr id="7" name="TextBox 6"/>
+          <p:cNvSpPr txBox="1"/>
+          <p:nvPr/>
+        </p:nvSpPr>
+        <p:spPr>
+          <a:xfrm>
+            <a:off x="1097280" y="3291840"/>
+            <a:ext cx="9966960" cy="914400"/>
+          </a:xfrm>
+          <a:prstGeom prst="rect">
+            <a:avLst/>
+          </a:prstGeom>
+          <a:noFill/>
+        </p:spPr>
+        <p:txBody>
+          <a:bodyPr wrap="square">
+            <a:spAutoFit/>
+          </a:bodyPr>
+          <a:lstStyle/>
+          <a:p>
+            <a:pPr algn="l">
+              <a:defRPr sz="1600" b="0" i="0">
+                <a:solidFill>
+                  <a:srgbClr val="E2E2EA"/>
+                </a:solidFill>
+                <a:latin typeface="Calibri"/>
+              </a:defRPr>
+            </a:pPr>
+            <a:r>
+              <a:t>Wishing you an amazing day filled with joy and celebration!</a:t>
+            </a:r>
+          </a:p>
+        </p:txBody>
+      </p:sp>
+      <p:sp>
+        <p:nvSpPr>
+          <p:cNvPr id="8" name="TextBox 7"/>
+          <p:cNvSpPr txBox="1"/>
+          <p:nvPr/>
+        </p:nvSpPr>
+        <p:spPr>
+          <a:xfrm>
+            <a:off x="1097280" y="4572000"/>
+            <a:ext cx="9966960" cy="457200"/>
+          </a:xfrm>
+          <a:prstGeom prst="rect">
+            <a:avLst/>
+          </a:prstGeom>
+          <a:noFill/>
+        </p:spPr>
+        <p:txBody>
+          <a:bodyPr wrap="square">
+            <a:spAutoFit/>
+          </a:bodyPr>
+          <a:lstStyle/>
+          <a:p>
+            <a:pPr algn="l">
+              <a:defRPr sz="1400" b="0" i="1">
+                <a:solidFill>
+                  <a:srgbClr val="FFB72B"/>
+                </a:solidFill>
+                <a:latin typeface="Calibri"/>
+              </a:defRPr>
+            </a:pPr>
+            <a:r>
+              <a:t>With love, Your Appodeal Team 💜</a:t>
+            </a:r>
+          </a:p>
+        </p:txBody>
+      </p:sp>
+    </p:spTree>
+  </p:cSld>
+  <p:clrMapOvr>
+    <a:masterClrMapping/>
+  </p:clrMapOvr>
+</p:sld>
+</file>
+
+<file path=ppt/slides/slide23.xml><?xml version="1.0" encoding="utf-8"?>
+<p:sld xmlns:a="http://schemas.openxmlformats.org/drawingml/2006/main" xmlns:p="http://schemas.openxmlformats.org/presentationml/2006/main" xmlns:r="http://schemas.openxmlformats.org/officeDocument/2006/relationships">
+  <p:cSld>
+    <p:bg>
+      <p:bgPr>
+        <a:solidFill>
+          <a:srgbClr val="08080C"/>
+        </a:solidFill>
+        <a:effectLst/>
+      </p:bgPr>
+    </p:bg>
+    <p:spTree>
+      <p:nvGrpSpPr>
+        <p:cNvPr id="1" name=""/>
+        <p:cNvGrpSpPr/>
+        <p:nvPr/>
+      </p:nvGrpSpPr>
+      <p:grpSpPr/>
+      <p:sp>
+        <p:nvSpPr>
+          <p:cNvPr id="2" name="Rectangle 1"/>
+          <p:cNvSpPr/>
+          <p:nvPr/>
+        </p:nvSpPr>
+        <p:spPr>
+          <a:xfrm>
+            <a:off x="0" y="365760"/>
+            <a:ext cx="12191695" cy="54864"/>
+          </a:xfrm>
+          <a:prstGeom prst="rect">
+            <a:avLst/>
+          </a:prstGeom>
+          <a:solidFill>
+            <a:srgbClr val="FFB72B"/>
+          </a:solidFill>
+          <a:ln>
+            <a:noFill/>
+          </a:ln>
+        </p:spPr>
+        <p:style>
+          <a:lnRef idx="1">
+            <a:schemeClr val="accent1"/>
+          </a:lnRef>
+          <a:fillRef idx="3">
+            <a:schemeClr val="accent1"/>
+          </a:fillRef>
+          <a:effectRef idx="2">
+            <a:schemeClr val="accent1"/>
+          </a:effectRef>
+          <a:fontRef idx="minor">
+            <a:schemeClr val="lt1"/>
+          </a:fontRef>
+        </p:style>
+        <p:txBody>
+          <a:bodyPr rtlCol="0" anchor="ctr"/>
+          <a:lstStyle/>
+          <a:p>
+            <a:pPr algn="ctr"/>
+          </a:p>
+        </p:txBody>
+      </p:sp>
+      <p:sp>
+        <p:nvSpPr>
+          <p:cNvPr id="3" name="TextBox 2"/>
+          <p:cNvSpPr txBox="1"/>
+          <p:nvPr/>
+        </p:nvSpPr>
+        <p:spPr>
+          <a:xfrm>
+            <a:off x="1097280" y="731520"/>
+            <a:ext cx="3657600" cy="365760"/>
+          </a:xfrm>
+          <a:prstGeom prst="rect">
+            <a:avLst/>
+          </a:prstGeom>
+          <a:noFill/>
+        </p:spPr>
+        <p:txBody>
+          <a:bodyPr wrap="none">
+            <a:spAutoFit/>
+          </a:bodyPr>
+          <a:lstStyle/>
+          <a:p>
+            <a:pPr algn="l">
+              <a:defRPr sz="1000" b="1">
+                <a:solidFill>
+                  <a:srgbClr val="FFB72B"/>
+                </a:solidFill>
+                <a:latin typeface="Calibri"/>
+              </a:defRPr>
+            </a:pPr>
+            <a:r>
+              <a:t>🎂  CELEBRATION</a:t>
+            </a:r>
+          </a:p>
+        </p:txBody>
+      </p:sp>
+      <p:sp>
+        <p:nvSpPr>
+          <p:cNvPr id="4" name="TextBox 3"/>
+          <p:cNvSpPr txBox="1"/>
+          <p:nvPr/>
+        </p:nvSpPr>
+        <p:spPr>
+          <a:xfrm>
+            <a:off x="1097280" y="1188720"/>
+            <a:ext cx="9966960" cy="731520"/>
+          </a:xfrm>
+          <a:prstGeom prst="rect">
+            <a:avLst/>
+          </a:prstGeom>
+          <a:noFill/>
+        </p:spPr>
+        <p:txBody>
+          <a:bodyPr wrap="square">
+            <a:spAutoFit/>
+          </a:bodyPr>
+          <a:lstStyle/>
+          <a:p>
+            <a:pPr algn="l">
+              <a:defRPr sz="3200" b="1" i="0">
+                <a:solidFill>
+                  <a:srgbClr val="FFB72B"/>
+                </a:solidFill>
+                <a:latin typeface="Calibri"/>
+              </a:defRPr>
+            </a:pPr>
+            <a:r>
+              <a:t>Happy Birthday!</a:t>
+            </a:r>
+          </a:p>
+        </p:txBody>
+      </p:sp>
+      <p:sp>
+        <p:nvSpPr>
+          <p:cNvPr id="5" name="TextBox 4"/>
+          <p:cNvSpPr txBox="1"/>
+          <p:nvPr/>
+        </p:nvSpPr>
+        <p:spPr>
+          <a:xfrm>
+            <a:off x="1097280" y="2103120"/>
+            <a:ext cx="9966960" cy="640080"/>
+          </a:xfrm>
+          <a:prstGeom prst="rect">
+            <a:avLst/>
+          </a:prstGeom>
+          <a:noFill/>
+        </p:spPr>
+        <p:txBody>
+          <a:bodyPr wrap="square">
+            <a:spAutoFit/>
+          </a:bodyPr>
+          <a:lstStyle/>
+          <a:p>
+            <a:pPr algn="l">
+              <a:defRPr sz="2800" b="1" i="0">
+                <a:solidFill>
+                  <a:srgbClr val="FFFFFF"/>
+                </a:solidFill>
+                <a:latin typeface="Calibri"/>
+              </a:defRPr>
+            </a:pPr>
+            <a:r>
+              <a:t>Giulia Galvani</a:t>
+            </a:r>
+          </a:p>
+        </p:txBody>
+      </p:sp>
+      <p:sp>
+        <p:nvSpPr>
+          <p:cNvPr id="6" name="TextBox 5"/>
+          <p:cNvSpPr txBox="1"/>
+          <p:nvPr/>
+        </p:nvSpPr>
+        <p:spPr>
+          <a:xfrm>
+            <a:off x="1097280" y="2743200"/>
+            <a:ext cx="9966960" cy="365760"/>
+          </a:xfrm>
+          <a:prstGeom prst="rect">
+            <a:avLst/>
+          </a:prstGeom>
+          <a:noFill/>
+        </p:spPr>
+        <p:txBody>
+          <a:bodyPr wrap="square">
+            <a:spAutoFit/>
+          </a:bodyPr>
+          <a:lstStyle/>
+          <a:p>
+            <a:pPr algn="l">
+              <a:defRPr sz="1400" b="0" i="0">
+                <a:solidFill>
+                  <a:srgbClr val="8F95A3"/>
+                </a:solidFill>
+                <a:latin typeface="Calibri"/>
+              </a:defRPr>
+            </a:pPr>
+            <a:r>
+              <a:t>March 03</a:t>
+            </a:r>
+          </a:p>
+        </p:txBody>
+      </p:sp>
+      <p:sp>
+        <p:nvSpPr>
+          <p:cNvPr id="7" name="TextBox 6"/>
+          <p:cNvSpPr txBox="1"/>
+          <p:nvPr/>
+        </p:nvSpPr>
+        <p:spPr>
+          <a:xfrm>
+            <a:off x="1097280" y="3291840"/>
+            <a:ext cx="9966960" cy="914400"/>
+          </a:xfrm>
+          <a:prstGeom prst="rect">
+            <a:avLst/>
+          </a:prstGeom>
+          <a:noFill/>
+        </p:spPr>
+        <p:txBody>
+          <a:bodyPr wrap="square">
+            <a:spAutoFit/>
+          </a:bodyPr>
+          <a:lstStyle/>
+          <a:p>
+            <a:pPr algn="l">
+              <a:defRPr sz="1600" b="0" i="0">
+                <a:solidFill>
+                  <a:srgbClr val="E2E2EA"/>
+                </a:solidFill>
+                <a:latin typeface="Calibri"/>
+              </a:defRPr>
+            </a:pPr>
+            <a:r>
+              <a:t>Wishing you an amazing day filled with joy and celebration!</a:t>
+            </a:r>
+          </a:p>
+        </p:txBody>
+      </p:sp>
+      <p:sp>
+        <p:nvSpPr>
+          <p:cNvPr id="8" name="TextBox 7"/>
+          <p:cNvSpPr txBox="1"/>
+          <p:nvPr/>
+        </p:nvSpPr>
+        <p:spPr>
+          <a:xfrm>
+            <a:off x="1097280" y="4572000"/>
+            <a:ext cx="9966960" cy="457200"/>
+          </a:xfrm>
+          <a:prstGeom prst="rect">
+            <a:avLst/>
+          </a:prstGeom>
+          <a:noFill/>
+        </p:spPr>
+        <p:txBody>
+          <a:bodyPr wrap="square">
+            <a:spAutoFit/>
+          </a:bodyPr>
+          <a:lstStyle/>
+          <a:p>
+            <a:pPr algn="l">
+              <a:defRPr sz="1400" b="0" i="1">
+                <a:solidFill>
+                  <a:srgbClr val="FFB72B"/>
+                </a:solidFill>
+                <a:latin typeface="Calibri"/>
+              </a:defRPr>
+            </a:pPr>
+            <a:r>
+              <a:t>With love, Your Appodeal Team 💜</a:t>
+            </a:r>
+          </a:p>
+        </p:txBody>
+      </p:sp>
+    </p:spTree>
+  </p:cSld>
+  <p:clrMapOvr>
+    <a:masterClrMapping/>
+  </p:clrMapOvr>
+</p:sld>
+</file>
+
+<file path=ppt/slides/slide24.xml><?xml version="1.0" encoding="utf-8"?>
+<p:sld xmlns:a="http://schemas.openxmlformats.org/drawingml/2006/main" xmlns:p="http://schemas.openxmlformats.org/presentationml/2006/main" xmlns:r="http://schemas.openxmlformats.org/officeDocument/2006/relationships">
+  <p:cSld>
+    <p:bg>
+      <p:bgPr>
+        <a:solidFill>
+          <a:srgbClr val="08080C"/>
+        </a:solidFill>
+        <a:effectLst/>
+      </p:bgPr>
+    </p:bg>
+    <p:spTree>
+      <p:nvGrpSpPr>
+        <p:cNvPr id="1" name=""/>
+        <p:cNvGrpSpPr/>
+        <p:nvPr/>
+      </p:nvGrpSpPr>
+      <p:grpSpPr/>
+      <p:sp>
+        <p:nvSpPr>
+          <p:cNvPr id="2" name="Rectangle 1"/>
+          <p:cNvSpPr/>
+          <p:nvPr/>
+        </p:nvSpPr>
+        <p:spPr>
+          <a:xfrm>
+            <a:off x="0" y="365760"/>
+            <a:ext cx="12191695" cy="54864"/>
+          </a:xfrm>
+          <a:prstGeom prst="rect">
+            <a:avLst/>
+          </a:prstGeom>
+          <a:solidFill>
+            <a:srgbClr val="FFB72B"/>
+          </a:solidFill>
+          <a:ln>
+            <a:noFill/>
+          </a:ln>
+        </p:spPr>
+        <p:style>
+          <a:lnRef idx="1">
+            <a:schemeClr val="accent1"/>
+          </a:lnRef>
+          <a:fillRef idx="3">
+            <a:schemeClr val="accent1"/>
+          </a:fillRef>
+          <a:effectRef idx="2">
+            <a:schemeClr val="accent1"/>
+          </a:effectRef>
+          <a:fontRef idx="minor">
+            <a:schemeClr val="lt1"/>
+          </a:fontRef>
+        </p:style>
+        <p:txBody>
+          <a:bodyPr rtlCol="0" anchor="ctr"/>
+          <a:lstStyle/>
+          <a:p>
+            <a:pPr algn="ctr"/>
+          </a:p>
+        </p:txBody>
+      </p:sp>
+      <p:sp>
+        <p:nvSpPr>
+          <p:cNvPr id="3" name="TextBox 2"/>
+          <p:cNvSpPr txBox="1"/>
+          <p:nvPr/>
+        </p:nvSpPr>
+        <p:spPr>
+          <a:xfrm>
+            <a:off x="1097280" y="731520"/>
+            <a:ext cx="3657600" cy="365760"/>
+          </a:xfrm>
+          <a:prstGeom prst="rect">
+            <a:avLst/>
+          </a:prstGeom>
+          <a:noFill/>
+        </p:spPr>
+        <p:txBody>
+          <a:bodyPr wrap="none">
+            <a:spAutoFit/>
+          </a:bodyPr>
+          <a:lstStyle/>
+          <a:p>
+            <a:pPr algn="l">
+              <a:defRPr sz="1000" b="1">
+                <a:solidFill>
+                  <a:srgbClr val="FFB72B"/>
+                </a:solidFill>
+                <a:latin typeface="Calibri"/>
+              </a:defRPr>
+            </a:pPr>
+            <a:r>
+              <a:t>🎂  CELEBRATION</a:t>
+            </a:r>
+          </a:p>
+        </p:txBody>
+      </p:sp>
+      <p:sp>
+        <p:nvSpPr>
+          <p:cNvPr id="4" name="TextBox 3"/>
+          <p:cNvSpPr txBox="1"/>
+          <p:nvPr/>
+        </p:nvSpPr>
+        <p:spPr>
+          <a:xfrm>
+            <a:off x="1097280" y="1188720"/>
+            <a:ext cx="9966960" cy="731520"/>
+          </a:xfrm>
+          <a:prstGeom prst="rect">
+            <a:avLst/>
+          </a:prstGeom>
+          <a:noFill/>
+        </p:spPr>
+        <p:txBody>
+          <a:bodyPr wrap="square">
+            <a:spAutoFit/>
+          </a:bodyPr>
+          <a:lstStyle/>
+          <a:p>
+            <a:pPr algn="l">
+              <a:defRPr sz="3200" b="1" i="0">
+                <a:solidFill>
+                  <a:srgbClr val="FFB72B"/>
+                </a:solidFill>
+                <a:latin typeface="Calibri"/>
+              </a:defRPr>
+            </a:pPr>
+            <a:r>
+              <a:t>Happy Birthday!</a:t>
+            </a:r>
+          </a:p>
+        </p:txBody>
+      </p:sp>
+      <p:sp>
+        <p:nvSpPr>
+          <p:cNvPr id="5" name="TextBox 4"/>
+          <p:cNvSpPr txBox="1"/>
+          <p:nvPr/>
+        </p:nvSpPr>
+        <p:spPr>
+          <a:xfrm>
+            <a:off x="1097280" y="2103120"/>
+            <a:ext cx="9966960" cy="640080"/>
+          </a:xfrm>
+          <a:prstGeom prst="rect">
+            <a:avLst/>
+          </a:prstGeom>
+          <a:noFill/>
+        </p:spPr>
+        <p:txBody>
+          <a:bodyPr wrap="square">
+            <a:spAutoFit/>
+          </a:bodyPr>
+          <a:lstStyle/>
+          <a:p>
+            <a:pPr algn="l">
+              <a:defRPr sz="2800" b="1" i="0">
+                <a:solidFill>
+                  <a:srgbClr val="FFFFFF"/>
+                </a:solidFill>
+                <a:latin typeface="Calibri"/>
+              </a:defRPr>
+            </a:pPr>
+            <a:r>
+              <a:t>Francesco Cerigioni</a:t>
+            </a:r>
+          </a:p>
+        </p:txBody>
+      </p:sp>
+      <p:sp>
+        <p:nvSpPr>
+          <p:cNvPr id="6" name="TextBox 5"/>
+          <p:cNvSpPr txBox="1"/>
+          <p:nvPr/>
+        </p:nvSpPr>
+        <p:spPr>
+          <a:xfrm>
+            <a:off x="1097280" y="2743200"/>
+            <a:ext cx="9966960" cy="365760"/>
+          </a:xfrm>
+          <a:prstGeom prst="rect">
+            <a:avLst/>
+          </a:prstGeom>
+          <a:noFill/>
+        </p:spPr>
+        <p:txBody>
+          <a:bodyPr wrap="square">
+            <a:spAutoFit/>
+          </a:bodyPr>
+          <a:lstStyle/>
+          <a:p>
+            <a:pPr algn="l">
+              <a:defRPr sz="1400" b="0" i="0">
+                <a:solidFill>
+                  <a:srgbClr val="8F95A3"/>
+                </a:solidFill>
+                <a:latin typeface="Calibri"/>
+              </a:defRPr>
+            </a:pPr>
+            <a:r>
+              <a:t>March 03</a:t>
+            </a:r>
+          </a:p>
+        </p:txBody>
+      </p:sp>
+      <p:sp>
+        <p:nvSpPr>
+          <p:cNvPr id="7" name="TextBox 6"/>
+          <p:cNvSpPr txBox="1"/>
+          <p:nvPr/>
+        </p:nvSpPr>
+        <p:spPr>
+          <a:xfrm>
+            <a:off x="1097280" y="3291840"/>
+            <a:ext cx="9966960" cy="914400"/>
+          </a:xfrm>
+          <a:prstGeom prst="rect">
+            <a:avLst/>
+          </a:prstGeom>
+          <a:noFill/>
+        </p:spPr>
+        <p:txBody>
+          <a:bodyPr wrap="square">
+            <a:spAutoFit/>
+          </a:bodyPr>
+          <a:lstStyle/>
+          <a:p>
+            <a:pPr algn="l">
+              <a:defRPr sz="1600" b="0" i="0">
+                <a:solidFill>
+                  <a:srgbClr val="E2E2EA"/>
+                </a:solidFill>
+                <a:latin typeface="Calibri"/>
+              </a:defRPr>
+            </a:pPr>
+            <a:r>
+              <a:t>Wishing you an amazing day filled with joy and celebration!</a:t>
+            </a:r>
+          </a:p>
+        </p:txBody>
+      </p:sp>
+      <p:sp>
+        <p:nvSpPr>
+          <p:cNvPr id="8" name="TextBox 7"/>
+          <p:cNvSpPr txBox="1"/>
+          <p:nvPr/>
+        </p:nvSpPr>
+        <p:spPr>
+          <a:xfrm>
+            <a:off x="1097280" y="4572000"/>
+            <a:ext cx="9966960" cy="457200"/>
+          </a:xfrm>
+          <a:prstGeom prst="rect">
+            <a:avLst/>
+          </a:prstGeom>
+          <a:noFill/>
+        </p:spPr>
+        <p:txBody>
+          <a:bodyPr wrap="square">
+            <a:spAutoFit/>
+          </a:bodyPr>
+          <a:lstStyle/>
+          <a:p>
+            <a:pPr algn="l">
+              <a:defRPr sz="1400" b="0" i="1">
+                <a:solidFill>
+                  <a:srgbClr val="FFB72B"/>
+                </a:solidFill>
+                <a:latin typeface="Calibri"/>
+              </a:defRPr>
+            </a:pPr>
+            <a:r>
+              <a:t>With love, Your Appodeal Team 💜</a:t>
+            </a:r>
+          </a:p>
+        </p:txBody>
+      </p:sp>
+    </p:spTree>
+  </p:cSld>
+  <p:clrMapOvr>
+    <a:masterClrMapping/>
+  </p:clrMapOvr>
+</p:sld>
+</file>
+
+<file path=ppt/slides/slide25.xml><?xml version="1.0" encoding="utf-8"?>
+<p:sld xmlns:a="http://schemas.openxmlformats.org/drawingml/2006/main" xmlns:p="http://schemas.openxmlformats.org/presentationml/2006/main" xmlns:r="http://schemas.openxmlformats.org/officeDocument/2006/relationships">
+  <p:cSld>
+    <p:bg>
+      <p:bgPr>
+        <a:solidFill>
+          <a:srgbClr val="08080C"/>
+        </a:solidFill>
+        <a:effectLst/>
+      </p:bgPr>
+    </p:bg>
+    <p:spTree>
+      <p:nvGrpSpPr>
+        <p:cNvPr id="1" name=""/>
+        <p:cNvGrpSpPr/>
+        <p:nvPr/>
+      </p:nvGrpSpPr>
+      <p:grpSpPr/>
+      <p:sp>
+        <p:nvSpPr>
+          <p:cNvPr id="2" name="Rectangle 1"/>
+          <p:cNvSpPr/>
+          <p:nvPr/>
+        </p:nvSpPr>
+        <p:spPr>
+          <a:xfrm>
+            <a:off x="0" y="365760"/>
+            <a:ext cx="12191695" cy="54864"/>
+          </a:xfrm>
+          <a:prstGeom prst="rect">
+            <a:avLst/>
+          </a:prstGeom>
+          <a:solidFill>
+            <a:srgbClr val="FFB72B"/>
+          </a:solidFill>
+          <a:ln>
+            <a:noFill/>
+          </a:ln>
+        </p:spPr>
+        <p:style>
+          <a:lnRef idx="1">
+            <a:schemeClr val="accent1"/>
+          </a:lnRef>
+          <a:fillRef idx="3">
+            <a:schemeClr val="accent1"/>
+          </a:fillRef>
+          <a:effectRef idx="2">
+            <a:schemeClr val="accent1"/>
+          </a:effectRef>
+          <a:fontRef idx="minor">
+            <a:schemeClr val="lt1"/>
+          </a:fontRef>
+        </p:style>
+        <p:txBody>
+          <a:bodyPr rtlCol="0" anchor="ctr"/>
+          <a:lstStyle/>
+          <a:p>
+            <a:pPr algn="ctr"/>
+          </a:p>
+        </p:txBody>
+      </p:sp>
+      <p:sp>
+        <p:nvSpPr>
+          <p:cNvPr id="3" name="TextBox 2"/>
+          <p:cNvSpPr txBox="1"/>
+          <p:nvPr/>
+        </p:nvSpPr>
+        <p:spPr>
+          <a:xfrm>
+            <a:off x="1097280" y="731520"/>
+            <a:ext cx="3657600" cy="365760"/>
+          </a:xfrm>
+          <a:prstGeom prst="rect">
+            <a:avLst/>
+          </a:prstGeom>
+          <a:noFill/>
+        </p:spPr>
+        <p:txBody>
+          <a:bodyPr wrap="none">
+            <a:spAutoFit/>
+          </a:bodyPr>
+          <a:lstStyle/>
+          <a:p>
+            <a:pPr algn="l">
+              <a:defRPr sz="1000" b="1">
+                <a:solidFill>
+                  <a:srgbClr val="FFB72B"/>
+                </a:solidFill>
+                <a:latin typeface="Calibri"/>
+              </a:defRPr>
+            </a:pPr>
+            <a:r>
+              <a:t>🎂  CELEBRATION</a:t>
+            </a:r>
+          </a:p>
+        </p:txBody>
+      </p:sp>
+      <p:sp>
+        <p:nvSpPr>
+          <p:cNvPr id="4" name="TextBox 3"/>
+          <p:cNvSpPr txBox="1"/>
+          <p:nvPr/>
+        </p:nvSpPr>
+        <p:spPr>
+          <a:xfrm>
+            <a:off x="1097280" y="1188720"/>
+            <a:ext cx="9966960" cy="731520"/>
+          </a:xfrm>
+          <a:prstGeom prst="rect">
+            <a:avLst/>
+          </a:prstGeom>
+          <a:noFill/>
+        </p:spPr>
+        <p:txBody>
+          <a:bodyPr wrap="square">
+            <a:spAutoFit/>
+          </a:bodyPr>
+          <a:lstStyle/>
+          <a:p>
+            <a:pPr algn="l">
+              <a:defRPr sz="3200" b="1" i="0">
+                <a:solidFill>
+                  <a:srgbClr val="FFB72B"/>
+                </a:solidFill>
+                <a:latin typeface="Calibri"/>
+              </a:defRPr>
+            </a:pPr>
+            <a:r>
+              <a:t>Happy Birthday!</a:t>
+            </a:r>
+          </a:p>
+        </p:txBody>
+      </p:sp>
+      <p:sp>
+        <p:nvSpPr>
+          <p:cNvPr id="5" name="TextBox 4"/>
+          <p:cNvSpPr txBox="1"/>
+          <p:nvPr/>
+        </p:nvSpPr>
+        <p:spPr>
+          <a:xfrm>
+            <a:off x="1097280" y="2103120"/>
+            <a:ext cx="9966960" cy="640080"/>
+          </a:xfrm>
+          <a:prstGeom prst="rect">
+            <a:avLst/>
+          </a:prstGeom>
+          <a:noFill/>
+        </p:spPr>
+        <p:txBody>
+          <a:bodyPr wrap="square">
+            <a:spAutoFit/>
+          </a:bodyPr>
+          <a:lstStyle/>
+          <a:p>
+            <a:pPr algn="l">
+              <a:defRPr sz="2800" b="1" i="0">
+                <a:solidFill>
+                  <a:srgbClr val="FFFFFF"/>
+                </a:solidFill>
+                <a:latin typeface="Calibri"/>
+              </a:defRPr>
+            </a:pPr>
+            <a:r>
+              <a:t>Olga Petriakova</a:t>
+            </a:r>
+          </a:p>
+        </p:txBody>
+      </p:sp>
+      <p:sp>
+        <p:nvSpPr>
+          <p:cNvPr id="6" name="TextBox 5"/>
+          <p:cNvSpPr txBox="1"/>
+          <p:nvPr/>
+        </p:nvSpPr>
+        <p:spPr>
+          <a:xfrm>
+            <a:off x="1097280" y="2743200"/>
+            <a:ext cx="9966960" cy="365760"/>
+          </a:xfrm>
+          <a:prstGeom prst="rect">
+            <a:avLst/>
+          </a:prstGeom>
+          <a:noFill/>
+        </p:spPr>
+        <p:txBody>
+          <a:bodyPr wrap="square">
+            <a:spAutoFit/>
+          </a:bodyPr>
+          <a:lstStyle/>
+          <a:p>
+            <a:pPr algn="l">
+              <a:defRPr sz="1400" b="0" i="0">
+                <a:solidFill>
+                  <a:srgbClr val="8F95A3"/>
+                </a:solidFill>
+                <a:latin typeface="Calibri"/>
+              </a:defRPr>
+            </a:pPr>
+            <a:r>
+              <a:t>March 03</a:t>
+            </a:r>
+          </a:p>
+        </p:txBody>
+      </p:sp>
+      <p:sp>
+        <p:nvSpPr>
+          <p:cNvPr id="7" name="TextBox 6"/>
+          <p:cNvSpPr txBox="1"/>
+          <p:nvPr/>
+        </p:nvSpPr>
+        <p:spPr>
+          <a:xfrm>
+            <a:off x="1097280" y="3291840"/>
+            <a:ext cx="9966960" cy="914400"/>
+          </a:xfrm>
+          <a:prstGeom prst="rect">
+            <a:avLst/>
+          </a:prstGeom>
+          <a:noFill/>
+        </p:spPr>
+        <p:txBody>
+          <a:bodyPr wrap="square">
+            <a:spAutoFit/>
+          </a:bodyPr>
+          <a:lstStyle/>
+          <a:p>
+            <a:pPr algn="l">
+              <a:defRPr sz="1600" b="0" i="0">
+                <a:solidFill>
+                  <a:srgbClr val="E2E2EA"/>
+                </a:solidFill>
+                <a:latin typeface="Calibri"/>
+              </a:defRPr>
+            </a:pPr>
+            <a:r>
+              <a:t>Wishing you an amazing day filled with joy and celebration!</a:t>
+            </a:r>
+          </a:p>
+        </p:txBody>
+      </p:sp>
+      <p:sp>
+        <p:nvSpPr>
+          <p:cNvPr id="8" name="TextBox 7"/>
+          <p:cNvSpPr txBox="1"/>
+          <p:nvPr/>
+        </p:nvSpPr>
+        <p:spPr>
+          <a:xfrm>
+            <a:off x="1097280" y="4572000"/>
+            <a:ext cx="9966960" cy="457200"/>
+          </a:xfrm>
+          <a:prstGeom prst="rect">
+            <a:avLst/>
+          </a:prstGeom>
+          <a:noFill/>
+        </p:spPr>
+        <p:txBody>
+          <a:bodyPr wrap="square">
+            <a:spAutoFit/>
+          </a:bodyPr>
+          <a:lstStyle/>
+          <a:p>
+            <a:pPr algn="l">
+              <a:defRPr sz="1400" b="0" i="1">
+                <a:solidFill>
+                  <a:srgbClr val="FFB72B"/>
+                </a:solidFill>
+                <a:latin typeface="Calibri"/>
+              </a:defRPr>
+            </a:pPr>
+            <a:r>
+              <a:t>With love, Your Appodeal Team 💜</a:t>
+            </a:r>
+          </a:p>
+        </p:txBody>
+      </p:sp>
+    </p:spTree>
+  </p:cSld>
+  <p:clrMapOvr>
+    <a:masterClrMapping/>
+  </p:clrMapOvr>
+</p:sld>
+</file>
+
+<file path=ppt/slides/slide26.xml><?xml version="1.0" encoding="utf-8"?>
+<p:sld xmlns:a="http://schemas.openxmlformats.org/drawingml/2006/main" xmlns:p="http://schemas.openxmlformats.org/presentationml/2006/main" xmlns:r="http://schemas.openxmlformats.org/officeDocument/2006/relationships">
+  <p:cSld>
+    <p:bg>
+      <p:bgPr>
+        <a:solidFill>
+          <a:srgbClr val="08080C"/>
+        </a:solidFill>
+        <a:effectLst/>
+      </p:bgPr>
+    </p:bg>
+    <p:spTree>
+      <p:nvGrpSpPr>
+        <p:cNvPr id="1" name=""/>
+        <p:cNvGrpSpPr/>
+        <p:nvPr/>
+      </p:nvGrpSpPr>
+      <p:grpSpPr/>
+      <p:sp>
+        <p:nvSpPr>
+          <p:cNvPr id="2" name="Rectangle 1"/>
+          <p:cNvSpPr/>
+          <p:nvPr/>
+        </p:nvSpPr>
+        <p:spPr>
+          <a:xfrm>
+            <a:off x="0" y="365760"/>
+            <a:ext cx="12191695" cy="54864"/>
+          </a:xfrm>
+          <a:prstGeom prst="rect">
+            <a:avLst/>
+          </a:prstGeom>
+          <a:solidFill>
+            <a:srgbClr val="00FFD1"/>
+          </a:solidFill>
+          <a:ln>
+            <a:noFill/>
+          </a:ln>
+        </p:spPr>
+        <p:style>
+          <a:lnRef idx="1">
+            <a:schemeClr val="accent1"/>
+          </a:lnRef>
+          <a:fillRef idx="3">
+            <a:schemeClr val="accent1"/>
+          </a:fillRef>
+          <a:effectRef idx="2">
+            <a:schemeClr val="accent1"/>
+          </a:effectRef>
+          <a:fontRef idx="minor">
+            <a:schemeClr val="lt1"/>
+          </a:fontRef>
+        </p:style>
+        <p:txBody>
+          <a:bodyPr rtlCol="0" anchor="ctr"/>
+          <a:lstStyle/>
+          <a:p>
+            <a:pPr algn="ctr"/>
+          </a:p>
+        </p:txBody>
+      </p:sp>
+      <p:sp>
+        <p:nvSpPr>
+          <p:cNvPr id="3" name="TextBox 2"/>
+          <p:cNvSpPr txBox="1"/>
+          <p:nvPr/>
+        </p:nvSpPr>
+        <p:spPr>
+          <a:xfrm>
+            <a:off x="1097280" y="731520"/>
+            <a:ext cx="3657600" cy="365760"/>
+          </a:xfrm>
+          <a:prstGeom prst="rect">
+            <a:avLst/>
+          </a:prstGeom>
+          <a:noFill/>
+        </p:spPr>
+        <p:txBody>
+          <a:bodyPr wrap="none">
+            <a:spAutoFit/>
+          </a:bodyPr>
+          <a:lstStyle/>
+          <a:p>
+            <a:pPr algn="l">
+              <a:defRPr sz="1000" b="1">
+                <a:solidFill>
+                  <a:srgbClr val="00FFD1"/>
+                </a:solidFill>
+                <a:latin typeface="Calibri"/>
+              </a:defRPr>
+            </a:pPr>
+            <a:r>
+              <a:t>📢  OFFICE LIFE</a:t>
+            </a:r>
+          </a:p>
+        </p:txBody>
+      </p:sp>
+      <p:sp>
+        <p:nvSpPr>
+          <p:cNvPr id="4" name="TextBox 3"/>
+          <p:cNvSpPr txBox="1"/>
+          <p:nvPr/>
+        </p:nvSpPr>
+        <p:spPr>
+          <a:xfrm>
+            <a:off x="1097280" y="1188720"/>
+            <a:ext cx="9966960" cy="731520"/>
+          </a:xfrm>
+          <a:prstGeom prst="rect">
+            <a:avLst/>
+          </a:prstGeom>
+          <a:noFill/>
+        </p:spPr>
+        <p:txBody>
+          <a:bodyPr wrap="square">
+            <a:spAutoFit/>
+          </a:bodyPr>
+          <a:lstStyle/>
+          <a:p>
+            <a:pPr algn="l">
+              <a:defRPr sz="3200" b="1" i="0">
+                <a:solidFill>
+                  <a:srgbClr val="00FFD1"/>
+                </a:solidFill>
+                <a:latin typeface="Calibri"/>
+              </a:defRPr>
+            </a:pPr>
+            <a:r>
+              <a:t>From #general</a:t>
             </a:r>
           </a:p>
         </p:txBody>
@@ -3420,7 +8291,11 @@
               </a:defRPr>
             </a:pPr>
             <a:r>
-              <a:t>A New Day Begins</a:t>
+              <a:t>Hi team and Happy Monday!  *&lt;!here&gt;*</a:t>
+            </a:r>
+            <a:br/>
+            <a:r>
+              <a:t>Welcome &lt;@U0AH13MNHLJ&gt; - our new *AI &amp;amp; ...</a:t>
             </a:r>
           </a:p>
         </p:txBody>
@@ -3433,8 +8308,67 @@
         </p:nvSpPr>
         <p:spPr>
           <a:xfrm>
-            <a:off x="1371600" y="2926080"/>
-            <a:ext cx="9418320" cy="548640"/>
+            <a:off x="1371600" y="2743200"/>
+            <a:ext cx="9692640" cy="1828800"/>
+          </a:xfrm>
+          <a:prstGeom prst="rect">
+            <a:avLst/>
+          </a:prstGeom>
+          <a:noFill/>
+        </p:spPr>
+        <p:txBody>
+          <a:bodyPr wrap="square">
+            <a:spAutoFit/>
+          </a:bodyPr>
+          <a:lstStyle/>
+          <a:p>
+            <a:pPr algn="l">
+              <a:defRPr sz="1500" b="0" i="1">
+                <a:solidFill>
+                  <a:srgbClr val="E2E2EA"/>
+                </a:solidFill>
+                <a:latin typeface="Calibri"/>
+              </a:defRPr>
+            </a:pPr>
+            <a:r>
+              <a:t>"Hi team and Happy Monday!  *&lt;!here&gt;*</a:t>
+            </a:r>
+            <a:br/>
+            <a:r>
+              <a:t>Welcome &lt;@U0AH13MNHLJ&gt; - our new *AI &amp;amp; Automation Analyst* :rocket:</a:t>
+            </a:r>
+            <a:br/>
+            <a:br/>
+            <a:r>
+              <a:t>He’s joining our IT team.</a:t>
+            </a:r>
+            <a:br/>
+            <a:br/>
+            <a:r>
+              <a:t>_*A couple of words about himself:*_</a:t>
+            </a:r>
+            <a:br/>
+            <a:br/>
+            <a:r>
+              <a:t>"Hi everyone,</a:t>
+            </a:r>
+            <a:br/>
+            <a:r>
+              <a:t>I’m Armaan. I recently graduated from the University of Miami, where I studied Artificial Intelligence &amp;amp; Da"</a:t>
+            </a:r>
+          </a:p>
+        </p:txBody>
+      </p:sp>
+      <p:sp>
+        <p:nvSpPr>
+          <p:cNvPr id="7" name="TextBox 6"/>
+          <p:cNvSpPr txBox="1"/>
+          <p:nvPr/>
+        </p:nvSpPr>
+        <p:spPr>
+          <a:xfrm>
+            <a:off x="1097280" y="4754880"/>
+            <a:ext cx="9966960" cy="365760"/>
           </a:xfrm>
           <a:prstGeom prst="rect">
             <a:avLst/>
@@ -3450,49 +8384,13 @@
             <a:pPr algn="l">
               <a:defRPr sz="1400" b="0" i="0">
                 <a:solidFill>
-                  <a:srgbClr val="E2E2EA"/>
-                </a:solidFill>
-                <a:latin typeface="Calibri"/>
-              </a:defRPr>
-            </a:pPr>
-            <a:r>
-              <a:t>🌱 What are you working on today?</a:t>
-            </a:r>
-          </a:p>
-        </p:txBody>
-      </p:sp>
-      <p:sp>
-        <p:nvSpPr>
-          <p:cNvPr id="7" name="TextBox 6"/>
-          <p:cNvSpPr txBox="1"/>
-          <p:nvPr/>
-        </p:nvSpPr>
-        <p:spPr>
-          <a:xfrm>
-            <a:off x="1371600" y="3657600"/>
-            <a:ext cx="9418320" cy="548640"/>
-          </a:xfrm>
-          <a:prstGeom prst="rect">
-            <a:avLst/>
-          </a:prstGeom>
-          <a:noFill/>
-        </p:spPr>
-        <p:txBody>
-          <a:bodyPr wrap="square">
-            <a:spAutoFit/>
-          </a:bodyPr>
-          <a:lstStyle/>
-          <a:p>
-            <a:pPr algn="l">
-              <a:defRPr sz="1400" b="0" i="0">
-                <a:solidFill>
-                  <a:srgbClr val="E2E2EA"/>
-                </a:solidFill>
-                <a:latin typeface="Calibri"/>
-              </a:defRPr>
-            </a:pPr>
-            <a:r>
-              <a:t>💡 What's one thing you're grateful for?</a:t>
+                  <a:srgbClr val="8F95A3"/>
+                </a:solidFill>
+                <a:latin typeface="Calibri"/>
+              </a:defRPr>
+            </a:pPr>
+            <a:r>
+              <a:t>— Daryna Rudavka</a:t>
             </a:r>
           </a:p>
         </p:txBody>
@@ -3500,42 +8398,6 @@
       <p:sp>
         <p:nvSpPr>
           <p:cNvPr id="8" name="TextBox 7"/>
-          <p:cNvSpPr txBox="1"/>
-          <p:nvPr/>
-        </p:nvSpPr>
-        <p:spPr>
-          <a:xfrm>
-            <a:off x="1097280" y="4754880"/>
-            <a:ext cx="9966960" cy="731520"/>
-          </a:xfrm>
-          <a:prstGeom prst="rect">
-            <a:avLst/>
-          </a:prstGeom>
-          <a:noFill/>
-        </p:spPr>
-        <p:txBody>
-          <a:bodyPr wrap="square">
-            <a:spAutoFit/>
-          </a:bodyPr>
-          <a:lstStyle/>
-          <a:p>
-            <a:pPr algn="l">
-              <a:defRPr sz="1500" b="0" i="1">
-                <a:solidFill>
-                  <a:srgbClr val="E2E2EA"/>
-                </a:solidFill>
-                <a:latin typeface="Calibri"/>
-              </a:defRPr>
-            </a:pPr>
-            <a:r>
-              <a:t>Every day is a chance to make an impact.</a:t>
-            </a:r>
-          </a:p>
-        </p:txBody>
-      </p:sp>
-      <p:sp>
-        <p:nvSpPr>
-          <p:cNvPr id="9" name="TextBox 8"/>
           <p:cNvSpPr txBox="1"/>
           <p:nvPr/>
         </p:nvSpPr>
@@ -3565,6 +8427,2590 @@
             </a:pPr>
             <a:r>
               <a:t>#general</a:t>
+            </a:r>
+          </a:p>
+        </p:txBody>
+      </p:sp>
+    </p:spTree>
+  </p:cSld>
+  <p:clrMapOvr>
+    <a:masterClrMapping/>
+  </p:clrMapOvr>
+</p:sld>
+</file>
+
+<file path=ppt/slides/slide27.xml><?xml version="1.0" encoding="utf-8"?>
+<p:sld xmlns:a="http://schemas.openxmlformats.org/drawingml/2006/main" xmlns:p="http://schemas.openxmlformats.org/presentationml/2006/main" xmlns:r="http://schemas.openxmlformats.org/officeDocument/2006/relationships">
+  <p:cSld>
+    <p:bg>
+      <p:bgPr>
+        <a:solidFill>
+          <a:srgbClr val="08080C"/>
+        </a:solidFill>
+        <a:effectLst/>
+      </p:bgPr>
+    </p:bg>
+    <p:spTree>
+      <p:nvGrpSpPr>
+        <p:cNvPr id="1" name=""/>
+        <p:cNvGrpSpPr/>
+        <p:nvPr/>
+      </p:nvGrpSpPr>
+      <p:grpSpPr/>
+      <p:sp>
+        <p:nvSpPr>
+          <p:cNvPr id="2" name="Rectangle 1"/>
+          <p:cNvSpPr/>
+          <p:nvPr/>
+        </p:nvSpPr>
+        <p:spPr>
+          <a:xfrm>
+            <a:off x="0" y="365760"/>
+            <a:ext cx="12191695" cy="54864"/>
+          </a:xfrm>
+          <a:prstGeom prst="rect">
+            <a:avLst/>
+          </a:prstGeom>
+          <a:solidFill>
+            <a:srgbClr val="00FFD1"/>
+          </a:solidFill>
+          <a:ln>
+            <a:noFill/>
+          </a:ln>
+        </p:spPr>
+        <p:style>
+          <a:lnRef idx="1">
+            <a:schemeClr val="accent1"/>
+          </a:lnRef>
+          <a:fillRef idx="3">
+            <a:schemeClr val="accent1"/>
+          </a:fillRef>
+          <a:effectRef idx="2">
+            <a:schemeClr val="accent1"/>
+          </a:effectRef>
+          <a:fontRef idx="minor">
+            <a:schemeClr val="lt1"/>
+          </a:fontRef>
+        </p:style>
+        <p:txBody>
+          <a:bodyPr rtlCol="0" anchor="ctr"/>
+          <a:lstStyle/>
+          <a:p>
+            <a:pPr algn="ctr"/>
+          </a:p>
+        </p:txBody>
+      </p:sp>
+      <p:sp>
+        <p:nvSpPr>
+          <p:cNvPr id="3" name="TextBox 2"/>
+          <p:cNvSpPr txBox="1"/>
+          <p:nvPr/>
+        </p:nvSpPr>
+        <p:spPr>
+          <a:xfrm>
+            <a:off x="1097280" y="731520"/>
+            <a:ext cx="3657600" cy="365760"/>
+          </a:xfrm>
+          <a:prstGeom prst="rect">
+            <a:avLst/>
+          </a:prstGeom>
+          <a:noFill/>
+        </p:spPr>
+        <p:txBody>
+          <a:bodyPr wrap="none">
+            <a:spAutoFit/>
+          </a:bodyPr>
+          <a:lstStyle/>
+          <a:p>
+            <a:pPr algn="l">
+              <a:defRPr sz="1000" b="1">
+                <a:solidFill>
+                  <a:srgbClr val="00FFD1"/>
+                </a:solidFill>
+                <a:latin typeface="Calibri"/>
+              </a:defRPr>
+            </a:pPr>
+            <a:r>
+              <a:t>📢  OFFICE LIFE</a:t>
+            </a:r>
+          </a:p>
+        </p:txBody>
+      </p:sp>
+      <p:sp>
+        <p:nvSpPr>
+          <p:cNvPr id="4" name="TextBox 3"/>
+          <p:cNvSpPr txBox="1"/>
+          <p:nvPr/>
+        </p:nvSpPr>
+        <p:spPr>
+          <a:xfrm>
+            <a:off x="1097280" y="1188720"/>
+            <a:ext cx="9966960" cy="731520"/>
+          </a:xfrm>
+          <a:prstGeom prst="rect">
+            <a:avLst/>
+          </a:prstGeom>
+          <a:noFill/>
+        </p:spPr>
+        <p:txBody>
+          <a:bodyPr wrap="square">
+            <a:spAutoFit/>
+          </a:bodyPr>
+          <a:lstStyle/>
+          <a:p>
+            <a:pPr algn="l">
+              <a:defRPr sz="3200" b="1" i="0">
+                <a:solidFill>
+                  <a:srgbClr val="00FFD1"/>
+                </a:solidFill>
+                <a:latin typeface="Calibri"/>
+              </a:defRPr>
+            </a:pPr>
+            <a:r>
+              <a:t>From #general</a:t>
+            </a:r>
+          </a:p>
+        </p:txBody>
+      </p:sp>
+      <p:sp>
+        <p:nvSpPr>
+          <p:cNvPr id="5" name="TextBox 4"/>
+          <p:cNvSpPr txBox="1"/>
+          <p:nvPr/>
+        </p:nvSpPr>
+        <p:spPr>
+          <a:xfrm>
+            <a:off x="1097280" y="2103120"/>
+            <a:ext cx="9966960" cy="457200"/>
+          </a:xfrm>
+          <a:prstGeom prst="rect">
+            <a:avLst/>
+          </a:prstGeom>
+          <a:noFill/>
+        </p:spPr>
+        <p:txBody>
+          <a:bodyPr wrap="square">
+            <a:spAutoFit/>
+          </a:bodyPr>
+          <a:lstStyle/>
+          <a:p>
+            <a:pPr algn="l">
+              <a:defRPr sz="1800" b="1" i="0">
+                <a:solidFill>
+                  <a:srgbClr val="FFFFFF"/>
+                </a:solidFill>
+                <a:latin typeface="Calibri"/>
+              </a:defRPr>
+            </a:pPr>
+            <a:r>
+              <a:t>Team, everyone who participated in the AI event — feel free to look for yourselv...</a:t>
+            </a:r>
+          </a:p>
+        </p:txBody>
+      </p:sp>
+      <p:sp>
+        <p:nvSpPr>
+          <p:cNvPr id="6" name="TextBox 5"/>
+          <p:cNvSpPr txBox="1"/>
+          <p:nvPr/>
+        </p:nvSpPr>
+        <p:spPr>
+          <a:xfrm>
+            <a:off x="1371600" y="2743200"/>
+            <a:ext cx="9692640" cy="1828800"/>
+          </a:xfrm>
+          <a:prstGeom prst="rect">
+            <a:avLst/>
+          </a:prstGeom>
+          <a:noFill/>
+        </p:spPr>
+        <p:txBody>
+          <a:bodyPr wrap="square">
+            <a:spAutoFit/>
+          </a:bodyPr>
+          <a:lstStyle/>
+          <a:p>
+            <a:pPr algn="l">
+              <a:defRPr sz="1500" b="0" i="1">
+                <a:solidFill>
+                  <a:srgbClr val="E2E2EA"/>
+                </a:solidFill>
+                <a:latin typeface="Calibri"/>
+              </a:defRPr>
+            </a:pPr>
+            <a:r>
+              <a:t>"Team, everyone who participated in the AI event — feel free to look for yourselves in &lt;https://www.dropbox.com/scl/fo/2e9oz0iriivhqcewfrukf/AJqEIzmbOOypTvck7nIYQ8Y?rlkey=pfkxyi38akcb91vwqq6m4j6ky&amp;amp;e=2&amp;amp;st=xyn5afsc&amp;amp;dl=0|the photos&gt;!</a:t>
+            </a:r>
+            <a:br/>
+            <a:r>
+              <a:t>I especially love the team pictures we took during the int"</a:t>
+            </a:r>
+          </a:p>
+        </p:txBody>
+      </p:sp>
+      <p:sp>
+        <p:nvSpPr>
+          <p:cNvPr id="7" name="TextBox 6"/>
+          <p:cNvSpPr txBox="1"/>
+          <p:nvPr/>
+        </p:nvSpPr>
+        <p:spPr>
+          <a:xfrm>
+            <a:off x="1097280" y="4754880"/>
+            <a:ext cx="9966960" cy="365760"/>
+          </a:xfrm>
+          <a:prstGeom prst="rect">
+            <a:avLst/>
+          </a:prstGeom>
+          <a:noFill/>
+        </p:spPr>
+        <p:txBody>
+          <a:bodyPr wrap="square">
+            <a:spAutoFit/>
+          </a:bodyPr>
+          <a:lstStyle/>
+          <a:p>
+            <a:pPr algn="l">
+              <a:defRPr sz="1400" b="0" i="0">
+                <a:solidFill>
+                  <a:srgbClr val="8F95A3"/>
+                </a:solidFill>
+                <a:latin typeface="Calibri"/>
+              </a:defRPr>
+            </a:pPr>
+            <a:r>
+              <a:t>— Mariia Moskvina</a:t>
+            </a:r>
+          </a:p>
+        </p:txBody>
+      </p:sp>
+      <p:sp>
+        <p:nvSpPr>
+          <p:cNvPr id="8" name="TextBox 7"/>
+          <p:cNvSpPr txBox="1"/>
+          <p:nvPr/>
+        </p:nvSpPr>
+        <p:spPr>
+          <a:xfrm>
+            <a:off x="1097280" y="5760720"/>
+            <a:ext cx="9966960" cy="274320"/>
+          </a:xfrm>
+          <a:prstGeom prst="rect">
+            <a:avLst/>
+          </a:prstGeom>
+          <a:noFill/>
+        </p:spPr>
+        <p:txBody>
+          <a:bodyPr wrap="square">
+            <a:spAutoFit/>
+          </a:bodyPr>
+          <a:lstStyle/>
+          <a:p>
+            <a:pPr algn="l">
+              <a:defRPr sz="1100" b="0" i="0">
+                <a:solidFill>
+                  <a:srgbClr val="5C6270"/>
+                </a:solidFill>
+                <a:latin typeface="Calibri"/>
+              </a:defRPr>
+            </a:pPr>
+            <a:r>
+              <a:t>#general</a:t>
+            </a:r>
+          </a:p>
+        </p:txBody>
+      </p:sp>
+    </p:spTree>
+  </p:cSld>
+  <p:clrMapOvr>
+    <a:masterClrMapping/>
+  </p:clrMapOvr>
+</p:sld>
+</file>
+
+<file path=ppt/slides/slide28.xml><?xml version="1.0" encoding="utf-8"?>
+<p:sld xmlns:a="http://schemas.openxmlformats.org/drawingml/2006/main" xmlns:p="http://schemas.openxmlformats.org/presentationml/2006/main" xmlns:r="http://schemas.openxmlformats.org/officeDocument/2006/relationships">
+  <p:cSld>
+    <p:bg>
+      <p:bgPr>
+        <a:solidFill>
+          <a:srgbClr val="08080C"/>
+        </a:solidFill>
+        <a:effectLst/>
+      </p:bgPr>
+    </p:bg>
+    <p:spTree>
+      <p:nvGrpSpPr>
+        <p:cNvPr id="1" name=""/>
+        <p:cNvGrpSpPr/>
+        <p:nvPr/>
+      </p:nvGrpSpPr>
+      <p:grpSpPr/>
+      <p:sp>
+        <p:nvSpPr>
+          <p:cNvPr id="2" name="Rectangle 1"/>
+          <p:cNvSpPr/>
+          <p:nvPr/>
+        </p:nvSpPr>
+        <p:spPr>
+          <a:xfrm>
+            <a:off x="0" y="365760"/>
+            <a:ext cx="12191695" cy="54864"/>
+          </a:xfrm>
+          <a:prstGeom prst="rect">
+            <a:avLst/>
+          </a:prstGeom>
+          <a:solidFill>
+            <a:srgbClr val="00FFD1"/>
+          </a:solidFill>
+          <a:ln>
+            <a:noFill/>
+          </a:ln>
+        </p:spPr>
+        <p:style>
+          <a:lnRef idx="1">
+            <a:schemeClr val="accent1"/>
+          </a:lnRef>
+          <a:fillRef idx="3">
+            <a:schemeClr val="accent1"/>
+          </a:fillRef>
+          <a:effectRef idx="2">
+            <a:schemeClr val="accent1"/>
+          </a:effectRef>
+          <a:fontRef idx="minor">
+            <a:schemeClr val="lt1"/>
+          </a:fontRef>
+        </p:style>
+        <p:txBody>
+          <a:bodyPr rtlCol="0" anchor="ctr"/>
+          <a:lstStyle/>
+          <a:p>
+            <a:pPr algn="ctr"/>
+          </a:p>
+        </p:txBody>
+      </p:sp>
+      <p:sp>
+        <p:nvSpPr>
+          <p:cNvPr id="3" name="TextBox 2"/>
+          <p:cNvSpPr txBox="1"/>
+          <p:nvPr/>
+        </p:nvSpPr>
+        <p:spPr>
+          <a:xfrm>
+            <a:off x="1097280" y="731520"/>
+            <a:ext cx="3657600" cy="365760"/>
+          </a:xfrm>
+          <a:prstGeom prst="rect">
+            <a:avLst/>
+          </a:prstGeom>
+          <a:noFill/>
+        </p:spPr>
+        <p:txBody>
+          <a:bodyPr wrap="none">
+            <a:spAutoFit/>
+          </a:bodyPr>
+          <a:lstStyle/>
+          <a:p>
+            <a:pPr algn="l">
+              <a:defRPr sz="1000" b="1">
+                <a:solidFill>
+                  <a:srgbClr val="00FFD1"/>
+                </a:solidFill>
+                <a:latin typeface="Calibri"/>
+              </a:defRPr>
+            </a:pPr>
+            <a:r>
+              <a:t>📢  OFFICE LIFE</a:t>
+            </a:r>
+          </a:p>
+        </p:txBody>
+      </p:sp>
+      <p:sp>
+        <p:nvSpPr>
+          <p:cNvPr id="4" name="TextBox 3"/>
+          <p:cNvSpPr txBox="1"/>
+          <p:nvPr/>
+        </p:nvSpPr>
+        <p:spPr>
+          <a:xfrm>
+            <a:off x="1097280" y="1188720"/>
+            <a:ext cx="9966960" cy="731520"/>
+          </a:xfrm>
+          <a:prstGeom prst="rect">
+            <a:avLst/>
+          </a:prstGeom>
+          <a:noFill/>
+        </p:spPr>
+        <p:txBody>
+          <a:bodyPr wrap="square">
+            <a:spAutoFit/>
+          </a:bodyPr>
+          <a:lstStyle/>
+          <a:p>
+            <a:pPr algn="l">
+              <a:defRPr sz="3200" b="1" i="0">
+                <a:solidFill>
+                  <a:srgbClr val="00FFD1"/>
+                </a:solidFill>
+                <a:latin typeface="Calibri"/>
+              </a:defRPr>
+            </a:pPr>
+            <a:r>
+              <a:t>From #general</a:t>
+            </a:r>
+          </a:p>
+        </p:txBody>
+      </p:sp>
+      <p:sp>
+        <p:nvSpPr>
+          <p:cNvPr id="5" name="TextBox 4"/>
+          <p:cNvSpPr txBox="1"/>
+          <p:nvPr/>
+        </p:nvSpPr>
+        <p:spPr>
+          <a:xfrm>
+            <a:off x="1097280" y="2103120"/>
+            <a:ext cx="9966960" cy="457200"/>
+          </a:xfrm>
+          <a:prstGeom prst="rect">
+            <a:avLst/>
+          </a:prstGeom>
+          <a:noFill/>
+        </p:spPr>
+        <p:txBody>
+          <a:bodyPr wrap="square">
+            <a:spAutoFit/>
+          </a:bodyPr>
+          <a:lstStyle/>
+          <a:p>
+            <a:pPr algn="l">
+              <a:defRPr sz="1800" b="1" i="0">
+                <a:solidFill>
+                  <a:srgbClr val="FFFFFF"/>
+                </a:solidFill>
+                <a:latin typeface="Calibri"/>
+              </a:defRPr>
+            </a:pPr>
+            <a:r>
+              <a:t>&lt;!channel&gt; Team,</a:t>
+            </a:r>
+            <a:br/>
+            <a:br/>
+            <a:r>
+              <a:t>Effective immediately, Anton Valkov is no longer serving as CO...</a:t>
+            </a:r>
+          </a:p>
+        </p:txBody>
+      </p:sp>
+      <p:sp>
+        <p:nvSpPr>
+          <p:cNvPr id="6" name="TextBox 5"/>
+          <p:cNvSpPr txBox="1"/>
+          <p:nvPr/>
+        </p:nvSpPr>
+        <p:spPr>
+          <a:xfrm>
+            <a:off x="1371600" y="2743200"/>
+            <a:ext cx="9692640" cy="1828800"/>
+          </a:xfrm>
+          <a:prstGeom prst="rect">
+            <a:avLst/>
+          </a:prstGeom>
+          <a:noFill/>
+        </p:spPr>
+        <p:txBody>
+          <a:bodyPr wrap="square">
+            <a:spAutoFit/>
+          </a:bodyPr>
+          <a:lstStyle/>
+          <a:p>
+            <a:pPr algn="l">
+              <a:defRPr sz="1500" b="0" i="1">
+                <a:solidFill>
+                  <a:srgbClr val="E2E2EA"/>
+                </a:solidFill>
+                <a:latin typeface="Calibri"/>
+              </a:defRPr>
+            </a:pPr>
+            <a:r>
+              <a:t>"&lt;!channel&gt; Team,</a:t>
+            </a:r>
+            <a:br/>
+            <a:br/>
+            <a:r>
+              <a:t>Effective immediately, Anton Valkov is no longer serving as COO of Appodeal. We thank Anton for his contributions during his time in this role.</a:t>
+            </a:r>
+            <a:br/>
+            <a:br/>
+            <a:r>
+              <a:t>Anton will continue to support the company in a finance-focused capacity as well as director of the Board as we work through this transit"</a:t>
+            </a:r>
+          </a:p>
+        </p:txBody>
+      </p:sp>
+      <p:sp>
+        <p:nvSpPr>
+          <p:cNvPr id="7" name="TextBox 6"/>
+          <p:cNvSpPr txBox="1"/>
+          <p:nvPr/>
+        </p:nvSpPr>
+        <p:spPr>
+          <a:xfrm>
+            <a:off x="1097280" y="4754880"/>
+            <a:ext cx="9966960" cy="365760"/>
+          </a:xfrm>
+          <a:prstGeom prst="rect">
+            <a:avLst/>
+          </a:prstGeom>
+          <a:noFill/>
+        </p:spPr>
+        <p:txBody>
+          <a:bodyPr wrap="square">
+            <a:spAutoFit/>
+          </a:bodyPr>
+          <a:lstStyle/>
+          <a:p>
+            <a:pPr algn="l">
+              <a:defRPr sz="1400" b="0" i="0">
+                <a:solidFill>
+                  <a:srgbClr val="8F95A3"/>
+                </a:solidFill>
+                <a:latin typeface="Calibri"/>
+              </a:defRPr>
+            </a:pPr>
+            <a:r>
+              <a:t>— Pavel Golubev</a:t>
+            </a:r>
+          </a:p>
+        </p:txBody>
+      </p:sp>
+      <p:sp>
+        <p:nvSpPr>
+          <p:cNvPr id="8" name="TextBox 7"/>
+          <p:cNvSpPr txBox="1"/>
+          <p:nvPr/>
+        </p:nvSpPr>
+        <p:spPr>
+          <a:xfrm>
+            <a:off x="1097280" y="5760720"/>
+            <a:ext cx="9966960" cy="274320"/>
+          </a:xfrm>
+          <a:prstGeom prst="rect">
+            <a:avLst/>
+          </a:prstGeom>
+          <a:noFill/>
+        </p:spPr>
+        <p:txBody>
+          <a:bodyPr wrap="square">
+            <a:spAutoFit/>
+          </a:bodyPr>
+          <a:lstStyle/>
+          <a:p>
+            <a:pPr algn="l">
+              <a:defRPr sz="1100" b="0" i="0">
+                <a:solidFill>
+                  <a:srgbClr val="5C6270"/>
+                </a:solidFill>
+                <a:latin typeface="Calibri"/>
+              </a:defRPr>
+            </a:pPr>
+            <a:r>
+              <a:t>#general</a:t>
+            </a:r>
+          </a:p>
+        </p:txBody>
+      </p:sp>
+    </p:spTree>
+  </p:cSld>
+  <p:clrMapOvr>
+    <a:masterClrMapping/>
+  </p:clrMapOvr>
+</p:sld>
+</file>
+
+<file path=ppt/slides/slide3.xml><?xml version="1.0" encoding="utf-8"?>
+<p:sld xmlns:a="http://schemas.openxmlformats.org/drawingml/2006/main" xmlns:p="http://schemas.openxmlformats.org/presentationml/2006/main" xmlns:r="http://schemas.openxmlformats.org/officeDocument/2006/relationships">
+  <p:cSld>
+    <p:bg>
+      <p:bgPr>
+        <a:solidFill>
+          <a:srgbClr val="08080C"/>
+        </a:solidFill>
+        <a:effectLst/>
+      </p:bgPr>
+    </p:bg>
+    <p:spTree>
+      <p:nvGrpSpPr>
+        <p:cNvPr id="1" name=""/>
+        <p:cNvGrpSpPr/>
+        <p:nvPr/>
+      </p:nvGrpSpPr>
+      <p:grpSpPr/>
+      <p:sp>
+        <p:nvSpPr>
+          <p:cNvPr id="2" name="Rectangle 1"/>
+          <p:cNvSpPr/>
+          <p:nvPr/>
+        </p:nvSpPr>
+        <p:spPr>
+          <a:xfrm>
+            <a:off x="0" y="365760"/>
+            <a:ext cx="12191695" cy="54864"/>
+          </a:xfrm>
+          <a:prstGeom prst="rect">
+            <a:avLst/>
+          </a:prstGeom>
+          <a:solidFill>
+            <a:srgbClr val="FFB72B"/>
+          </a:solidFill>
+          <a:ln>
+            <a:noFill/>
+          </a:ln>
+        </p:spPr>
+        <p:style>
+          <a:lnRef idx="1">
+            <a:schemeClr val="accent1"/>
+          </a:lnRef>
+          <a:fillRef idx="3">
+            <a:schemeClr val="accent1"/>
+          </a:fillRef>
+          <a:effectRef idx="2">
+            <a:schemeClr val="accent1"/>
+          </a:effectRef>
+          <a:fontRef idx="minor">
+            <a:schemeClr val="lt1"/>
+          </a:fontRef>
+        </p:style>
+        <p:txBody>
+          <a:bodyPr rtlCol="0" anchor="ctr"/>
+          <a:lstStyle/>
+          <a:p>
+            <a:pPr algn="ctr"/>
+          </a:p>
+        </p:txBody>
+      </p:sp>
+      <p:sp>
+        <p:nvSpPr>
+          <p:cNvPr id="3" name="TextBox 2"/>
+          <p:cNvSpPr txBox="1"/>
+          <p:nvPr/>
+        </p:nvSpPr>
+        <p:spPr>
+          <a:xfrm>
+            <a:off x="1097280" y="731520"/>
+            <a:ext cx="3657600" cy="365760"/>
+          </a:xfrm>
+          <a:prstGeom prst="rect">
+            <a:avLst/>
+          </a:prstGeom>
+          <a:noFill/>
+        </p:spPr>
+        <p:txBody>
+          <a:bodyPr wrap="none">
+            <a:spAutoFit/>
+          </a:bodyPr>
+          <a:lstStyle/>
+          <a:p>
+            <a:pPr algn="l">
+              <a:defRPr sz="1000" b="1">
+                <a:solidFill>
+                  <a:srgbClr val="FFB72B"/>
+                </a:solidFill>
+                <a:latin typeface="Calibri"/>
+              </a:defRPr>
+            </a:pPr>
+            <a:r>
+              <a:t>🎂  CELEBRATION</a:t>
+            </a:r>
+          </a:p>
+        </p:txBody>
+      </p:sp>
+      <p:sp>
+        <p:nvSpPr>
+          <p:cNvPr id="4" name="TextBox 3"/>
+          <p:cNvSpPr txBox="1"/>
+          <p:nvPr/>
+        </p:nvSpPr>
+        <p:spPr>
+          <a:xfrm>
+            <a:off x="1097280" y="1188720"/>
+            <a:ext cx="9966960" cy="731520"/>
+          </a:xfrm>
+          <a:prstGeom prst="rect">
+            <a:avLst/>
+          </a:prstGeom>
+          <a:noFill/>
+        </p:spPr>
+        <p:txBody>
+          <a:bodyPr wrap="square">
+            <a:spAutoFit/>
+          </a:bodyPr>
+          <a:lstStyle/>
+          <a:p>
+            <a:pPr algn="l">
+              <a:defRPr sz="3200" b="1" i="0">
+                <a:solidFill>
+                  <a:srgbClr val="FFB72B"/>
+                </a:solidFill>
+                <a:latin typeface="Calibri"/>
+              </a:defRPr>
+            </a:pPr>
+            <a:r>
+              <a:t>Happy Birthday!</a:t>
+            </a:r>
+          </a:p>
+        </p:txBody>
+      </p:sp>
+      <p:sp>
+        <p:nvSpPr>
+          <p:cNvPr id="5" name="TextBox 4"/>
+          <p:cNvSpPr txBox="1"/>
+          <p:nvPr/>
+        </p:nvSpPr>
+        <p:spPr>
+          <a:xfrm>
+            <a:off x="1097280" y="2103120"/>
+            <a:ext cx="9966960" cy="640080"/>
+          </a:xfrm>
+          <a:prstGeom prst="rect">
+            <a:avLst/>
+          </a:prstGeom>
+          <a:noFill/>
+        </p:spPr>
+        <p:txBody>
+          <a:bodyPr wrap="square">
+            <a:spAutoFit/>
+          </a:bodyPr>
+          <a:lstStyle/>
+          <a:p>
+            <a:pPr algn="l">
+              <a:defRPr sz="2800" b="1" i="0">
+                <a:solidFill>
+                  <a:srgbClr val="FFFFFF"/>
+                </a:solidFill>
+                <a:latin typeface="Calibri"/>
+              </a:defRPr>
+            </a:pPr>
+            <a:r>
+              <a:t>Roman de las Heras</a:t>
+            </a:r>
+          </a:p>
+        </p:txBody>
+      </p:sp>
+      <p:sp>
+        <p:nvSpPr>
+          <p:cNvPr id="6" name="TextBox 5"/>
+          <p:cNvSpPr txBox="1"/>
+          <p:nvPr/>
+        </p:nvSpPr>
+        <p:spPr>
+          <a:xfrm>
+            <a:off x="1097280" y="2743200"/>
+            <a:ext cx="9966960" cy="365760"/>
+          </a:xfrm>
+          <a:prstGeom prst="rect">
+            <a:avLst/>
+          </a:prstGeom>
+          <a:noFill/>
+        </p:spPr>
+        <p:txBody>
+          <a:bodyPr wrap="square">
+            <a:spAutoFit/>
+          </a:bodyPr>
+          <a:lstStyle/>
+          <a:p>
+            <a:pPr algn="l">
+              <a:defRPr sz="1400" b="0" i="0">
+                <a:solidFill>
+                  <a:srgbClr val="8F95A3"/>
+                </a:solidFill>
+                <a:latin typeface="Calibri"/>
+              </a:defRPr>
+            </a:pPr>
+            <a:r>
+              <a:t>March 03</a:t>
+            </a:r>
+          </a:p>
+        </p:txBody>
+      </p:sp>
+      <p:sp>
+        <p:nvSpPr>
+          <p:cNvPr id="7" name="TextBox 6"/>
+          <p:cNvSpPr txBox="1"/>
+          <p:nvPr/>
+        </p:nvSpPr>
+        <p:spPr>
+          <a:xfrm>
+            <a:off x="1097280" y="3291840"/>
+            <a:ext cx="9966960" cy="914400"/>
+          </a:xfrm>
+          <a:prstGeom prst="rect">
+            <a:avLst/>
+          </a:prstGeom>
+          <a:noFill/>
+        </p:spPr>
+        <p:txBody>
+          <a:bodyPr wrap="square">
+            <a:spAutoFit/>
+          </a:bodyPr>
+          <a:lstStyle/>
+          <a:p>
+            <a:pPr algn="l">
+              <a:defRPr sz="1600" b="0" i="0">
+                <a:solidFill>
+                  <a:srgbClr val="E2E2EA"/>
+                </a:solidFill>
+                <a:latin typeface="Calibri"/>
+              </a:defRPr>
+            </a:pPr>
+            <a:r>
+              <a:t>Wishing you an amazing day filled with joy and celebration!</a:t>
+            </a:r>
+          </a:p>
+        </p:txBody>
+      </p:sp>
+      <p:sp>
+        <p:nvSpPr>
+          <p:cNvPr id="8" name="TextBox 7"/>
+          <p:cNvSpPr txBox="1"/>
+          <p:nvPr/>
+        </p:nvSpPr>
+        <p:spPr>
+          <a:xfrm>
+            <a:off x="1097280" y="4572000"/>
+            <a:ext cx="9966960" cy="457200"/>
+          </a:xfrm>
+          <a:prstGeom prst="rect">
+            <a:avLst/>
+          </a:prstGeom>
+          <a:noFill/>
+        </p:spPr>
+        <p:txBody>
+          <a:bodyPr wrap="square">
+            <a:spAutoFit/>
+          </a:bodyPr>
+          <a:lstStyle/>
+          <a:p>
+            <a:pPr algn="l">
+              <a:defRPr sz="1400" b="0" i="1">
+                <a:solidFill>
+                  <a:srgbClr val="FFB72B"/>
+                </a:solidFill>
+                <a:latin typeface="Calibri"/>
+              </a:defRPr>
+            </a:pPr>
+            <a:r>
+              <a:t>With love, Your Appodeal Team 💜</a:t>
+            </a:r>
+          </a:p>
+        </p:txBody>
+      </p:sp>
+    </p:spTree>
+  </p:cSld>
+  <p:clrMapOvr>
+    <a:masterClrMapping/>
+  </p:clrMapOvr>
+</p:sld>
+</file>
+
+<file path=ppt/slides/slide4.xml><?xml version="1.0" encoding="utf-8"?>
+<p:sld xmlns:a="http://schemas.openxmlformats.org/drawingml/2006/main" xmlns:p="http://schemas.openxmlformats.org/presentationml/2006/main" xmlns:r="http://schemas.openxmlformats.org/officeDocument/2006/relationships">
+  <p:cSld>
+    <p:bg>
+      <p:bgPr>
+        <a:solidFill>
+          <a:srgbClr val="08080C"/>
+        </a:solidFill>
+        <a:effectLst/>
+      </p:bgPr>
+    </p:bg>
+    <p:spTree>
+      <p:nvGrpSpPr>
+        <p:cNvPr id="1" name=""/>
+        <p:cNvGrpSpPr/>
+        <p:nvPr/>
+      </p:nvGrpSpPr>
+      <p:grpSpPr/>
+      <p:sp>
+        <p:nvSpPr>
+          <p:cNvPr id="2" name="Rectangle 1"/>
+          <p:cNvSpPr/>
+          <p:nvPr/>
+        </p:nvSpPr>
+        <p:spPr>
+          <a:xfrm>
+            <a:off x="0" y="365760"/>
+            <a:ext cx="12191695" cy="54864"/>
+          </a:xfrm>
+          <a:prstGeom prst="rect">
+            <a:avLst/>
+          </a:prstGeom>
+          <a:solidFill>
+            <a:srgbClr val="FFB72B"/>
+          </a:solidFill>
+          <a:ln>
+            <a:noFill/>
+          </a:ln>
+        </p:spPr>
+        <p:style>
+          <a:lnRef idx="1">
+            <a:schemeClr val="accent1"/>
+          </a:lnRef>
+          <a:fillRef idx="3">
+            <a:schemeClr val="accent1"/>
+          </a:fillRef>
+          <a:effectRef idx="2">
+            <a:schemeClr val="accent1"/>
+          </a:effectRef>
+          <a:fontRef idx="minor">
+            <a:schemeClr val="lt1"/>
+          </a:fontRef>
+        </p:style>
+        <p:txBody>
+          <a:bodyPr rtlCol="0" anchor="ctr"/>
+          <a:lstStyle/>
+          <a:p>
+            <a:pPr algn="ctr"/>
+          </a:p>
+        </p:txBody>
+      </p:sp>
+      <p:sp>
+        <p:nvSpPr>
+          <p:cNvPr id="3" name="TextBox 2"/>
+          <p:cNvSpPr txBox="1"/>
+          <p:nvPr/>
+        </p:nvSpPr>
+        <p:spPr>
+          <a:xfrm>
+            <a:off x="1097280" y="731520"/>
+            <a:ext cx="3657600" cy="365760"/>
+          </a:xfrm>
+          <a:prstGeom prst="rect">
+            <a:avLst/>
+          </a:prstGeom>
+          <a:noFill/>
+        </p:spPr>
+        <p:txBody>
+          <a:bodyPr wrap="none">
+            <a:spAutoFit/>
+          </a:bodyPr>
+          <a:lstStyle/>
+          <a:p>
+            <a:pPr algn="l">
+              <a:defRPr sz="1000" b="1">
+                <a:solidFill>
+                  <a:srgbClr val="FFB72B"/>
+                </a:solidFill>
+                <a:latin typeface="Calibri"/>
+              </a:defRPr>
+            </a:pPr>
+            <a:r>
+              <a:t>🎂  CELEBRATION</a:t>
+            </a:r>
+          </a:p>
+        </p:txBody>
+      </p:sp>
+      <p:sp>
+        <p:nvSpPr>
+          <p:cNvPr id="4" name="TextBox 3"/>
+          <p:cNvSpPr txBox="1"/>
+          <p:nvPr/>
+        </p:nvSpPr>
+        <p:spPr>
+          <a:xfrm>
+            <a:off x="1097280" y="1188720"/>
+            <a:ext cx="9966960" cy="731520"/>
+          </a:xfrm>
+          <a:prstGeom prst="rect">
+            <a:avLst/>
+          </a:prstGeom>
+          <a:noFill/>
+        </p:spPr>
+        <p:txBody>
+          <a:bodyPr wrap="square">
+            <a:spAutoFit/>
+          </a:bodyPr>
+          <a:lstStyle/>
+          <a:p>
+            <a:pPr algn="l">
+              <a:defRPr sz="3200" b="1" i="0">
+                <a:solidFill>
+                  <a:srgbClr val="FFB72B"/>
+                </a:solidFill>
+                <a:latin typeface="Calibri"/>
+              </a:defRPr>
+            </a:pPr>
+            <a:r>
+              <a:t>Happy Birthday!</a:t>
+            </a:r>
+          </a:p>
+        </p:txBody>
+      </p:sp>
+      <p:sp>
+        <p:nvSpPr>
+          <p:cNvPr id="5" name="TextBox 4"/>
+          <p:cNvSpPr txBox="1"/>
+          <p:nvPr/>
+        </p:nvSpPr>
+        <p:spPr>
+          <a:xfrm>
+            <a:off x="1097280" y="2103120"/>
+            <a:ext cx="9966960" cy="640080"/>
+          </a:xfrm>
+          <a:prstGeom prst="rect">
+            <a:avLst/>
+          </a:prstGeom>
+          <a:noFill/>
+        </p:spPr>
+        <p:txBody>
+          <a:bodyPr wrap="square">
+            <a:spAutoFit/>
+          </a:bodyPr>
+          <a:lstStyle/>
+          <a:p>
+            <a:pPr algn="l">
+              <a:defRPr sz="2800" b="1" i="0">
+                <a:solidFill>
+                  <a:srgbClr val="FFFFFF"/>
+                </a:solidFill>
+                <a:latin typeface="Calibri"/>
+              </a:defRPr>
+            </a:pPr>
+            <a:r>
+              <a:t>Denis Glavatskikh</a:t>
+            </a:r>
+          </a:p>
+        </p:txBody>
+      </p:sp>
+      <p:sp>
+        <p:nvSpPr>
+          <p:cNvPr id="6" name="TextBox 5"/>
+          <p:cNvSpPr txBox="1"/>
+          <p:nvPr/>
+        </p:nvSpPr>
+        <p:spPr>
+          <a:xfrm>
+            <a:off x="1097280" y="2743200"/>
+            <a:ext cx="9966960" cy="365760"/>
+          </a:xfrm>
+          <a:prstGeom prst="rect">
+            <a:avLst/>
+          </a:prstGeom>
+          <a:noFill/>
+        </p:spPr>
+        <p:txBody>
+          <a:bodyPr wrap="square">
+            <a:spAutoFit/>
+          </a:bodyPr>
+          <a:lstStyle/>
+          <a:p>
+            <a:pPr algn="l">
+              <a:defRPr sz="1400" b="0" i="0">
+                <a:solidFill>
+                  <a:srgbClr val="8F95A3"/>
+                </a:solidFill>
+                <a:latin typeface="Calibri"/>
+              </a:defRPr>
+            </a:pPr>
+            <a:r>
+              <a:t>March 03</a:t>
+            </a:r>
+          </a:p>
+        </p:txBody>
+      </p:sp>
+      <p:sp>
+        <p:nvSpPr>
+          <p:cNvPr id="7" name="TextBox 6"/>
+          <p:cNvSpPr txBox="1"/>
+          <p:nvPr/>
+        </p:nvSpPr>
+        <p:spPr>
+          <a:xfrm>
+            <a:off x="1097280" y="3291840"/>
+            <a:ext cx="9966960" cy="914400"/>
+          </a:xfrm>
+          <a:prstGeom prst="rect">
+            <a:avLst/>
+          </a:prstGeom>
+          <a:noFill/>
+        </p:spPr>
+        <p:txBody>
+          <a:bodyPr wrap="square">
+            <a:spAutoFit/>
+          </a:bodyPr>
+          <a:lstStyle/>
+          <a:p>
+            <a:pPr algn="l">
+              <a:defRPr sz="1600" b="0" i="0">
+                <a:solidFill>
+                  <a:srgbClr val="E2E2EA"/>
+                </a:solidFill>
+                <a:latin typeface="Calibri"/>
+              </a:defRPr>
+            </a:pPr>
+            <a:r>
+              <a:t>Wishing you an amazing day filled with joy and celebration!</a:t>
+            </a:r>
+          </a:p>
+        </p:txBody>
+      </p:sp>
+      <p:sp>
+        <p:nvSpPr>
+          <p:cNvPr id="8" name="TextBox 7"/>
+          <p:cNvSpPr txBox="1"/>
+          <p:nvPr/>
+        </p:nvSpPr>
+        <p:spPr>
+          <a:xfrm>
+            <a:off x="1097280" y="4572000"/>
+            <a:ext cx="9966960" cy="457200"/>
+          </a:xfrm>
+          <a:prstGeom prst="rect">
+            <a:avLst/>
+          </a:prstGeom>
+          <a:noFill/>
+        </p:spPr>
+        <p:txBody>
+          <a:bodyPr wrap="square">
+            <a:spAutoFit/>
+          </a:bodyPr>
+          <a:lstStyle/>
+          <a:p>
+            <a:pPr algn="l">
+              <a:defRPr sz="1400" b="0" i="1">
+                <a:solidFill>
+                  <a:srgbClr val="FFB72B"/>
+                </a:solidFill>
+                <a:latin typeface="Calibri"/>
+              </a:defRPr>
+            </a:pPr>
+            <a:r>
+              <a:t>With love, Your Appodeal Team 💜</a:t>
+            </a:r>
+          </a:p>
+        </p:txBody>
+      </p:sp>
+    </p:spTree>
+  </p:cSld>
+  <p:clrMapOvr>
+    <a:masterClrMapping/>
+  </p:clrMapOvr>
+</p:sld>
+</file>
+
+<file path=ppt/slides/slide5.xml><?xml version="1.0" encoding="utf-8"?>
+<p:sld xmlns:a="http://schemas.openxmlformats.org/drawingml/2006/main" xmlns:p="http://schemas.openxmlformats.org/presentationml/2006/main" xmlns:r="http://schemas.openxmlformats.org/officeDocument/2006/relationships">
+  <p:cSld>
+    <p:bg>
+      <p:bgPr>
+        <a:solidFill>
+          <a:srgbClr val="08080C"/>
+        </a:solidFill>
+        <a:effectLst/>
+      </p:bgPr>
+    </p:bg>
+    <p:spTree>
+      <p:nvGrpSpPr>
+        <p:cNvPr id="1" name=""/>
+        <p:cNvGrpSpPr/>
+        <p:nvPr/>
+      </p:nvGrpSpPr>
+      <p:grpSpPr/>
+      <p:sp>
+        <p:nvSpPr>
+          <p:cNvPr id="2" name="Rectangle 1"/>
+          <p:cNvSpPr/>
+          <p:nvPr/>
+        </p:nvSpPr>
+        <p:spPr>
+          <a:xfrm>
+            <a:off x="0" y="365760"/>
+            <a:ext cx="12191695" cy="54864"/>
+          </a:xfrm>
+          <a:prstGeom prst="rect">
+            <a:avLst/>
+          </a:prstGeom>
+          <a:solidFill>
+            <a:srgbClr val="FFB72B"/>
+          </a:solidFill>
+          <a:ln>
+            <a:noFill/>
+          </a:ln>
+        </p:spPr>
+        <p:style>
+          <a:lnRef idx="1">
+            <a:schemeClr val="accent1"/>
+          </a:lnRef>
+          <a:fillRef idx="3">
+            <a:schemeClr val="accent1"/>
+          </a:fillRef>
+          <a:effectRef idx="2">
+            <a:schemeClr val="accent1"/>
+          </a:effectRef>
+          <a:fontRef idx="minor">
+            <a:schemeClr val="lt1"/>
+          </a:fontRef>
+        </p:style>
+        <p:txBody>
+          <a:bodyPr rtlCol="0" anchor="ctr"/>
+          <a:lstStyle/>
+          <a:p>
+            <a:pPr algn="ctr"/>
+          </a:p>
+        </p:txBody>
+      </p:sp>
+      <p:sp>
+        <p:nvSpPr>
+          <p:cNvPr id="3" name="TextBox 2"/>
+          <p:cNvSpPr txBox="1"/>
+          <p:nvPr/>
+        </p:nvSpPr>
+        <p:spPr>
+          <a:xfrm>
+            <a:off x="1097280" y="731520"/>
+            <a:ext cx="3657600" cy="365760"/>
+          </a:xfrm>
+          <a:prstGeom prst="rect">
+            <a:avLst/>
+          </a:prstGeom>
+          <a:noFill/>
+        </p:spPr>
+        <p:txBody>
+          <a:bodyPr wrap="none">
+            <a:spAutoFit/>
+          </a:bodyPr>
+          <a:lstStyle/>
+          <a:p>
+            <a:pPr algn="l">
+              <a:defRPr sz="1000" b="1">
+                <a:solidFill>
+                  <a:srgbClr val="FFB72B"/>
+                </a:solidFill>
+                <a:latin typeface="Calibri"/>
+              </a:defRPr>
+            </a:pPr>
+            <a:r>
+              <a:t>🎂  CELEBRATION</a:t>
+            </a:r>
+          </a:p>
+        </p:txBody>
+      </p:sp>
+      <p:sp>
+        <p:nvSpPr>
+          <p:cNvPr id="4" name="TextBox 3"/>
+          <p:cNvSpPr txBox="1"/>
+          <p:nvPr/>
+        </p:nvSpPr>
+        <p:spPr>
+          <a:xfrm>
+            <a:off x="1097280" y="1188720"/>
+            <a:ext cx="9966960" cy="731520"/>
+          </a:xfrm>
+          <a:prstGeom prst="rect">
+            <a:avLst/>
+          </a:prstGeom>
+          <a:noFill/>
+        </p:spPr>
+        <p:txBody>
+          <a:bodyPr wrap="square">
+            <a:spAutoFit/>
+          </a:bodyPr>
+          <a:lstStyle/>
+          <a:p>
+            <a:pPr algn="l">
+              <a:defRPr sz="3200" b="1" i="0">
+                <a:solidFill>
+                  <a:srgbClr val="FFB72B"/>
+                </a:solidFill>
+                <a:latin typeface="Calibri"/>
+              </a:defRPr>
+            </a:pPr>
+            <a:r>
+              <a:t>Happy Birthday!</a:t>
+            </a:r>
+          </a:p>
+        </p:txBody>
+      </p:sp>
+      <p:sp>
+        <p:nvSpPr>
+          <p:cNvPr id="5" name="TextBox 4"/>
+          <p:cNvSpPr txBox="1"/>
+          <p:nvPr/>
+        </p:nvSpPr>
+        <p:spPr>
+          <a:xfrm>
+            <a:off x="1097280" y="2103120"/>
+            <a:ext cx="9966960" cy="640080"/>
+          </a:xfrm>
+          <a:prstGeom prst="rect">
+            <a:avLst/>
+          </a:prstGeom>
+          <a:noFill/>
+        </p:spPr>
+        <p:txBody>
+          <a:bodyPr wrap="square">
+            <a:spAutoFit/>
+          </a:bodyPr>
+          <a:lstStyle/>
+          <a:p>
+            <a:pPr algn="l">
+              <a:defRPr sz="2800" b="1" i="0">
+                <a:solidFill>
+                  <a:srgbClr val="FFFFFF"/>
+                </a:solidFill>
+                <a:latin typeface="Calibri"/>
+              </a:defRPr>
+            </a:pPr>
+            <a:r>
+              <a:t>Ana Abuseridze</a:t>
+            </a:r>
+          </a:p>
+        </p:txBody>
+      </p:sp>
+      <p:sp>
+        <p:nvSpPr>
+          <p:cNvPr id="6" name="TextBox 5"/>
+          <p:cNvSpPr txBox="1"/>
+          <p:nvPr/>
+        </p:nvSpPr>
+        <p:spPr>
+          <a:xfrm>
+            <a:off x="1097280" y="2743200"/>
+            <a:ext cx="9966960" cy="365760"/>
+          </a:xfrm>
+          <a:prstGeom prst="rect">
+            <a:avLst/>
+          </a:prstGeom>
+          <a:noFill/>
+        </p:spPr>
+        <p:txBody>
+          <a:bodyPr wrap="square">
+            <a:spAutoFit/>
+          </a:bodyPr>
+          <a:lstStyle/>
+          <a:p>
+            <a:pPr algn="l">
+              <a:defRPr sz="1400" b="0" i="0">
+                <a:solidFill>
+                  <a:srgbClr val="8F95A3"/>
+                </a:solidFill>
+                <a:latin typeface="Calibri"/>
+              </a:defRPr>
+            </a:pPr>
+            <a:r>
+              <a:t>March 03</a:t>
+            </a:r>
+          </a:p>
+        </p:txBody>
+      </p:sp>
+      <p:sp>
+        <p:nvSpPr>
+          <p:cNvPr id="7" name="TextBox 6"/>
+          <p:cNvSpPr txBox="1"/>
+          <p:nvPr/>
+        </p:nvSpPr>
+        <p:spPr>
+          <a:xfrm>
+            <a:off x="1097280" y="3291840"/>
+            <a:ext cx="9966960" cy="914400"/>
+          </a:xfrm>
+          <a:prstGeom prst="rect">
+            <a:avLst/>
+          </a:prstGeom>
+          <a:noFill/>
+        </p:spPr>
+        <p:txBody>
+          <a:bodyPr wrap="square">
+            <a:spAutoFit/>
+          </a:bodyPr>
+          <a:lstStyle/>
+          <a:p>
+            <a:pPr algn="l">
+              <a:defRPr sz="1600" b="0" i="0">
+                <a:solidFill>
+                  <a:srgbClr val="E2E2EA"/>
+                </a:solidFill>
+                <a:latin typeface="Calibri"/>
+              </a:defRPr>
+            </a:pPr>
+            <a:r>
+              <a:t>Wishing you an amazing day filled with joy and celebration!</a:t>
+            </a:r>
+          </a:p>
+        </p:txBody>
+      </p:sp>
+      <p:sp>
+        <p:nvSpPr>
+          <p:cNvPr id="8" name="TextBox 7"/>
+          <p:cNvSpPr txBox="1"/>
+          <p:nvPr/>
+        </p:nvSpPr>
+        <p:spPr>
+          <a:xfrm>
+            <a:off x="1097280" y="4572000"/>
+            <a:ext cx="9966960" cy="457200"/>
+          </a:xfrm>
+          <a:prstGeom prst="rect">
+            <a:avLst/>
+          </a:prstGeom>
+          <a:noFill/>
+        </p:spPr>
+        <p:txBody>
+          <a:bodyPr wrap="square">
+            <a:spAutoFit/>
+          </a:bodyPr>
+          <a:lstStyle/>
+          <a:p>
+            <a:pPr algn="l">
+              <a:defRPr sz="1400" b="0" i="1">
+                <a:solidFill>
+                  <a:srgbClr val="FFB72B"/>
+                </a:solidFill>
+                <a:latin typeface="Calibri"/>
+              </a:defRPr>
+            </a:pPr>
+            <a:r>
+              <a:t>With love, Your Appodeal Team 💜</a:t>
+            </a:r>
+          </a:p>
+        </p:txBody>
+      </p:sp>
+    </p:spTree>
+  </p:cSld>
+  <p:clrMapOvr>
+    <a:masterClrMapping/>
+  </p:clrMapOvr>
+</p:sld>
+</file>
+
+<file path=ppt/slides/slide6.xml><?xml version="1.0" encoding="utf-8"?>
+<p:sld xmlns:a="http://schemas.openxmlformats.org/drawingml/2006/main" xmlns:p="http://schemas.openxmlformats.org/presentationml/2006/main" xmlns:r="http://schemas.openxmlformats.org/officeDocument/2006/relationships">
+  <p:cSld>
+    <p:bg>
+      <p:bgPr>
+        <a:solidFill>
+          <a:srgbClr val="08080C"/>
+        </a:solidFill>
+        <a:effectLst/>
+      </p:bgPr>
+    </p:bg>
+    <p:spTree>
+      <p:nvGrpSpPr>
+        <p:cNvPr id="1" name=""/>
+        <p:cNvGrpSpPr/>
+        <p:nvPr/>
+      </p:nvGrpSpPr>
+      <p:grpSpPr/>
+      <p:sp>
+        <p:nvSpPr>
+          <p:cNvPr id="2" name="Rectangle 1"/>
+          <p:cNvSpPr/>
+          <p:nvPr/>
+        </p:nvSpPr>
+        <p:spPr>
+          <a:xfrm>
+            <a:off x="0" y="365760"/>
+            <a:ext cx="12191695" cy="54864"/>
+          </a:xfrm>
+          <a:prstGeom prst="rect">
+            <a:avLst/>
+          </a:prstGeom>
+          <a:solidFill>
+            <a:srgbClr val="FFB72B"/>
+          </a:solidFill>
+          <a:ln>
+            <a:noFill/>
+          </a:ln>
+        </p:spPr>
+        <p:style>
+          <a:lnRef idx="1">
+            <a:schemeClr val="accent1"/>
+          </a:lnRef>
+          <a:fillRef idx="3">
+            <a:schemeClr val="accent1"/>
+          </a:fillRef>
+          <a:effectRef idx="2">
+            <a:schemeClr val="accent1"/>
+          </a:effectRef>
+          <a:fontRef idx="minor">
+            <a:schemeClr val="lt1"/>
+          </a:fontRef>
+        </p:style>
+        <p:txBody>
+          <a:bodyPr rtlCol="0" anchor="ctr"/>
+          <a:lstStyle/>
+          <a:p>
+            <a:pPr algn="ctr"/>
+          </a:p>
+        </p:txBody>
+      </p:sp>
+      <p:sp>
+        <p:nvSpPr>
+          <p:cNvPr id="3" name="TextBox 2"/>
+          <p:cNvSpPr txBox="1"/>
+          <p:nvPr/>
+        </p:nvSpPr>
+        <p:spPr>
+          <a:xfrm>
+            <a:off x="1097280" y="731520"/>
+            <a:ext cx="3657600" cy="365760"/>
+          </a:xfrm>
+          <a:prstGeom prst="rect">
+            <a:avLst/>
+          </a:prstGeom>
+          <a:noFill/>
+        </p:spPr>
+        <p:txBody>
+          <a:bodyPr wrap="none">
+            <a:spAutoFit/>
+          </a:bodyPr>
+          <a:lstStyle/>
+          <a:p>
+            <a:pPr algn="l">
+              <a:defRPr sz="1000" b="1">
+                <a:solidFill>
+                  <a:srgbClr val="FFB72B"/>
+                </a:solidFill>
+                <a:latin typeface="Calibri"/>
+              </a:defRPr>
+            </a:pPr>
+            <a:r>
+              <a:t>🎂  CELEBRATION</a:t>
+            </a:r>
+          </a:p>
+        </p:txBody>
+      </p:sp>
+      <p:sp>
+        <p:nvSpPr>
+          <p:cNvPr id="4" name="TextBox 3"/>
+          <p:cNvSpPr txBox="1"/>
+          <p:nvPr/>
+        </p:nvSpPr>
+        <p:spPr>
+          <a:xfrm>
+            <a:off x="1097280" y="1188720"/>
+            <a:ext cx="9966960" cy="731520"/>
+          </a:xfrm>
+          <a:prstGeom prst="rect">
+            <a:avLst/>
+          </a:prstGeom>
+          <a:noFill/>
+        </p:spPr>
+        <p:txBody>
+          <a:bodyPr wrap="square">
+            <a:spAutoFit/>
+          </a:bodyPr>
+          <a:lstStyle/>
+          <a:p>
+            <a:pPr algn="l">
+              <a:defRPr sz="3200" b="1" i="0">
+                <a:solidFill>
+                  <a:srgbClr val="FFB72B"/>
+                </a:solidFill>
+                <a:latin typeface="Calibri"/>
+              </a:defRPr>
+            </a:pPr>
+            <a:r>
+              <a:t>Happy Birthday!</a:t>
+            </a:r>
+          </a:p>
+        </p:txBody>
+      </p:sp>
+      <p:sp>
+        <p:nvSpPr>
+          <p:cNvPr id="5" name="TextBox 4"/>
+          <p:cNvSpPr txBox="1"/>
+          <p:nvPr/>
+        </p:nvSpPr>
+        <p:spPr>
+          <a:xfrm>
+            <a:off x="1097280" y="2103120"/>
+            <a:ext cx="9966960" cy="640080"/>
+          </a:xfrm>
+          <a:prstGeom prst="rect">
+            <a:avLst/>
+          </a:prstGeom>
+          <a:noFill/>
+        </p:spPr>
+        <p:txBody>
+          <a:bodyPr wrap="square">
+            <a:spAutoFit/>
+          </a:bodyPr>
+          <a:lstStyle/>
+          <a:p>
+            <a:pPr algn="l">
+              <a:defRPr sz="2800" b="1" i="0">
+                <a:solidFill>
+                  <a:srgbClr val="FFFFFF"/>
+                </a:solidFill>
+                <a:latin typeface="Calibri"/>
+              </a:defRPr>
+            </a:pPr>
+            <a:r>
+              <a:t>Hanna Hrytsel</a:t>
+            </a:r>
+          </a:p>
+        </p:txBody>
+      </p:sp>
+      <p:sp>
+        <p:nvSpPr>
+          <p:cNvPr id="6" name="TextBox 5"/>
+          <p:cNvSpPr txBox="1"/>
+          <p:nvPr/>
+        </p:nvSpPr>
+        <p:spPr>
+          <a:xfrm>
+            <a:off x="1097280" y="2743200"/>
+            <a:ext cx="9966960" cy="365760"/>
+          </a:xfrm>
+          <a:prstGeom prst="rect">
+            <a:avLst/>
+          </a:prstGeom>
+          <a:noFill/>
+        </p:spPr>
+        <p:txBody>
+          <a:bodyPr wrap="square">
+            <a:spAutoFit/>
+          </a:bodyPr>
+          <a:lstStyle/>
+          <a:p>
+            <a:pPr algn="l">
+              <a:defRPr sz="1400" b="0" i="0">
+                <a:solidFill>
+                  <a:srgbClr val="8F95A3"/>
+                </a:solidFill>
+                <a:latin typeface="Calibri"/>
+              </a:defRPr>
+            </a:pPr>
+            <a:r>
+              <a:t>March 03</a:t>
+            </a:r>
+          </a:p>
+        </p:txBody>
+      </p:sp>
+      <p:sp>
+        <p:nvSpPr>
+          <p:cNvPr id="7" name="TextBox 6"/>
+          <p:cNvSpPr txBox="1"/>
+          <p:nvPr/>
+        </p:nvSpPr>
+        <p:spPr>
+          <a:xfrm>
+            <a:off x="1097280" y="3291840"/>
+            <a:ext cx="9966960" cy="914400"/>
+          </a:xfrm>
+          <a:prstGeom prst="rect">
+            <a:avLst/>
+          </a:prstGeom>
+          <a:noFill/>
+        </p:spPr>
+        <p:txBody>
+          <a:bodyPr wrap="square">
+            <a:spAutoFit/>
+          </a:bodyPr>
+          <a:lstStyle/>
+          <a:p>
+            <a:pPr algn="l">
+              <a:defRPr sz="1600" b="0" i="0">
+                <a:solidFill>
+                  <a:srgbClr val="E2E2EA"/>
+                </a:solidFill>
+                <a:latin typeface="Calibri"/>
+              </a:defRPr>
+            </a:pPr>
+            <a:r>
+              <a:t>Wishing you an amazing day filled with joy and celebration!</a:t>
+            </a:r>
+          </a:p>
+        </p:txBody>
+      </p:sp>
+      <p:sp>
+        <p:nvSpPr>
+          <p:cNvPr id="8" name="TextBox 7"/>
+          <p:cNvSpPr txBox="1"/>
+          <p:nvPr/>
+        </p:nvSpPr>
+        <p:spPr>
+          <a:xfrm>
+            <a:off x="1097280" y="4572000"/>
+            <a:ext cx="9966960" cy="457200"/>
+          </a:xfrm>
+          <a:prstGeom prst="rect">
+            <a:avLst/>
+          </a:prstGeom>
+          <a:noFill/>
+        </p:spPr>
+        <p:txBody>
+          <a:bodyPr wrap="square">
+            <a:spAutoFit/>
+          </a:bodyPr>
+          <a:lstStyle/>
+          <a:p>
+            <a:pPr algn="l">
+              <a:defRPr sz="1400" b="0" i="1">
+                <a:solidFill>
+                  <a:srgbClr val="FFB72B"/>
+                </a:solidFill>
+                <a:latin typeface="Calibri"/>
+              </a:defRPr>
+            </a:pPr>
+            <a:r>
+              <a:t>With love, Your Appodeal Team 💜</a:t>
+            </a:r>
+          </a:p>
+        </p:txBody>
+      </p:sp>
+    </p:spTree>
+  </p:cSld>
+  <p:clrMapOvr>
+    <a:masterClrMapping/>
+  </p:clrMapOvr>
+</p:sld>
+</file>
+
+<file path=ppt/slides/slide7.xml><?xml version="1.0" encoding="utf-8"?>
+<p:sld xmlns:a="http://schemas.openxmlformats.org/drawingml/2006/main" xmlns:p="http://schemas.openxmlformats.org/presentationml/2006/main" xmlns:r="http://schemas.openxmlformats.org/officeDocument/2006/relationships">
+  <p:cSld>
+    <p:bg>
+      <p:bgPr>
+        <a:solidFill>
+          <a:srgbClr val="08080C"/>
+        </a:solidFill>
+        <a:effectLst/>
+      </p:bgPr>
+    </p:bg>
+    <p:spTree>
+      <p:nvGrpSpPr>
+        <p:cNvPr id="1" name=""/>
+        <p:cNvGrpSpPr/>
+        <p:nvPr/>
+      </p:nvGrpSpPr>
+      <p:grpSpPr/>
+      <p:sp>
+        <p:nvSpPr>
+          <p:cNvPr id="2" name="Rectangle 1"/>
+          <p:cNvSpPr/>
+          <p:nvPr/>
+        </p:nvSpPr>
+        <p:spPr>
+          <a:xfrm>
+            <a:off x="0" y="365760"/>
+            <a:ext cx="12191695" cy="54864"/>
+          </a:xfrm>
+          <a:prstGeom prst="rect">
+            <a:avLst/>
+          </a:prstGeom>
+          <a:solidFill>
+            <a:srgbClr val="FFB72B"/>
+          </a:solidFill>
+          <a:ln>
+            <a:noFill/>
+          </a:ln>
+        </p:spPr>
+        <p:style>
+          <a:lnRef idx="1">
+            <a:schemeClr val="accent1"/>
+          </a:lnRef>
+          <a:fillRef idx="3">
+            <a:schemeClr val="accent1"/>
+          </a:fillRef>
+          <a:effectRef idx="2">
+            <a:schemeClr val="accent1"/>
+          </a:effectRef>
+          <a:fontRef idx="minor">
+            <a:schemeClr val="lt1"/>
+          </a:fontRef>
+        </p:style>
+        <p:txBody>
+          <a:bodyPr rtlCol="0" anchor="ctr"/>
+          <a:lstStyle/>
+          <a:p>
+            <a:pPr algn="ctr"/>
+          </a:p>
+        </p:txBody>
+      </p:sp>
+      <p:sp>
+        <p:nvSpPr>
+          <p:cNvPr id="3" name="TextBox 2"/>
+          <p:cNvSpPr txBox="1"/>
+          <p:nvPr/>
+        </p:nvSpPr>
+        <p:spPr>
+          <a:xfrm>
+            <a:off x="1097280" y="731520"/>
+            <a:ext cx="3657600" cy="365760"/>
+          </a:xfrm>
+          <a:prstGeom prst="rect">
+            <a:avLst/>
+          </a:prstGeom>
+          <a:noFill/>
+        </p:spPr>
+        <p:txBody>
+          <a:bodyPr wrap="none">
+            <a:spAutoFit/>
+          </a:bodyPr>
+          <a:lstStyle/>
+          <a:p>
+            <a:pPr algn="l">
+              <a:defRPr sz="1000" b="1">
+                <a:solidFill>
+                  <a:srgbClr val="FFB72B"/>
+                </a:solidFill>
+                <a:latin typeface="Calibri"/>
+              </a:defRPr>
+            </a:pPr>
+            <a:r>
+              <a:t>🎂  CELEBRATION</a:t>
+            </a:r>
+          </a:p>
+        </p:txBody>
+      </p:sp>
+      <p:sp>
+        <p:nvSpPr>
+          <p:cNvPr id="4" name="TextBox 3"/>
+          <p:cNvSpPr txBox="1"/>
+          <p:nvPr/>
+        </p:nvSpPr>
+        <p:spPr>
+          <a:xfrm>
+            <a:off x="1097280" y="1188720"/>
+            <a:ext cx="9966960" cy="731520"/>
+          </a:xfrm>
+          <a:prstGeom prst="rect">
+            <a:avLst/>
+          </a:prstGeom>
+          <a:noFill/>
+        </p:spPr>
+        <p:txBody>
+          <a:bodyPr wrap="square">
+            <a:spAutoFit/>
+          </a:bodyPr>
+          <a:lstStyle/>
+          <a:p>
+            <a:pPr algn="l">
+              <a:defRPr sz="3200" b="1" i="0">
+                <a:solidFill>
+                  <a:srgbClr val="FFB72B"/>
+                </a:solidFill>
+                <a:latin typeface="Calibri"/>
+              </a:defRPr>
+            </a:pPr>
+            <a:r>
+              <a:t>Happy Birthday!</a:t>
+            </a:r>
+          </a:p>
+        </p:txBody>
+      </p:sp>
+      <p:sp>
+        <p:nvSpPr>
+          <p:cNvPr id="5" name="TextBox 4"/>
+          <p:cNvSpPr txBox="1"/>
+          <p:nvPr/>
+        </p:nvSpPr>
+        <p:spPr>
+          <a:xfrm>
+            <a:off x="1097280" y="2103120"/>
+            <a:ext cx="9966960" cy="640080"/>
+          </a:xfrm>
+          <a:prstGeom prst="rect">
+            <a:avLst/>
+          </a:prstGeom>
+          <a:noFill/>
+        </p:spPr>
+        <p:txBody>
+          <a:bodyPr wrap="square">
+            <a:spAutoFit/>
+          </a:bodyPr>
+          <a:lstStyle/>
+          <a:p>
+            <a:pPr algn="l">
+              <a:defRPr sz="2800" b="1" i="0">
+                <a:solidFill>
+                  <a:srgbClr val="FFFFFF"/>
+                </a:solidFill>
+                <a:latin typeface="Calibri"/>
+              </a:defRPr>
+            </a:pPr>
+            <a:r>
+              <a:t>Daryna Rudavka</a:t>
+            </a:r>
+          </a:p>
+        </p:txBody>
+      </p:sp>
+      <p:sp>
+        <p:nvSpPr>
+          <p:cNvPr id="6" name="TextBox 5"/>
+          <p:cNvSpPr txBox="1"/>
+          <p:nvPr/>
+        </p:nvSpPr>
+        <p:spPr>
+          <a:xfrm>
+            <a:off x="1097280" y="2743200"/>
+            <a:ext cx="9966960" cy="365760"/>
+          </a:xfrm>
+          <a:prstGeom prst="rect">
+            <a:avLst/>
+          </a:prstGeom>
+          <a:noFill/>
+        </p:spPr>
+        <p:txBody>
+          <a:bodyPr wrap="square">
+            <a:spAutoFit/>
+          </a:bodyPr>
+          <a:lstStyle/>
+          <a:p>
+            <a:pPr algn="l">
+              <a:defRPr sz="1400" b="0" i="0">
+                <a:solidFill>
+                  <a:srgbClr val="8F95A3"/>
+                </a:solidFill>
+                <a:latin typeface="Calibri"/>
+              </a:defRPr>
+            </a:pPr>
+            <a:r>
+              <a:t>March 03</a:t>
+            </a:r>
+          </a:p>
+        </p:txBody>
+      </p:sp>
+      <p:sp>
+        <p:nvSpPr>
+          <p:cNvPr id="7" name="TextBox 6"/>
+          <p:cNvSpPr txBox="1"/>
+          <p:nvPr/>
+        </p:nvSpPr>
+        <p:spPr>
+          <a:xfrm>
+            <a:off x="1097280" y="3291840"/>
+            <a:ext cx="9966960" cy="914400"/>
+          </a:xfrm>
+          <a:prstGeom prst="rect">
+            <a:avLst/>
+          </a:prstGeom>
+          <a:noFill/>
+        </p:spPr>
+        <p:txBody>
+          <a:bodyPr wrap="square">
+            <a:spAutoFit/>
+          </a:bodyPr>
+          <a:lstStyle/>
+          <a:p>
+            <a:pPr algn="l">
+              <a:defRPr sz="1600" b="0" i="0">
+                <a:solidFill>
+                  <a:srgbClr val="E2E2EA"/>
+                </a:solidFill>
+                <a:latin typeface="Calibri"/>
+              </a:defRPr>
+            </a:pPr>
+            <a:r>
+              <a:t>Wishing you an amazing day filled with joy and celebration!</a:t>
+            </a:r>
+          </a:p>
+        </p:txBody>
+      </p:sp>
+      <p:sp>
+        <p:nvSpPr>
+          <p:cNvPr id="8" name="TextBox 7"/>
+          <p:cNvSpPr txBox="1"/>
+          <p:nvPr/>
+        </p:nvSpPr>
+        <p:spPr>
+          <a:xfrm>
+            <a:off x="1097280" y="4572000"/>
+            <a:ext cx="9966960" cy="457200"/>
+          </a:xfrm>
+          <a:prstGeom prst="rect">
+            <a:avLst/>
+          </a:prstGeom>
+          <a:noFill/>
+        </p:spPr>
+        <p:txBody>
+          <a:bodyPr wrap="square">
+            <a:spAutoFit/>
+          </a:bodyPr>
+          <a:lstStyle/>
+          <a:p>
+            <a:pPr algn="l">
+              <a:defRPr sz="1400" b="0" i="1">
+                <a:solidFill>
+                  <a:srgbClr val="FFB72B"/>
+                </a:solidFill>
+                <a:latin typeface="Calibri"/>
+              </a:defRPr>
+            </a:pPr>
+            <a:r>
+              <a:t>With love, Your Appodeal Team 💜</a:t>
+            </a:r>
+          </a:p>
+        </p:txBody>
+      </p:sp>
+    </p:spTree>
+  </p:cSld>
+  <p:clrMapOvr>
+    <a:masterClrMapping/>
+  </p:clrMapOvr>
+</p:sld>
+</file>
+
+<file path=ppt/slides/slide8.xml><?xml version="1.0" encoding="utf-8"?>
+<p:sld xmlns:a="http://schemas.openxmlformats.org/drawingml/2006/main" xmlns:p="http://schemas.openxmlformats.org/presentationml/2006/main" xmlns:r="http://schemas.openxmlformats.org/officeDocument/2006/relationships">
+  <p:cSld>
+    <p:bg>
+      <p:bgPr>
+        <a:solidFill>
+          <a:srgbClr val="08080C"/>
+        </a:solidFill>
+        <a:effectLst/>
+      </p:bgPr>
+    </p:bg>
+    <p:spTree>
+      <p:nvGrpSpPr>
+        <p:cNvPr id="1" name=""/>
+        <p:cNvGrpSpPr/>
+        <p:nvPr/>
+      </p:nvGrpSpPr>
+      <p:grpSpPr/>
+      <p:sp>
+        <p:nvSpPr>
+          <p:cNvPr id="2" name="Rectangle 1"/>
+          <p:cNvSpPr/>
+          <p:nvPr/>
+        </p:nvSpPr>
+        <p:spPr>
+          <a:xfrm>
+            <a:off x="0" y="365760"/>
+            <a:ext cx="12191695" cy="54864"/>
+          </a:xfrm>
+          <a:prstGeom prst="rect">
+            <a:avLst/>
+          </a:prstGeom>
+          <a:solidFill>
+            <a:srgbClr val="FFB72B"/>
+          </a:solidFill>
+          <a:ln>
+            <a:noFill/>
+          </a:ln>
+        </p:spPr>
+        <p:style>
+          <a:lnRef idx="1">
+            <a:schemeClr val="accent1"/>
+          </a:lnRef>
+          <a:fillRef idx="3">
+            <a:schemeClr val="accent1"/>
+          </a:fillRef>
+          <a:effectRef idx="2">
+            <a:schemeClr val="accent1"/>
+          </a:effectRef>
+          <a:fontRef idx="minor">
+            <a:schemeClr val="lt1"/>
+          </a:fontRef>
+        </p:style>
+        <p:txBody>
+          <a:bodyPr rtlCol="0" anchor="ctr"/>
+          <a:lstStyle/>
+          <a:p>
+            <a:pPr algn="ctr"/>
+          </a:p>
+        </p:txBody>
+      </p:sp>
+      <p:sp>
+        <p:nvSpPr>
+          <p:cNvPr id="3" name="TextBox 2"/>
+          <p:cNvSpPr txBox="1"/>
+          <p:nvPr/>
+        </p:nvSpPr>
+        <p:spPr>
+          <a:xfrm>
+            <a:off x="1097280" y="731520"/>
+            <a:ext cx="3657600" cy="365760"/>
+          </a:xfrm>
+          <a:prstGeom prst="rect">
+            <a:avLst/>
+          </a:prstGeom>
+          <a:noFill/>
+        </p:spPr>
+        <p:txBody>
+          <a:bodyPr wrap="none">
+            <a:spAutoFit/>
+          </a:bodyPr>
+          <a:lstStyle/>
+          <a:p>
+            <a:pPr algn="l">
+              <a:defRPr sz="1000" b="1">
+                <a:solidFill>
+                  <a:srgbClr val="FFB72B"/>
+                </a:solidFill>
+                <a:latin typeface="Calibri"/>
+              </a:defRPr>
+            </a:pPr>
+            <a:r>
+              <a:t>🎂  CELEBRATION</a:t>
+            </a:r>
+          </a:p>
+        </p:txBody>
+      </p:sp>
+      <p:sp>
+        <p:nvSpPr>
+          <p:cNvPr id="4" name="TextBox 3"/>
+          <p:cNvSpPr txBox="1"/>
+          <p:nvPr/>
+        </p:nvSpPr>
+        <p:spPr>
+          <a:xfrm>
+            <a:off x="1097280" y="1188720"/>
+            <a:ext cx="9966960" cy="731520"/>
+          </a:xfrm>
+          <a:prstGeom prst="rect">
+            <a:avLst/>
+          </a:prstGeom>
+          <a:noFill/>
+        </p:spPr>
+        <p:txBody>
+          <a:bodyPr wrap="square">
+            <a:spAutoFit/>
+          </a:bodyPr>
+          <a:lstStyle/>
+          <a:p>
+            <a:pPr algn="l">
+              <a:defRPr sz="3200" b="1" i="0">
+                <a:solidFill>
+                  <a:srgbClr val="FFB72B"/>
+                </a:solidFill>
+                <a:latin typeface="Calibri"/>
+              </a:defRPr>
+            </a:pPr>
+            <a:r>
+              <a:t>Happy Birthday!</a:t>
+            </a:r>
+          </a:p>
+        </p:txBody>
+      </p:sp>
+      <p:sp>
+        <p:nvSpPr>
+          <p:cNvPr id="5" name="TextBox 4"/>
+          <p:cNvSpPr txBox="1"/>
+          <p:nvPr/>
+        </p:nvSpPr>
+        <p:spPr>
+          <a:xfrm>
+            <a:off x="1097280" y="2103120"/>
+            <a:ext cx="9966960" cy="640080"/>
+          </a:xfrm>
+          <a:prstGeom prst="rect">
+            <a:avLst/>
+          </a:prstGeom>
+          <a:noFill/>
+        </p:spPr>
+        <p:txBody>
+          <a:bodyPr wrap="square">
+            <a:spAutoFit/>
+          </a:bodyPr>
+          <a:lstStyle/>
+          <a:p>
+            <a:pPr algn="l">
+              <a:defRPr sz="2800" b="1" i="0">
+                <a:solidFill>
+                  <a:srgbClr val="FFFFFF"/>
+                </a:solidFill>
+                <a:latin typeface="Calibri"/>
+              </a:defRPr>
+            </a:pPr>
+            <a:r>
+              <a:t>Anton Nikifarau</a:t>
+            </a:r>
+          </a:p>
+        </p:txBody>
+      </p:sp>
+      <p:sp>
+        <p:nvSpPr>
+          <p:cNvPr id="6" name="TextBox 5"/>
+          <p:cNvSpPr txBox="1"/>
+          <p:nvPr/>
+        </p:nvSpPr>
+        <p:spPr>
+          <a:xfrm>
+            <a:off x="1097280" y="2743200"/>
+            <a:ext cx="9966960" cy="365760"/>
+          </a:xfrm>
+          <a:prstGeom prst="rect">
+            <a:avLst/>
+          </a:prstGeom>
+          <a:noFill/>
+        </p:spPr>
+        <p:txBody>
+          <a:bodyPr wrap="square">
+            <a:spAutoFit/>
+          </a:bodyPr>
+          <a:lstStyle/>
+          <a:p>
+            <a:pPr algn="l">
+              <a:defRPr sz="1400" b="0" i="0">
+                <a:solidFill>
+                  <a:srgbClr val="8F95A3"/>
+                </a:solidFill>
+                <a:latin typeface="Calibri"/>
+              </a:defRPr>
+            </a:pPr>
+            <a:r>
+              <a:t>March 03</a:t>
+            </a:r>
+          </a:p>
+        </p:txBody>
+      </p:sp>
+      <p:sp>
+        <p:nvSpPr>
+          <p:cNvPr id="7" name="TextBox 6"/>
+          <p:cNvSpPr txBox="1"/>
+          <p:nvPr/>
+        </p:nvSpPr>
+        <p:spPr>
+          <a:xfrm>
+            <a:off x="1097280" y="3291840"/>
+            <a:ext cx="9966960" cy="914400"/>
+          </a:xfrm>
+          <a:prstGeom prst="rect">
+            <a:avLst/>
+          </a:prstGeom>
+          <a:noFill/>
+        </p:spPr>
+        <p:txBody>
+          <a:bodyPr wrap="square">
+            <a:spAutoFit/>
+          </a:bodyPr>
+          <a:lstStyle/>
+          <a:p>
+            <a:pPr algn="l">
+              <a:defRPr sz="1600" b="0" i="0">
+                <a:solidFill>
+                  <a:srgbClr val="E2E2EA"/>
+                </a:solidFill>
+                <a:latin typeface="Calibri"/>
+              </a:defRPr>
+            </a:pPr>
+            <a:r>
+              <a:t>Wishing you an amazing day filled with joy and celebration!</a:t>
+            </a:r>
+          </a:p>
+        </p:txBody>
+      </p:sp>
+      <p:sp>
+        <p:nvSpPr>
+          <p:cNvPr id="8" name="TextBox 7"/>
+          <p:cNvSpPr txBox="1"/>
+          <p:nvPr/>
+        </p:nvSpPr>
+        <p:spPr>
+          <a:xfrm>
+            <a:off x="1097280" y="4572000"/>
+            <a:ext cx="9966960" cy="457200"/>
+          </a:xfrm>
+          <a:prstGeom prst="rect">
+            <a:avLst/>
+          </a:prstGeom>
+          <a:noFill/>
+        </p:spPr>
+        <p:txBody>
+          <a:bodyPr wrap="square">
+            <a:spAutoFit/>
+          </a:bodyPr>
+          <a:lstStyle/>
+          <a:p>
+            <a:pPr algn="l">
+              <a:defRPr sz="1400" b="0" i="1">
+                <a:solidFill>
+                  <a:srgbClr val="FFB72B"/>
+                </a:solidFill>
+                <a:latin typeface="Calibri"/>
+              </a:defRPr>
+            </a:pPr>
+            <a:r>
+              <a:t>With love, Your Appodeal Team 💜</a:t>
+            </a:r>
+          </a:p>
+        </p:txBody>
+      </p:sp>
+    </p:spTree>
+  </p:cSld>
+  <p:clrMapOvr>
+    <a:masterClrMapping/>
+  </p:clrMapOvr>
+</p:sld>
+</file>
+
+<file path=ppt/slides/slide9.xml><?xml version="1.0" encoding="utf-8"?>
+<p:sld xmlns:a="http://schemas.openxmlformats.org/drawingml/2006/main" xmlns:p="http://schemas.openxmlformats.org/presentationml/2006/main" xmlns:r="http://schemas.openxmlformats.org/officeDocument/2006/relationships">
+  <p:cSld>
+    <p:bg>
+      <p:bgPr>
+        <a:solidFill>
+          <a:srgbClr val="08080C"/>
+        </a:solidFill>
+        <a:effectLst/>
+      </p:bgPr>
+    </p:bg>
+    <p:spTree>
+      <p:nvGrpSpPr>
+        <p:cNvPr id="1" name=""/>
+        <p:cNvGrpSpPr/>
+        <p:nvPr/>
+      </p:nvGrpSpPr>
+      <p:grpSpPr/>
+      <p:sp>
+        <p:nvSpPr>
+          <p:cNvPr id="2" name="Rectangle 1"/>
+          <p:cNvSpPr/>
+          <p:nvPr/>
+        </p:nvSpPr>
+        <p:spPr>
+          <a:xfrm>
+            <a:off x="0" y="365760"/>
+            <a:ext cx="12191695" cy="54864"/>
+          </a:xfrm>
+          <a:prstGeom prst="rect">
+            <a:avLst/>
+          </a:prstGeom>
+          <a:solidFill>
+            <a:srgbClr val="FFB72B"/>
+          </a:solidFill>
+          <a:ln>
+            <a:noFill/>
+          </a:ln>
+        </p:spPr>
+        <p:style>
+          <a:lnRef idx="1">
+            <a:schemeClr val="accent1"/>
+          </a:lnRef>
+          <a:fillRef idx="3">
+            <a:schemeClr val="accent1"/>
+          </a:fillRef>
+          <a:effectRef idx="2">
+            <a:schemeClr val="accent1"/>
+          </a:effectRef>
+          <a:fontRef idx="minor">
+            <a:schemeClr val="lt1"/>
+          </a:fontRef>
+        </p:style>
+        <p:txBody>
+          <a:bodyPr rtlCol="0" anchor="ctr"/>
+          <a:lstStyle/>
+          <a:p>
+            <a:pPr algn="ctr"/>
+          </a:p>
+        </p:txBody>
+      </p:sp>
+      <p:sp>
+        <p:nvSpPr>
+          <p:cNvPr id="3" name="TextBox 2"/>
+          <p:cNvSpPr txBox="1"/>
+          <p:nvPr/>
+        </p:nvSpPr>
+        <p:spPr>
+          <a:xfrm>
+            <a:off x="1097280" y="731520"/>
+            <a:ext cx="3657600" cy="365760"/>
+          </a:xfrm>
+          <a:prstGeom prst="rect">
+            <a:avLst/>
+          </a:prstGeom>
+          <a:noFill/>
+        </p:spPr>
+        <p:txBody>
+          <a:bodyPr wrap="none">
+            <a:spAutoFit/>
+          </a:bodyPr>
+          <a:lstStyle/>
+          <a:p>
+            <a:pPr algn="l">
+              <a:defRPr sz="1000" b="1">
+                <a:solidFill>
+                  <a:srgbClr val="FFB72B"/>
+                </a:solidFill>
+                <a:latin typeface="Calibri"/>
+              </a:defRPr>
+            </a:pPr>
+            <a:r>
+              <a:t>🎂  CELEBRATION</a:t>
+            </a:r>
+          </a:p>
+        </p:txBody>
+      </p:sp>
+      <p:sp>
+        <p:nvSpPr>
+          <p:cNvPr id="4" name="TextBox 3"/>
+          <p:cNvSpPr txBox="1"/>
+          <p:nvPr/>
+        </p:nvSpPr>
+        <p:spPr>
+          <a:xfrm>
+            <a:off x="1097280" y="1188720"/>
+            <a:ext cx="9966960" cy="731520"/>
+          </a:xfrm>
+          <a:prstGeom prst="rect">
+            <a:avLst/>
+          </a:prstGeom>
+          <a:noFill/>
+        </p:spPr>
+        <p:txBody>
+          <a:bodyPr wrap="square">
+            <a:spAutoFit/>
+          </a:bodyPr>
+          <a:lstStyle/>
+          <a:p>
+            <a:pPr algn="l">
+              <a:defRPr sz="3200" b="1" i="0">
+                <a:solidFill>
+                  <a:srgbClr val="FFB72B"/>
+                </a:solidFill>
+                <a:latin typeface="Calibri"/>
+              </a:defRPr>
+            </a:pPr>
+            <a:r>
+              <a:t>Happy Birthday!</a:t>
+            </a:r>
+          </a:p>
+        </p:txBody>
+      </p:sp>
+      <p:sp>
+        <p:nvSpPr>
+          <p:cNvPr id="5" name="TextBox 4"/>
+          <p:cNvSpPr txBox="1"/>
+          <p:nvPr/>
+        </p:nvSpPr>
+        <p:spPr>
+          <a:xfrm>
+            <a:off x="1097280" y="2103120"/>
+            <a:ext cx="9966960" cy="640080"/>
+          </a:xfrm>
+          <a:prstGeom prst="rect">
+            <a:avLst/>
+          </a:prstGeom>
+          <a:noFill/>
+        </p:spPr>
+        <p:txBody>
+          <a:bodyPr wrap="square">
+            <a:spAutoFit/>
+          </a:bodyPr>
+          <a:lstStyle/>
+          <a:p>
+            <a:pPr algn="l">
+              <a:defRPr sz="2800" b="1" i="0">
+                <a:solidFill>
+                  <a:srgbClr val="FFFFFF"/>
+                </a:solidFill>
+                <a:latin typeface="Calibri"/>
+              </a:defRPr>
+            </a:pPr>
+            <a:r>
+              <a:t>Vladimir Khrolovich</a:t>
+            </a:r>
+          </a:p>
+        </p:txBody>
+      </p:sp>
+      <p:sp>
+        <p:nvSpPr>
+          <p:cNvPr id="6" name="TextBox 5"/>
+          <p:cNvSpPr txBox="1"/>
+          <p:nvPr/>
+        </p:nvSpPr>
+        <p:spPr>
+          <a:xfrm>
+            <a:off x="1097280" y="2743200"/>
+            <a:ext cx="9966960" cy="365760"/>
+          </a:xfrm>
+          <a:prstGeom prst="rect">
+            <a:avLst/>
+          </a:prstGeom>
+          <a:noFill/>
+        </p:spPr>
+        <p:txBody>
+          <a:bodyPr wrap="square">
+            <a:spAutoFit/>
+          </a:bodyPr>
+          <a:lstStyle/>
+          <a:p>
+            <a:pPr algn="l">
+              <a:defRPr sz="1400" b="0" i="0">
+                <a:solidFill>
+                  <a:srgbClr val="8F95A3"/>
+                </a:solidFill>
+                <a:latin typeface="Calibri"/>
+              </a:defRPr>
+            </a:pPr>
+            <a:r>
+              <a:t>March 03</a:t>
+            </a:r>
+          </a:p>
+        </p:txBody>
+      </p:sp>
+      <p:sp>
+        <p:nvSpPr>
+          <p:cNvPr id="7" name="TextBox 6"/>
+          <p:cNvSpPr txBox="1"/>
+          <p:nvPr/>
+        </p:nvSpPr>
+        <p:spPr>
+          <a:xfrm>
+            <a:off x="1097280" y="3291840"/>
+            <a:ext cx="9966960" cy="914400"/>
+          </a:xfrm>
+          <a:prstGeom prst="rect">
+            <a:avLst/>
+          </a:prstGeom>
+          <a:noFill/>
+        </p:spPr>
+        <p:txBody>
+          <a:bodyPr wrap="square">
+            <a:spAutoFit/>
+          </a:bodyPr>
+          <a:lstStyle/>
+          <a:p>
+            <a:pPr algn="l">
+              <a:defRPr sz="1600" b="0" i="0">
+                <a:solidFill>
+                  <a:srgbClr val="E2E2EA"/>
+                </a:solidFill>
+                <a:latin typeface="Calibri"/>
+              </a:defRPr>
+            </a:pPr>
+            <a:r>
+              <a:t>Wishing you an amazing day filled with joy and celebration!</a:t>
+            </a:r>
+          </a:p>
+        </p:txBody>
+      </p:sp>
+      <p:sp>
+        <p:nvSpPr>
+          <p:cNvPr id="8" name="TextBox 7"/>
+          <p:cNvSpPr txBox="1"/>
+          <p:nvPr/>
+        </p:nvSpPr>
+        <p:spPr>
+          <a:xfrm>
+            <a:off x="1097280" y="4572000"/>
+            <a:ext cx="9966960" cy="457200"/>
+          </a:xfrm>
+          <a:prstGeom prst="rect">
+            <a:avLst/>
+          </a:prstGeom>
+          <a:noFill/>
+        </p:spPr>
+        <p:txBody>
+          <a:bodyPr wrap="square">
+            <a:spAutoFit/>
+          </a:bodyPr>
+          <a:lstStyle/>
+          <a:p>
+            <a:pPr algn="l">
+              <a:defRPr sz="1400" b="0" i="1">
+                <a:solidFill>
+                  <a:srgbClr val="FFB72B"/>
+                </a:solidFill>
+                <a:latin typeface="Calibri"/>
+              </a:defRPr>
+            </a:pPr>
+            <a:r>
+              <a:t>With love, Your Appodeal Team 💜</a:t>
             </a:r>
           </a:p>
         </p:txBody>
